--- a/Slide/Bài 6.pptx
+++ b/Slide/Bài 6.pptx
@@ -5,29 +5,36 @@
     <p:sldMasterId id="2147483706" r:id="rId1"/>
   </p:sldMasterIdLst>
   <p:notesMasterIdLst>
-    <p:notesMasterId r:id="rId4"/>
+    <p:notesMasterId r:id="rId11"/>
   </p:notesMasterIdLst>
   <p:sldIdLst>
     <p:sldId id="256" r:id="rId2"/>
     <p:sldId id="257" r:id="rId3"/>
+    <p:sldId id="260" r:id="rId4"/>
+    <p:sldId id="261" r:id="rId5"/>
+    <p:sldId id="262" r:id="rId6"/>
+    <p:sldId id="263" r:id="rId7"/>
+    <p:sldId id="264" r:id="rId8"/>
+    <p:sldId id="265" r:id="rId9"/>
+    <p:sldId id="266" r:id="rId10"/>
   </p:sldIdLst>
   <p:sldSz cx="12192000" cy="6858000"/>
   <p:notesSz cx="6858000" cy="9144000"/>
   <p:embeddedFontLst>
     <p:embeddedFont>
       <p:font typeface="Impact" panose="020B0806030902050204" pitchFamily="34" charset="0"/>
-      <p:regular r:id="rId5"/>
+      <p:regular r:id="rId12"/>
     </p:embeddedFont>
     <p:embeddedFont>
       <p:font typeface="Trebuchet MS" panose="020B0603020202020204" pitchFamily="34" charset="0"/>
-      <p:regular r:id="rId6"/>
-      <p:bold r:id="rId7"/>
-      <p:italic r:id="rId8"/>
-      <p:boldItalic r:id="rId9"/>
+      <p:regular r:id="rId13"/>
+      <p:bold r:id="rId14"/>
+      <p:italic r:id="rId15"/>
+      <p:boldItalic r:id="rId16"/>
     </p:embeddedFont>
     <p:embeddedFont>
       <p:font typeface="Wingdings 3" panose="05040102010807070707" pitchFamily="18" charset="2"/>
-      <p:regular r:id="rId10"/>
+      <p:regular r:id="rId17"/>
     </p:embeddedFont>
   </p:embeddedFontLst>
   <p:defaultTextStyle>
@@ -141,7 +148,7 @@
       </p15:sldGuideLst>
     </p:ext>
     <p:ext uri="GoogleSlidesCustomDataVersion2">
-      <go:slidesCustomData xmlns:go="http://customooxmlschemas.google.com/" xmlns:ahyp="http://schemas.microsoft.com/office/drawing/2018/hyperlinkcolor" xmlns:p15="http://schemas.microsoft.com/office/powerpoint/2012/main" xmlns:p14="http://schemas.microsoft.com/office/powerpoint/2010/main" xmlns:com="http://schemas.openxmlformats.org/drawingml/2006/compatibility" xmlns:pvml="urn:schemas-microsoft-com:office:powerpoint" xmlns:v="urn:schemas-microsoft-com:vml" xmlns:o="urn:schemas-microsoft-com:office:office" xmlns:dgm="http://schemas.openxmlformats.org/drawingml/2006/diagram" xmlns:c="http://schemas.openxmlformats.org/drawingml/2006/chart" xmlns:mv="urn:schemas-microsoft-com:mac:vml" xmlns:mc="http://schemas.openxmlformats.org/markup-compatibility/2006" xmlns="" r:id="rId160" roundtripDataSignature="AMtx7mhrTw11pZgumZFE/jrXWOBqTLd87w=="/>
+      <go:slidesCustomData xmlns="" xmlns:mc="http://schemas.openxmlformats.org/markup-compatibility/2006" xmlns:mv="urn:schemas-microsoft-com:mac:vml" xmlns:c="http://schemas.openxmlformats.org/drawingml/2006/chart" xmlns:dgm="http://schemas.openxmlformats.org/drawingml/2006/diagram" xmlns:o="urn:schemas-microsoft-com:office:office" xmlns:v="urn:schemas-microsoft-com:vml" xmlns:pvml="urn:schemas-microsoft-com:office:powerpoint" xmlns:com="http://schemas.openxmlformats.org/drawingml/2006/compatibility" xmlns:p14="http://schemas.microsoft.com/office/powerpoint/2010/main" xmlns:p15="http://schemas.microsoft.com/office/powerpoint/2012/main" xmlns:ahyp="http://schemas.microsoft.com/office/drawing/2018/hyperlinkcolor" xmlns:go="http://customooxmlschemas.google.com/" r:id="rId160" roundtripDataSignature="AMtx7mhrTw11pZgumZFE/jrXWOBqTLd87w=="/>
     </p:ext>
   </p:extLst>
 </p:presentation>
@@ -1541,6 +1548,872 @@
         </p:spPr>
       </p:sp>
     </p:spTree>
+  </p:cSld>
+  <p:clrMapOvr>
+    <a:masterClrMapping/>
+  </p:clrMapOvr>
+</p:notes>
+</file>
+
+<file path=ppt/notesSlides/notesSlide3.xml><?xml version="1.0" encoding="utf-8"?>
+<p:notes xmlns:a="http://schemas.openxmlformats.org/drawingml/2006/main" xmlns:r="http://schemas.openxmlformats.org/officeDocument/2006/relationships" xmlns:p="http://schemas.openxmlformats.org/presentationml/2006/main" showMasterSp="0" showMasterPhAnim="0">
+  <p:cSld>
+    <p:spTree>
+      <p:nvGrpSpPr>
+        <p:cNvPr id="1" name="Shape 183"/>
+        <p:cNvGrpSpPr/>
+        <p:nvPr/>
+      </p:nvGrpSpPr>
+      <p:grpSpPr>
+        <a:xfrm>
+          <a:off x="0" y="0"/>
+          <a:ext cx="0" cy="0"/>
+          <a:chOff x="0" y="0"/>
+          <a:chExt cx="0" cy="0"/>
+        </a:xfrm>
+      </p:grpSpPr>
+      <p:sp>
+        <p:nvSpPr>
+          <p:cNvPr id="184" name="Google Shape;184;p5:notes"/>
+          <p:cNvSpPr txBox="1">
+            <a:spLocks noGrp="1"/>
+          </p:cNvSpPr>
+          <p:nvPr>
+            <p:ph type="body" idx="1"/>
+          </p:nvPr>
+        </p:nvSpPr>
+        <p:spPr>
+          <a:xfrm>
+            <a:off x="685800" y="4400550"/>
+            <a:ext cx="5486400" cy="3600450"/>
+          </a:xfrm>
+          <a:prstGeom prst="rect">
+            <a:avLst/>
+          </a:prstGeom>
+        </p:spPr>
+        <p:txBody>
+          <a:bodyPr spcFirstLastPara="1" wrap="square" lIns="91425" tIns="45700" rIns="91425" bIns="45700" anchor="t" anchorCtr="0">
+            <a:noAutofit/>
+          </a:bodyPr>
+          <a:lstStyle/>
+          <a:p>
+            <a:pPr marL="0" lvl="0" indent="0" algn="l" rtl="0">
+              <a:spcBef>
+                <a:spcPts val="0"/>
+              </a:spcBef>
+              <a:spcAft>
+                <a:spcPts val="0"/>
+              </a:spcAft>
+              <a:buNone/>
+            </a:pPr>
+            <a:endParaRPr/>
+          </a:p>
+        </p:txBody>
+      </p:sp>
+      <p:sp>
+        <p:nvSpPr>
+          <p:cNvPr id="185" name="Google Shape;185;p5:notes"/>
+          <p:cNvSpPr>
+            <a:spLocks noGrp="1" noRot="1" noChangeAspect="1"/>
+          </p:cNvSpPr>
+          <p:nvPr>
+            <p:ph type="sldImg" idx="2"/>
+          </p:nvPr>
+        </p:nvSpPr>
+        <p:spPr>
+          <a:xfrm>
+            <a:off x="685800" y="1143000"/>
+            <a:ext cx="5486400" cy="3086100"/>
+          </a:xfrm>
+          <a:custGeom>
+            <a:avLst/>
+            <a:gdLst/>
+            <a:ahLst/>
+            <a:cxnLst/>
+            <a:rect l="l" t="t" r="r" b="b"/>
+            <a:pathLst>
+              <a:path w="120000" h="120000" extrusionOk="0">
+                <a:moveTo>
+                  <a:pt x="0" y="0"/>
+                </a:moveTo>
+                <a:lnTo>
+                  <a:pt x="120000" y="0"/>
+                </a:lnTo>
+                <a:lnTo>
+                  <a:pt x="120000" y="120000"/>
+                </a:lnTo>
+                <a:lnTo>
+                  <a:pt x="0" y="120000"/>
+                </a:lnTo>
+                <a:close/>
+              </a:path>
+            </a:pathLst>
+          </a:custGeom>
+        </p:spPr>
+      </p:sp>
+    </p:spTree>
+  </p:cSld>
+  <p:clrMapOvr>
+    <a:masterClrMapping/>
+  </p:clrMapOvr>
+</p:notes>
+</file>
+
+<file path=ppt/notesSlides/notesSlide4.xml><?xml version="1.0" encoding="utf-8"?>
+<p:notes xmlns:a="http://schemas.openxmlformats.org/drawingml/2006/main" xmlns:r="http://schemas.openxmlformats.org/officeDocument/2006/relationships" xmlns:p="http://schemas.openxmlformats.org/presentationml/2006/main" showMasterSp="0" showMasterPhAnim="0">
+  <p:cSld>
+    <p:spTree>
+      <p:nvGrpSpPr>
+        <p:cNvPr id="1" name="Shape 183">
+          <a:extLst>
+            <a:ext uri="{FF2B5EF4-FFF2-40B4-BE49-F238E27FC236}">
+              <a16:creationId xmlns:a16="http://schemas.microsoft.com/office/drawing/2014/main" id="{5CB2DC24-8026-55B8-CA43-E964DE53A64E}"/>
+            </a:ext>
+          </a:extLst>
+        </p:cNvPr>
+        <p:cNvGrpSpPr/>
+        <p:nvPr/>
+      </p:nvGrpSpPr>
+      <p:grpSpPr>
+        <a:xfrm>
+          <a:off x="0" y="0"/>
+          <a:ext cx="0" cy="0"/>
+          <a:chOff x="0" y="0"/>
+          <a:chExt cx="0" cy="0"/>
+        </a:xfrm>
+      </p:grpSpPr>
+      <p:sp>
+        <p:nvSpPr>
+          <p:cNvPr id="184" name="Google Shape;184;p5:notes">
+            <a:extLst>
+              <a:ext uri="{FF2B5EF4-FFF2-40B4-BE49-F238E27FC236}">
+                <a16:creationId xmlns:a16="http://schemas.microsoft.com/office/drawing/2014/main" id="{FF28F591-4165-F8BF-083C-57C3F5B1DD5A}"/>
+              </a:ext>
+            </a:extLst>
+          </p:cNvPr>
+          <p:cNvSpPr txBox="1">
+            <a:spLocks noGrp="1"/>
+          </p:cNvSpPr>
+          <p:nvPr>
+            <p:ph type="body" idx="1"/>
+          </p:nvPr>
+        </p:nvSpPr>
+        <p:spPr>
+          <a:xfrm>
+            <a:off x="685800" y="4400550"/>
+            <a:ext cx="5486400" cy="3600450"/>
+          </a:xfrm>
+          <a:prstGeom prst="rect">
+            <a:avLst/>
+          </a:prstGeom>
+        </p:spPr>
+        <p:txBody>
+          <a:bodyPr spcFirstLastPara="1" wrap="square" lIns="91425" tIns="45700" rIns="91425" bIns="45700" anchor="t" anchorCtr="0">
+            <a:noAutofit/>
+          </a:bodyPr>
+          <a:lstStyle/>
+          <a:p>
+            <a:pPr marL="0" lvl="0" indent="0" algn="l" rtl="0">
+              <a:spcBef>
+                <a:spcPts val="0"/>
+              </a:spcBef>
+              <a:spcAft>
+                <a:spcPts val="0"/>
+              </a:spcAft>
+              <a:buNone/>
+            </a:pPr>
+            <a:endParaRPr/>
+          </a:p>
+        </p:txBody>
+      </p:sp>
+      <p:sp>
+        <p:nvSpPr>
+          <p:cNvPr id="185" name="Google Shape;185;p5:notes">
+            <a:extLst>
+              <a:ext uri="{FF2B5EF4-FFF2-40B4-BE49-F238E27FC236}">
+                <a16:creationId xmlns:a16="http://schemas.microsoft.com/office/drawing/2014/main" id="{0E35050C-F409-147E-0FC6-2202342442F5}"/>
+              </a:ext>
+            </a:extLst>
+          </p:cNvPr>
+          <p:cNvSpPr>
+            <a:spLocks noGrp="1" noRot="1" noChangeAspect="1"/>
+          </p:cNvSpPr>
+          <p:nvPr>
+            <p:ph type="sldImg" idx="2"/>
+          </p:nvPr>
+        </p:nvSpPr>
+        <p:spPr>
+          <a:xfrm>
+            <a:off x="685800" y="1143000"/>
+            <a:ext cx="5486400" cy="3086100"/>
+          </a:xfrm>
+          <a:custGeom>
+            <a:avLst/>
+            <a:gdLst/>
+            <a:ahLst/>
+            <a:cxnLst/>
+            <a:rect l="l" t="t" r="r" b="b"/>
+            <a:pathLst>
+              <a:path w="120000" h="120000" extrusionOk="0">
+                <a:moveTo>
+                  <a:pt x="0" y="0"/>
+                </a:moveTo>
+                <a:lnTo>
+                  <a:pt x="120000" y="0"/>
+                </a:lnTo>
+                <a:lnTo>
+                  <a:pt x="120000" y="120000"/>
+                </a:lnTo>
+                <a:lnTo>
+                  <a:pt x="0" y="120000"/>
+                </a:lnTo>
+                <a:close/>
+              </a:path>
+            </a:pathLst>
+          </a:custGeom>
+        </p:spPr>
+      </p:sp>
+    </p:spTree>
+    <p:extLst>
+      <p:ext uri="{BB962C8B-B14F-4D97-AF65-F5344CB8AC3E}">
+        <p14:creationId xmlns:p14="http://schemas.microsoft.com/office/powerpoint/2010/main" val="1339982176"/>
+      </p:ext>
+    </p:extLst>
+  </p:cSld>
+  <p:clrMapOvr>
+    <a:masterClrMapping/>
+  </p:clrMapOvr>
+</p:notes>
+</file>
+
+<file path=ppt/notesSlides/notesSlide5.xml><?xml version="1.0" encoding="utf-8"?>
+<p:notes xmlns:a="http://schemas.openxmlformats.org/drawingml/2006/main" xmlns:r="http://schemas.openxmlformats.org/officeDocument/2006/relationships" xmlns:p="http://schemas.openxmlformats.org/presentationml/2006/main" showMasterSp="0" showMasterPhAnim="0">
+  <p:cSld>
+    <p:spTree>
+      <p:nvGrpSpPr>
+        <p:cNvPr id="1" name="Shape 183">
+          <a:extLst>
+            <a:ext uri="{FF2B5EF4-FFF2-40B4-BE49-F238E27FC236}">
+              <a16:creationId xmlns:a16="http://schemas.microsoft.com/office/drawing/2014/main" id="{4F0CB980-4865-B9DE-A302-19DCD1E6F986}"/>
+            </a:ext>
+          </a:extLst>
+        </p:cNvPr>
+        <p:cNvGrpSpPr/>
+        <p:nvPr/>
+      </p:nvGrpSpPr>
+      <p:grpSpPr>
+        <a:xfrm>
+          <a:off x="0" y="0"/>
+          <a:ext cx="0" cy="0"/>
+          <a:chOff x="0" y="0"/>
+          <a:chExt cx="0" cy="0"/>
+        </a:xfrm>
+      </p:grpSpPr>
+      <p:sp>
+        <p:nvSpPr>
+          <p:cNvPr id="184" name="Google Shape;184;p5:notes">
+            <a:extLst>
+              <a:ext uri="{FF2B5EF4-FFF2-40B4-BE49-F238E27FC236}">
+                <a16:creationId xmlns:a16="http://schemas.microsoft.com/office/drawing/2014/main" id="{632E9F36-0EC8-3D28-1B51-70F94DC7D232}"/>
+              </a:ext>
+            </a:extLst>
+          </p:cNvPr>
+          <p:cNvSpPr txBox="1">
+            <a:spLocks noGrp="1"/>
+          </p:cNvSpPr>
+          <p:nvPr>
+            <p:ph type="body" idx="1"/>
+          </p:nvPr>
+        </p:nvSpPr>
+        <p:spPr>
+          <a:xfrm>
+            <a:off x="685800" y="4400550"/>
+            <a:ext cx="5486400" cy="3600450"/>
+          </a:xfrm>
+          <a:prstGeom prst="rect">
+            <a:avLst/>
+          </a:prstGeom>
+        </p:spPr>
+        <p:txBody>
+          <a:bodyPr spcFirstLastPara="1" wrap="square" lIns="91425" tIns="45700" rIns="91425" bIns="45700" anchor="t" anchorCtr="0">
+            <a:noAutofit/>
+          </a:bodyPr>
+          <a:lstStyle/>
+          <a:p>
+            <a:pPr marL="0" lvl="0" indent="0" algn="l" rtl="0">
+              <a:spcBef>
+                <a:spcPts val="0"/>
+              </a:spcBef>
+              <a:spcAft>
+                <a:spcPts val="0"/>
+              </a:spcAft>
+              <a:buNone/>
+            </a:pPr>
+            <a:endParaRPr/>
+          </a:p>
+        </p:txBody>
+      </p:sp>
+      <p:sp>
+        <p:nvSpPr>
+          <p:cNvPr id="185" name="Google Shape;185;p5:notes">
+            <a:extLst>
+              <a:ext uri="{FF2B5EF4-FFF2-40B4-BE49-F238E27FC236}">
+                <a16:creationId xmlns:a16="http://schemas.microsoft.com/office/drawing/2014/main" id="{E32A1521-5CDC-D64A-76A2-1982F9AB5E59}"/>
+              </a:ext>
+            </a:extLst>
+          </p:cNvPr>
+          <p:cNvSpPr>
+            <a:spLocks noGrp="1" noRot="1" noChangeAspect="1"/>
+          </p:cNvSpPr>
+          <p:nvPr>
+            <p:ph type="sldImg" idx="2"/>
+          </p:nvPr>
+        </p:nvSpPr>
+        <p:spPr>
+          <a:xfrm>
+            <a:off x="685800" y="1143000"/>
+            <a:ext cx="5486400" cy="3086100"/>
+          </a:xfrm>
+          <a:custGeom>
+            <a:avLst/>
+            <a:gdLst/>
+            <a:ahLst/>
+            <a:cxnLst/>
+            <a:rect l="l" t="t" r="r" b="b"/>
+            <a:pathLst>
+              <a:path w="120000" h="120000" extrusionOk="0">
+                <a:moveTo>
+                  <a:pt x="0" y="0"/>
+                </a:moveTo>
+                <a:lnTo>
+                  <a:pt x="120000" y="0"/>
+                </a:lnTo>
+                <a:lnTo>
+                  <a:pt x="120000" y="120000"/>
+                </a:lnTo>
+                <a:lnTo>
+                  <a:pt x="0" y="120000"/>
+                </a:lnTo>
+                <a:close/>
+              </a:path>
+            </a:pathLst>
+          </a:custGeom>
+        </p:spPr>
+      </p:sp>
+    </p:spTree>
+    <p:extLst>
+      <p:ext uri="{BB962C8B-B14F-4D97-AF65-F5344CB8AC3E}">
+        <p14:creationId xmlns:p14="http://schemas.microsoft.com/office/powerpoint/2010/main" val="1308852043"/>
+      </p:ext>
+    </p:extLst>
+  </p:cSld>
+  <p:clrMapOvr>
+    <a:masterClrMapping/>
+  </p:clrMapOvr>
+</p:notes>
+</file>
+
+<file path=ppt/notesSlides/notesSlide6.xml><?xml version="1.0" encoding="utf-8"?>
+<p:notes xmlns:a="http://schemas.openxmlformats.org/drawingml/2006/main" xmlns:r="http://schemas.openxmlformats.org/officeDocument/2006/relationships" xmlns:p="http://schemas.openxmlformats.org/presentationml/2006/main" showMasterSp="0" showMasterPhAnim="0">
+  <p:cSld>
+    <p:spTree>
+      <p:nvGrpSpPr>
+        <p:cNvPr id="1" name="Shape 183">
+          <a:extLst>
+            <a:ext uri="{FF2B5EF4-FFF2-40B4-BE49-F238E27FC236}">
+              <a16:creationId xmlns:a16="http://schemas.microsoft.com/office/drawing/2014/main" id="{357A101D-DF89-5201-CCF2-E5D031742E72}"/>
+            </a:ext>
+          </a:extLst>
+        </p:cNvPr>
+        <p:cNvGrpSpPr/>
+        <p:nvPr/>
+      </p:nvGrpSpPr>
+      <p:grpSpPr>
+        <a:xfrm>
+          <a:off x="0" y="0"/>
+          <a:ext cx="0" cy="0"/>
+          <a:chOff x="0" y="0"/>
+          <a:chExt cx="0" cy="0"/>
+        </a:xfrm>
+      </p:grpSpPr>
+      <p:sp>
+        <p:nvSpPr>
+          <p:cNvPr id="184" name="Google Shape;184;p5:notes">
+            <a:extLst>
+              <a:ext uri="{FF2B5EF4-FFF2-40B4-BE49-F238E27FC236}">
+                <a16:creationId xmlns:a16="http://schemas.microsoft.com/office/drawing/2014/main" id="{6D5A9EC4-C220-F3AB-B6BF-612D1200DB50}"/>
+              </a:ext>
+            </a:extLst>
+          </p:cNvPr>
+          <p:cNvSpPr txBox="1">
+            <a:spLocks noGrp="1"/>
+          </p:cNvSpPr>
+          <p:nvPr>
+            <p:ph type="body" idx="1"/>
+          </p:nvPr>
+        </p:nvSpPr>
+        <p:spPr>
+          <a:xfrm>
+            <a:off x="685800" y="4400550"/>
+            <a:ext cx="5486400" cy="3600450"/>
+          </a:xfrm>
+          <a:prstGeom prst="rect">
+            <a:avLst/>
+          </a:prstGeom>
+        </p:spPr>
+        <p:txBody>
+          <a:bodyPr spcFirstLastPara="1" wrap="square" lIns="91425" tIns="45700" rIns="91425" bIns="45700" anchor="t" anchorCtr="0">
+            <a:noAutofit/>
+          </a:bodyPr>
+          <a:lstStyle/>
+          <a:p>
+            <a:pPr marL="0" lvl="0" indent="0" algn="l" rtl="0">
+              <a:spcBef>
+                <a:spcPts val="0"/>
+              </a:spcBef>
+              <a:spcAft>
+                <a:spcPts val="0"/>
+              </a:spcAft>
+              <a:buNone/>
+            </a:pPr>
+            <a:endParaRPr/>
+          </a:p>
+        </p:txBody>
+      </p:sp>
+      <p:sp>
+        <p:nvSpPr>
+          <p:cNvPr id="185" name="Google Shape;185;p5:notes">
+            <a:extLst>
+              <a:ext uri="{FF2B5EF4-FFF2-40B4-BE49-F238E27FC236}">
+                <a16:creationId xmlns:a16="http://schemas.microsoft.com/office/drawing/2014/main" id="{C2FFA0E7-9B29-B81F-31F1-A990E28106A5}"/>
+              </a:ext>
+            </a:extLst>
+          </p:cNvPr>
+          <p:cNvSpPr>
+            <a:spLocks noGrp="1" noRot="1" noChangeAspect="1"/>
+          </p:cNvSpPr>
+          <p:nvPr>
+            <p:ph type="sldImg" idx="2"/>
+          </p:nvPr>
+        </p:nvSpPr>
+        <p:spPr>
+          <a:xfrm>
+            <a:off x="685800" y="1143000"/>
+            <a:ext cx="5486400" cy="3086100"/>
+          </a:xfrm>
+          <a:custGeom>
+            <a:avLst/>
+            <a:gdLst/>
+            <a:ahLst/>
+            <a:cxnLst/>
+            <a:rect l="l" t="t" r="r" b="b"/>
+            <a:pathLst>
+              <a:path w="120000" h="120000" extrusionOk="0">
+                <a:moveTo>
+                  <a:pt x="0" y="0"/>
+                </a:moveTo>
+                <a:lnTo>
+                  <a:pt x="120000" y="0"/>
+                </a:lnTo>
+                <a:lnTo>
+                  <a:pt x="120000" y="120000"/>
+                </a:lnTo>
+                <a:lnTo>
+                  <a:pt x="0" y="120000"/>
+                </a:lnTo>
+                <a:close/>
+              </a:path>
+            </a:pathLst>
+          </a:custGeom>
+        </p:spPr>
+      </p:sp>
+    </p:spTree>
+    <p:extLst>
+      <p:ext uri="{BB962C8B-B14F-4D97-AF65-F5344CB8AC3E}">
+        <p14:creationId xmlns:p14="http://schemas.microsoft.com/office/powerpoint/2010/main" val="151657659"/>
+      </p:ext>
+    </p:extLst>
+  </p:cSld>
+  <p:clrMapOvr>
+    <a:masterClrMapping/>
+  </p:clrMapOvr>
+</p:notes>
+</file>
+
+<file path=ppt/notesSlides/notesSlide7.xml><?xml version="1.0" encoding="utf-8"?>
+<p:notes xmlns:a="http://schemas.openxmlformats.org/drawingml/2006/main" xmlns:r="http://schemas.openxmlformats.org/officeDocument/2006/relationships" xmlns:p="http://schemas.openxmlformats.org/presentationml/2006/main" showMasterSp="0" showMasterPhAnim="0">
+  <p:cSld>
+    <p:spTree>
+      <p:nvGrpSpPr>
+        <p:cNvPr id="1" name="Shape 183">
+          <a:extLst>
+            <a:ext uri="{FF2B5EF4-FFF2-40B4-BE49-F238E27FC236}">
+              <a16:creationId xmlns:a16="http://schemas.microsoft.com/office/drawing/2014/main" id="{78B098C8-FF38-998A-83D5-1F29DF7BA17F}"/>
+            </a:ext>
+          </a:extLst>
+        </p:cNvPr>
+        <p:cNvGrpSpPr/>
+        <p:nvPr/>
+      </p:nvGrpSpPr>
+      <p:grpSpPr>
+        <a:xfrm>
+          <a:off x="0" y="0"/>
+          <a:ext cx="0" cy="0"/>
+          <a:chOff x="0" y="0"/>
+          <a:chExt cx="0" cy="0"/>
+        </a:xfrm>
+      </p:grpSpPr>
+      <p:sp>
+        <p:nvSpPr>
+          <p:cNvPr id="184" name="Google Shape;184;p5:notes">
+            <a:extLst>
+              <a:ext uri="{FF2B5EF4-FFF2-40B4-BE49-F238E27FC236}">
+                <a16:creationId xmlns:a16="http://schemas.microsoft.com/office/drawing/2014/main" id="{5666C033-DD8F-F13B-9D2F-0339EEF29BE8}"/>
+              </a:ext>
+            </a:extLst>
+          </p:cNvPr>
+          <p:cNvSpPr txBox="1">
+            <a:spLocks noGrp="1"/>
+          </p:cNvSpPr>
+          <p:nvPr>
+            <p:ph type="body" idx="1"/>
+          </p:nvPr>
+        </p:nvSpPr>
+        <p:spPr>
+          <a:xfrm>
+            <a:off x="685800" y="4400550"/>
+            <a:ext cx="5486400" cy="3600450"/>
+          </a:xfrm>
+          <a:prstGeom prst="rect">
+            <a:avLst/>
+          </a:prstGeom>
+        </p:spPr>
+        <p:txBody>
+          <a:bodyPr spcFirstLastPara="1" wrap="square" lIns="91425" tIns="45700" rIns="91425" bIns="45700" anchor="t" anchorCtr="0">
+            <a:noAutofit/>
+          </a:bodyPr>
+          <a:lstStyle/>
+          <a:p>
+            <a:pPr marL="0" lvl="0" indent="0" algn="l" rtl="0">
+              <a:spcBef>
+                <a:spcPts val="0"/>
+              </a:spcBef>
+              <a:spcAft>
+                <a:spcPts val="0"/>
+              </a:spcAft>
+              <a:buNone/>
+            </a:pPr>
+            <a:endParaRPr/>
+          </a:p>
+        </p:txBody>
+      </p:sp>
+      <p:sp>
+        <p:nvSpPr>
+          <p:cNvPr id="185" name="Google Shape;185;p5:notes">
+            <a:extLst>
+              <a:ext uri="{FF2B5EF4-FFF2-40B4-BE49-F238E27FC236}">
+                <a16:creationId xmlns:a16="http://schemas.microsoft.com/office/drawing/2014/main" id="{C2A99128-5973-CDD2-44FE-EEB8514C5081}"/>
+              </a:ext>
+            </a:extLst>
+          </p:cNvPr>
+          <p:cNvSpPr>
+            <a:spLocks noGrp="1" noRot="1" noChangeAspect="1"/>
+          </p:cNvSpPr>
+          <p:nvPr>
+            <p:ph type="sldImg" idx="2"/>
+          </p:nvPr>
+        </p:nvSpPr>
+        <p:spPr>
+          <a:xfrm>
+            <a:off x="685800" y="1143000"/>
+            <a:ext cx="5486400" cy="3086100"/>
+          </a:xfrm>
+          <a:custGeom>
+            <a:avLst/>
+            <a:gdLst/>
+            <a:ahLst/>
+            <a:cxnLst/>
+            <a:rect l="l" t="t" r="r" b="b"/>
+            <a:pathLst>
+              <a:path w="120000" h="120000" extrusionOk="0">
+                <a:moveTo>
+                  <a:pt x="0" y="0"/>
+                </a:moveTo>
+                <a:lnTo>
+                  <a:pt x="120000" y="0"/>
+                </a:lnTo>
+                <a:lnTo>
+                  <a:pt x="120000" y="120000"/>
+                </a:lnTo>
+                <a:lnTo>
+                  <a:pt x="0" y="120000"/>
+                </a:lnTo>
+                <a:close/>
+              </a:path>
+            </a:pathLst>
+          </a:custGeom>
+        </p:spPr>
+      </p:sp>
+    </p:spTree>
+    <p:extLst>
+      <p:ext uri="{BB962C8B-B14F-4D97-AF65-F5344CB8AC3E}">
+        <p14:creationId xmlns:p14="http://schemas.microsoft.com/office/powerpoint/2010/main" val="2547112741"/>
+      </p:ext>
+    </p:extLst>
+  </p:cSld>
+  <p:clrMapOvr>
+    <a:masterClrMapping/>
+  </p:clrMapOvr>
+</p:notes>
+</file>
+
+<file path=ppt/notesSlides/notesSlide8.xml><?xml version="1.0" encoding="utf-8"?>
+<p:notes xmlns:a="http://schemas.openxmlformats.org/drawingml/2006/main" xmlns:r="http://schemas.openxmlformats.org/officeDocument/2006/relationships" xmlns:p="http://schemas.openxmlformats.org/presentationml/2006/main" showMasterSp="0" showMasterPhAnim="0">
+  <p:cSld>
+    <p:spTree>
+      <p:nvGrpSpPr>
+        <p:cNvPr id="1" name="Shape 183">
+          <a:extLst>
+            <a:ext uri="{FF2B5EF4-FFF2-40B4-BE49-F238E27FC236}">
+              <a16:creationId xmlns:a16="http://schemas.microsoft.com/office/drawing/2014/main" id="{A1874FA4-FB09-5AC8-A69E-55F3CD933D93}"/>
+            </a:ext>
+          </a:extLst>
+        </p:cNvPr>
+        <p:cNvGrpSpPr/>
+        <p:nvPr/>
+      </p:nvGrpSpPr>
+      <p:grpSpPr>
+        <a:xfrm>
+          <a:off x="0" y="0"/>
+          <a:ext cx="0" cy="0"/>
+          <a:chOff x="0" y="0"/>
+          <a:chExt cx="0" cy="0"/>
+        </a:xfrm>
+      </p:grpSpPr>
+      <p:sp>
+        <p:nvSpPr>
+          <p:cNvPr id="184" name="Google Shape;184;p5:notes">
+            <a:extLst>
+              <a:ext uri="{FF2B5EF4-FFF2-40B4-BE49-F238E27FC236}">
+                <a16:creationId xmlns:a16="http://schemas.microsoft.com/office/drawing/2014/main" id="{081E4092-82B2-C6C7-E273-C5F2622C0C74}"/>
+              </a:ext>
+            </a:extLst>
+          </p:cNvPr>
+          <p:cNvSpPr txBox="1">
+            <a:spLocks noGrp="1"/>
+          </p:cNvSpPr>
+          <p:nvPr>
+            <p:ph type="body" idx="1"/>
+          </p:nvPr>
+        </p:nvSpPr>
+        <p:spPr>
+          <a:xfrm>
+            <a:off x="685800" y="4400550"/>
+            <a:ext cx="5486400" cy="3600450"/>
+          </a:xfrm>
+          <a:prstGeom prst="rect">
+            <a:avLst/>
+          </a:prstGeom>
+        </p:spPr>
+        <p:txBody>
+          <a:bodyPr spcFirstLastPara="1" wrap="square" lIns="91425" tIns="45700" rIns="91425" bIns="45700" anchor="t" anchorCtr="0">
+            <a:noAutofit/>
+          </a:bodyPr>
+          <a:lstStyle/>
+          <a:p>
+            <a:pPr marL="0" lvl="0" indent="0" algn="l" rtl="0">
+              <a:spcBef>
+                <a:spcPts val="0"/>
+              </a:spcBef>
+              <a:spcAft>
+                <a:spcPts val="0"/>
+              </a:spcAft>
+              <a:buNone/>
+            </a:pPr>
+            <a:endParaRPr/>
+          </a:p>
+        </p:txBody>
+      </p:sp>
+      <p:sp>
+        <p:nvSpPr>
+          <p:cNvPr id="185" name="Google Shape;185;p5:notes">
+            <a:extLst>
+              <a:ext uri="{FF2B5EF4-FFF2-40B4-BE49-F238E27FC236}">
+                <a16:creationId xmlns:a16="http://schemas.microsoft.com/office/drawing/2014/main" id="{9E5B102C-0F30-D2E5-6BF7-CCE19CD46F26}"/>
+              </a:ext>
+            </a:extLst>
+          </p:cNvPr>
+          <p:cNvSpPr>
+            <a:spLocks noGrp="1" noRot="1" noChangeAspect="1"/>
+          </p:cNvSpPr>
+          <p:nvPr>
+            <p:ph type="sldImg" idx="2"/>
+          </p:nvPr>
+        </p:nvSpPr>
+        <p:spPr>
+          <a:xfrm>
+            <a:off x="685800" y="1143000"/>
+            <a:ext cx="5486400" cy="3086100"/>
+          </a:xfrm>
+          <a:custGeom>
+            <a:avLst/>
+            <a:gdLst/>
+            <a:ahLst/>
+            <a:cxnLst/>
+            <a:rect l="l" t="t" r="r" b="b"/>
+            <a:pathLst>
+              <a:path w="120000" h="120000" extrusionOk="0">
+                <a:moveTo>
+                  <a:pt x="0" y="0"/>
+                </a:moveTo>
+                <a:lnTo>
+                  <a:pt x="120000" y="0"/>
+                </a:lnTo>
+                <a:lnTo>
+                  <a:pt x="120000" y="120000"/>
+                </a:lnTo>
+                <a:lnTo>
+                  <a:pt x="0" y="120000"/>
+                </a:lnTo>
+                <a:close/>
+              </a:path>
+            </a:pathLst>
+          </a:custGeom>
+        </p:spPr>
+      </p:sp>
+    </p:spTree>
+    <p:extLst>
+      <p:ext uri="{BB962C8B-B14F-4D97-AF65-F5344CB8AC3E}">
+        <p14:creationId xmlns:p14="http://schemas.microsoft.com/office/powerpoint/2010/main" val="2497173806"/>
+      </p:ext>
+    </p:extLst>
+  </p:cSld>
+  <p:clrMapOvr>
+    <a:masterClrMapping/>
+  </p:clrMapOvr>
+</p:notes>
+</file>
+
+<file path=ppt/notesSlides/notesSlide9.xml><?xml version="1.0" encoding="utf-8"?>
+<p:notes xmlns:a="http://schemas.openxmlformats.org/drawingml/2006/main" xmlns:r="http://schemas.openxmlformats.org/officeDocument/2006/relationships" xmlns:p="http://schemas.openxmlformats.org/presentationml/2006/main" showMasterSp="0" showMasterPhAnim="0">
+  <p:cSld>
+    <p:spTree>
+      <p:nvGrpSpPr>
+        <p:cNvPr id="1" name="Shape 183">
+          <a:extLst>
+            <a:ext uri="{FF2B5EF4-FFF2-40B4-BE49-F238E27FC236}">
+              <a16:creationId xmlns:a16="http://schemas.microsoft.com/office/drawing/2014/main" id="{D16014CA-CFBC-3F66-ECAF-47B6B69377D1}"/>
+            </a:ext>
+          </a:extLst>
+        </p:cNvPr>
+        <p:cNvGrpSpPr/>
+        <p:nvPr/>
+      </p:nvGrpSpPr>
+      <p:grpSpPr>
+        <a:xfrm>
+          <a:off x="0" y="0"/>
+          <a:ext cx="0" cy="0"/>
+          <a:chOff x="0" y="0"/>
+          <a:chExt cx="0" cy="0"/>
+        </a:xfrm>
+      </p:grpSpPr>
+      <p:sp>
+        <p:nvSpPr>
+          <p:cNvPr id="184" name="Google Shape;184;p5:notes">
+            <a:extLst>
+              <a:ext uri="{FF2B5EF4-FFF2-40B4-BE49-F238E27FC236}">
+                <a16:creationId xmlns:a16="http://schemas.microsoft.com/office/drawing/2014/main" id="{7F04526D-8441-0C67-17CE-0B17CE5F8649}"/>
+              </a:ext>
+            </a:extLst>
+          </p:cNvPr>
+          <p:cNvSpPr txBox="1">
+            <a:spLocks noGrp="1"/>
+          </p:cNvSpPr>
+          <p:nvPr>
+            <p:ph type="body" idx="1"/>
+          </p:nvPr>
+        </p:nvSpPr>
+        <p:spPr>
+          <a:xfrm>
+            <a:off x="685800" y="4400550"/>
+            <a:ext cx="5486400" cy="3600450"/>
+          </a:xfrm>
+          <a:prstGeom prst="rect">
+            <a:avLst/>
+          </a:prstGeom>
+        </p:spPr>
+        <p:txBody>
+          <a:bodyPr spcFirstLastPara="1" wrap="square" lIns="91425" tIns="45700" rIns="91425" bIns="45700" anchor="t" anchorCtr="0">
+            <a:noAutofit/>
+          </a:bodyPr>
+          <a:lstStyle/>
+          <a:p>
+            <a:pPr marL="0" lvl="0" indent="0" algn="l" rtl="0">
+              <a:spcBef>
+                <a:spcPts val="0"/>
+              </a:spcBef>
+              <a:spcAft>
+                <a:spcPts val="0"/>
+              </a:spcAft>
+              <a:buNone/>
+            </a:pPr>
+            <a:endParaRPr/>
+          </a:p>
+        </p:txBody>
+      </p:sp>
+      <p:sp>
+        <p:nvSpPr>
+          <p:cNvPr id="185" name="Google Shape;185;p5:notes">
+            <a:extLst>
+              <a:ext uri="{FF2B5EF4-FFF2-40B4-BE49-F238E27FC236}">
+                <a16:creationId xmlns:a16="http://schemas.microsoft.com/office/drawing/2014/main" id="{FD939652-FD11-A441-CEEF-49FB11E9C955}"/>
+              </a:ext>
+            </a:extLst>
+          </p:cNvPr>
+          <p:cNvSpPr>
+            <a:spLocks noGrp="1" noRot="1" noChangeAspect="1"/>
+          </p:cNvSpPr>
+          <p:nvPr>
+            <p:ph type="sldImg" idx="2"/>
+          </p:nvPr>
+        </p:nvSpPr>
+        <p:spPr>
+          <a:xfrm>
+            <a:off x="685800" y="1143000"/>
+            <a:ext cx="5486400" cy="3086100"/>
+          </a:xfrm>
+          <a:custGeom>
+            <a:avLst/>
+            <a:gdLst/>
+            <a:ahLst/>
+            <a:cxnLst/>
+            <a:rect l="l" t="t" r="r" b="b"/>
+            <a:pathLst>
+              <a:path w="120000" h="120000" extrusionOk="0">
+                <a:moveTo>
+                  <a:pt x="0" y="0"/>
+                </a:moveTo>
+                <a:lnTo>
+                  <a:pt x="120000" y="0"/>
+                </a:lnTo>
+                <a:lnTo>
+                  <a:pt x="120000" y="120000"/>
+                </a:lnTo>
+                <a:lnTo>
+                  <a:pt x="0" y="120000"/>
+                </a:lnTo>
+                <a:close/>
+              </a:path>
+            </a:pathLst>
+          </a:custGeom>
+        </p:spPr>
+      </p:sp>
+    </p:spTree>
+    <p:extLst>
+      <p:ext uri="{BB962C8B-B14F-4D97-AF65-F5344CB8AC3E}">
+        <p14:creationId xmlns:p14="http://schemas.microsoft.com/office/powerpoint/2010/main" val="1453705141"/>
+      </p:ext>
+    </p:extLst>
   </p:cSld>
   <p:clrMapOvr>
     <a:masterClrMapping/>
@@ -2339,7 +3212,7 @@
         <p:fade/>
       </p:transition>
     </mc:Choice>
-    <mc:Fallback xmlns:ahyp="http://schemas.microsoft.com/office/drawing/2018/hyperlinkcolor" xmlns:p15="http://schemas.microsoft.com/office/powerpoint/2012/main" xmlns:com="http://schemas.openxmlformats.org/drawingml/2006/compatibility" xmlns:pvml="urn:schemas-microsoft-com:office:powerpoint" xmlns:v="urn:schemas-microsoft-com:vml" xmlns:o="urn:schemas-microsoft-com:office:office" xmlns:dgm="http://schemas.openxmlformats.org/drawingml/2006/diagram" xmlns:c="http://schemas.openxmlformats.org/drawingml/2006/chart" xmlns:mv="urn:schemas-microsoft-com:mac:vml" xmlns="">
+    <mc:Fallback xmlns="" xmlns:mv="urn:schemas-microsoft-com:mac:vml" xmlns:c="http://schemas.openxmlformats.org/drawingml/2006/chart" xmlns:dgm="http://schemas.openxmlformats.org/drawingml/2006/diagram" xmlns:o="urn:schemas-microsoft-com:office:office" xmlns:v="urn:schemas-microsoft-com:vml" xmlns:pvml="urn:schemas-microsoft-com:office:powerpoint" xmlns:com="http://schemas.openxmlformats.org/drawingml/2006/compatibility" xmlns:p15="http://schemas.microsoft.com/office/powerpoint/2012/main" xmlns:ahyp="http://schemas.microsoft.com/office/drawing/2018/hyperlinkcolor">
       <p:transition spd="slow">
         <p:fade/>
       </p:transition>
@@ -4537,7 +5410,7 @@
         <p:fade/>
       </p:transition>
     </mc:Choice>
-    <mc:Fallback xmlns:ahyp="http://schemas.microsoft.com/office/drawing/2018/hyperlinkcolor" xmlns:p15="http://schemas.microsoft.com/office/powerpoint/2012/main" xmlns:com="http://schemas.openxmlformats.org/drawingml/2006/compatibility" xmlns:pvml="urn:schemas-microsoft-com:office:powerpoint" xmlns:v="urn:schemas-microsoft-com:vml" xmlns:o="urn:schemas-microsoft-com:office:office" xmlns:dgm="http://schemas.openxmlformats.org/drawingml/2006/diagram" xmlns:c="http://schemas.openxmlformats.org/drawingml/2006/chart" xmlns:mv="urn:schemas-microsoft-com:mac:vml" xmlns="">
+    <mc:Fallback xmlns="" xmlns:mv="urn:schemas-microsoft-com:mac:vml" xmlns:c="http://schemas.openxmlformats.org/drawingml/2006/chart" xmlns:dgm="http://schemas.openxmlformats.org/drawingml/2006/diagram" xmlns:o="urn:schemas-microsoft-com:office:office" xmlns:v="urn:schemas-microsoft-com:vml" xmlns:pvml="urn:schemas-microsoft-com:office:powerpoint" xmlns:com="http://schemas.openxmlformats.org/drawingml/2006/compatibility" xmlns:p15="http://schemas.microsoft.com/office/powerpoint/2012/main" xmlns:ahyp="http://schemas.microsoft.com/office/drawing/2018/hyperlinkcolor">
       <p:transition spd="slow">
         <p:fade/>
       </p:transition>
@@ -5039,7 +5912,7 @@
         <p:fade/>
       </p:transition>
     </mc:Choice>
-    <mc:Fallback xmlns:ahyp="http://schemas.microsoft.com/office/drawing/2018/hyperlinkcolor" xmlns:p15="http://schemas.microsoft.com/office/powerpoint/2012/main" xmlns:com="http://schemas.openxmlformats.org/drawingml/2006/compatibility" xmlns:pvml="urn:schemas-microsoft-com:office:powerpoint" xmlns:v="urn:schemas-microsoft-com:vml" xmlns:o="urn:schemas-microsoft-com:office:office" xmlns:dgm="http://schemas.openxmlformats.org/drawingml/2006/diagram" xmlns:c="http://schemas.openxmlformats.org/drawingml/2006/chart" xmlns:mv="urn:schemas-microsoft-com:mac:vml" xmlns="">
+    <mc:Fallback xmlns="" xmlns:mv="urn:schemas-microsoft-com:mac:vml" xmlns:c="http://schemas.openxmlformats.org/drawingml/2006/chart" xmlns:dgm="http://schemas.openxmlformats.org/drawingml/2006/diagram" xmlns:o="urn:schemas-microsoft-com:office:office" xmlns:v="urn:schemas-microsoft-com:vml" xmlns:pvml="urn:schemas-microsoft-com:office:powerpoint" xmlns:com="http://schemas.openxmlformats.org/drawingml/2006/compatibility" xmlns:p15="http://schemas.microsoft.com/office/powerpoint/2012/main" xmlns:ahyp="http://schemas.microsoft.com/office/drawing/2018/hyperlinkcolor">
       <p:transition spd="slow">
         <p:fade/>
       </p:transition>
@@ -5559,7 +6432,7 @@
         <p:fade/>
       </p:transition>
     </mc:Choice>
-    <mc:Fallback xmlns:ahyp="http://schemas.microsoft.com/office/drawing/2018/hyperlinkcolor" xmlns:p15="http://schemas.microsoft.com/office/powerpoint/2012/main" xmlns:com="http://schemas.openxmlformats.org/drawingml/2006/compatibility" xmlns:pvml="urn:schemas-microsoft-com:office:powerpoint" xmlns:v="urn:schemas-microsoft-com:vml" xmlns:o="urn:schemas-microsoft-com:office:office" xmlns:dgm="http://schemas.openxmlformats.org/drawingml/2006/diagram" xmlns:c="http://schemas.openxmlformats.org/drawingml/2006/chart" xmlns:mv="urn:schemas-microsoft-com:mac:vml" xmlns="">
+    <mc:Fallback xmlns="" xmlns:mv="urn:schemas-microsoft-com:mac:vml" xmlns:c="http://schemas.openxmlformats.org/drawingml/2006/chart" xmlns:dgm="http://schemas.openxmlformats.org/drawingml/2006/diagram" xmlns:o="urn:schemas-microsoft-com:office:office" xmlns:v="urn:schemas-microsoft-com:vml" xmlns:pvml="urn:schemas-microsoft-com:office:powerpoint" xmlns:com="http://schemas.openxmlformats.org/drawingml/2006/compatibility" xmlns:p15="http://schemas.microsoft.com/office/powerpoint/2012/main" xmlns:ahyp="http://schemas.microsoft.com/office/drawing/2018/hyperlinkcolor">
       <p:transition spd="slow">
         <p:fade/>
       </p:transition>
@@ -5671,7 +6544,7 @@
         <p:fade/>
       </p:transition>
     </mc:Choice>
-    <mc:Fallback xmlns:ahyp="http://schemas.microsoft.com/office/drawing/2018/hyperlinkcolor" xmlns:p15="http://schemas.microsoft.com/office/powerpoint/2012/main" xmlns:com="http://schemas.openxmlformats.org/drawingml/2006/compatibility" xmlns:pvml="urn:schemas-microsoft-com:office:powerpoint" xmlns:v="urn:schemas-microsoft-com:vml" xmlns:o="urn:schemas-microsoft-com:office:office" xmlns:dgm="http://schemas.openxmlformats.org/drawingml/2006/diagram" xmlns:c="http://schemas.openxmlformats.org/drawingml/2006/chart" xmlns:mv="urn:schemas-microsoft-com:mac:vml" xmlns="">
+    <mc:Fallback xmlns="" xmlns:mv="urn:schemas-microsoft-com:mac:vml" xmlns:c="http://schemas.openxmlformats.org/drawingml/2006/chart" xmlns:dgm="http://schemas.openxmlformats.org/drawingml/2006/diagram" xmlns:o="urn:schemas-microsoft-com:office:office" xmlns:v="urn:schemas-microsoft-com:vml" xmlns:pvml="urn:schemas-microsoft-com:office:powerpoint" xmlns:com="http://schemas.openxmlformats.org/drawingml/2006/compatibility" xmlns:p15="http://schemas.microsoft.com/office/powerpoint/2012/main" xmlns:ahyp="http://schemas.microsoft.com/office/drawing/2018/hyperlinkcolor">
       <p:transition spd="slow">
         <p:fade/>
       </p:transition>
@@ -7011,7 +7884,7 @@
         <p:fade/>
       </p:transition>
     </mc:Choice>
-    <mc:Fallback xmlns:ahyp="http://schemas.microsoft.com/office/drawing/2018/hyperlinkcolor" xmlns:p15="http://schemas.microsoft.com/office/powerpoint/2012/main" xmlns:com="http://schemas.openxmlformats.org/drawingml/2006/compatibility" xmlns:pvml="urn:schemas-microsoft-com:office:powerpoint" xmlns:v="urn:schemas-microsoft-com:vml" xmlns:o="urn:schemas-microsoft-com:office:office" xmlns:dgm="http://schemas.openxmlformats.org/drawingml/2006/diagram" xmlns:c="http://schemas.openxmlformats.org/drawingml/2006/chart" xmlns:mv="urn:schemas-microsoft-com:mac:vml" xmlns="">
+    <mc:Fallback xmlns="" xmlns:mv="urn:schemas-microsoft-com:mac:vml" xmlns:c="http://schemas.openxmlformats.org/drawingml/2006/chart" xmlns:dgm="http://schemas.openxmlformats.org/drawingml/2006/diagram" xmlns:o="urn:schemas-microsoft-com:office:office" xmlns:v="urn:schemas-microsoft-com:vml" xmlns:pvml="urn:schemas-microsoft-com:office:powerpoint" xmlns:com="http://schemas.openxmlformats.org/drawingml/2006/compatibility" xmlns:p15="http://schemas.microsoft.com/office/powerpoint/2012/main" xmlns:ahyp="http://schemas.microsoft.com/office/drawing/2018/hyperlinkcolor">
       <p:transition spd="slow">
         <p:fade/>
       </p:transition>
@@ -8758,7 +9631,7 @@
                   </a:spcAft>
                   <a:buNone/>
                 </a:pPr>
-                <a:endParaRPr sz="2800" b="0" i="0" u="none" strike="noStrike" cap="none">
+                <a:endParaRPr sz="2800" b="0" i="0" u="none" strike="noStrike" cap="none" dirty="0">
                   <a:solidFill>
                     <a:schemeClr val="lt1"/>
                   </a:solidFill>
@@ -8780,7 +9653,7 @@
         </p:nvGrpSpPr>
         <p:grpSpPr>
           <a:xfrm>
-            <a:off x="3242960" y="4074674"/>
+            <a:off x="3287073" y="4082877"/>
             <a:ext cx="6504673" cy="675771"/>
             <a:chOff x="4555085" y="4807551"/>
             <a:chExt cx="4697323" cy="974449"/>
@@ -9801,6 +10674,100 @@
           </p:txBody>
         </p:sp>
       </p:grpSp>
+      <p:sp>
+        <p:nvSpPr>
+          <p:cNvPr id="2" name="Google Shape;129;p2">
+            <a:extLst>
+              <a:ext uri="{FF2B5EF4-FFF2-40B4-BE49-F238E27FC236}">
+                <a16:creationId xmlns:a16="http://schemas.microsoft.com/office/drawing/2014/main" id="{859E21FA-6F72-BF26-BDC1-D4107831E554}"/>
+              </a:ext>
+            </a:extLst>
+          </p:cNvPr>
+          <p:cNvSpPr/>
+          <p:nvPr/>
+        </p:nvSpPr>
+        <p:spPr>
+          <a:xfrm>
+            <a:off x="3287073" y="3230664"/>
+            <a:ext cx="5413511" cy="523180"/>
+          </a:xfrm>
+          <a:prstGeom prst="rect">
+            <a:avLst/>
+          </a:prstGeom>
+          <a:noFill/>
+          <a:ln>
+            <a:noFill/>
+          </a:ln>
+        </p:spPr>
+        <p:txBody>
+          <a:bodyPr spcFirstLastPara="1" wrap="square" lIns="91425" tIns="45700" rIns="91425" bIns="45700" anchor="t" anchorCtr="0">
+            <a:spAutoFit/>
+          </a:bodyPr>
+          <a:lstStyle/>
+          <a:p>
+            <a:pPr lvl="0"/>
+            <a:r>
+              <a:rPr lang="en-US" sz="2800" b="1" dirty="0">
+                <a:solidFill>
+                  <a:srgbClr val="01ACBE"/>
+                </a:solidFill>
+                <a:latin typeface="Times New Roman"/>
+                <a:ea typeface="Times New Roman"/>
+                <a:cs typeface="Times New Roman"/>
+                <a:sym typeface="Times New Roman"/>
+              </a:rPr>
+              <a:t>Redis</a:t>
+            </a:r>
+          </a:p>
+        </p:txBody>
+      </p:sp>
+      <p:sp>
+        <p:nvSpPr>
+          <p:cNvPr id="3" name="Google Shape;129;p2">
+            <a:extLst>
+              <a:ext uri="{FF2B5EF4-FFF2-40B4-BE49-F238E27FC236}">
+                <a16:creationId xmlns:a16="http://schemas.microsoft.com/office/drawing/2014/main" id="{F2CDB9D9-D56B-F160-A286-1C423827F8CD}"/>
+              </a:ext>
+            </a:extLst>
+          </p:cNvPr>
+          <p:cNvSpPr/>
+          <p:nvPr/>
+        </p:nvSpPr>
+        <p:spPr>
+          <a:xfrm>
+            <a:off x="3350870" y="4086892"/>
+            <a:ext cx="5413511" cy="523180"/>
+          </a:xfrm>
+          <a:prstGeom prst="rect">
+            <a:avLst/>
+          </a:prstGeom>
+          <a:noFill/>
+          <a:ln>
+            <a:noFill/>
+          </a:ln>
+        </p:spPr>
+        <p:txBody>
+          <a:bodyPr spcFirstLastPara="1" wrap="square" lIns="91425" tIns="45700" rIns="91425" bIns="45700" anchor="t" anchorCtr="0">
+            <a:spAutoFit/>
+          </a:bodyPr>
+          <a:lstStyle/>
+          <a:p>
+            <a:pPr lvl="0"/>
+            <a:r>
+              <a:rPr lang="en-US" sz="2800" b="1" dirty="0">
+                <a:solidFill>
+                  <a:srgbClr val="01ACBE"/>
+                </a:solidFill>
+                <a:latin typeface="Times New Roman"/>
+                <a:ea typeface="Times New Roman"/>
+                <a:cs typeface="Times New Roman"/>
+                <a:sym typeface="Times New Roman"/>
+              </a:rPr>
+              <a:t>Kafka</a:t>
+            </a:r>
+          </a:p>
+        </p:txBody>
+      </p:sp>
     </p:spTree>
   </p:cSld>
   <p:clrMapOvr>
@@ -9812,7 +10779,7 @@
         <p:fade/>
       </p:transition>
     </mc:Choice>
-    <mc:Fallback xmlns:ahyp="http://schemas.microsoft.com/office/drawing/2018/hyperlinkcolor" xmlns:p15="http://schemas.microsoft.com/office/powerpoint/2012/main" xmlns:com="http://schemas.openxmlformats.org/drawingml/2006/compatibility" xmlns:pvml="urn:schemas-microsoft-com:office:powerpoint" xmlns:v="urn:schemas-microsoft-com:vml" xmlns:o="urn:schemas-microsoft-com:office:office" xmlns:dgm="http://schemas.openxmlformats.org/drawingml/2006/diagram" xmlns:c="http://schemas.openxmlformats.org/drawingml/2006/chart" xmlns:mv="urn:schemas-microsoft-com:mac:vml" xmlns="">
+    <mc:Fallback xmlns="" xmlns:mv="urn:schemas-microsoft-com:mac:vml" xmlns:c="http://schemas.openxmlformats.org/drawingml/2006/chart" xmlns:dgm="http://schemas.openxmlformats.org/drawingml/2006/diagram" xmlns:o="urn:schemas-microsoft-com:office:office" xmlns:v="urn:schemas-microsoft-com:vml" xmlns:pvml="urn:schemas-microsoft-com:office:powerpoint" xmlns:com="http://schemas.openxmlformats.org/drawingml/2006/compatibility" xmlns:p15="http://schemas.microsoft.com/office/powerpoint/2012/main" xmlns:ahyp="http://schemas.microsoft.com/office/drawing/2018/hyperlinkcolor">
       <p:transition spd="slow">
         <p:fade/>
       </p:transition>
@@ -10271,6 +11238,6965 @@
                                         </p:tgtEl>
                                       </p:cBhvr>
                                     </p:animEffect>
+                                  </p:childTnLst>
+                                </p:cTn>
+                              </p:par>
+                            </p:childTnLst>
+                          </p:cTn>
+                        </p:par>
+                      </p:childTnLst>
+                    </p:cTn>
+                  </p:par>
+                </p:childTnLst>
+              </p:cTn>
+              <p:prevCondLst>
+                <p:cond evt="onPrev" delay="0">
+                  <p:tgtEl>
+                    <p:sldTgt/>
+                  </p:tgtEl>
+                </p:cond>
+              </p:prevCondLst>
+              <p:nextCondLst>
+                <p:cond evt="onNext" delay="0">
+                  <p:tgtEl>
+                    <p:sldTgt/>
+                  </p:tgtEl>
+                </p:cond>
+              </p:nextCondLst>
+            </p:seq>
+          </p:childTnLst>
+        </p:cTn>
+      </p:par>
+    </p:tnLst>
+  </p:timing>
+</p:sld>
+</file>
+
+<file path=ppt/slides/slide3.xml><?xml version="1.0" encoding="utf-8"?>
+<p:sld xmlns:a="http://schemas.openxmlformats.org/drawingml/2006/main" xmlns:r="http://schemas.openxmlformats.org/officeDocument/2006/relationships" xmlns:p="http://schemas.openxmlformats.org/presentationml/2006/main">
+  <p:cSld>
+    <p:spTree>
+      <p:nvGrpSpPr>
+        <p:cNvPr id="1" name="Shape 186"/>
+        <p:cNvGrpSpPr/>
+        <p:nvPr/>
+      </p:nvGrpSpPr>
+      <p:grpSpPr>
+        <a:xfrm>
+          <a:off x="0" y="0"/>
+          <a:ext cx="0" cy="0"/>
+          <a:chOff x="0" y="0"/>
+          <a:chExt cx="0" cy="0"/>
+        </a:xfrm>
+      </p:grpSpPr>
+      <p:grpSp>
+        <p:nvGrpSpPr>
+          <p:cNvPr id="190" name="Google Shape;190;p5"/>
+          <p:cNvGrpSpPr/>
+          <p:nvPr/>
+        </p:nvGrpSpPr>
+        <p:grpSpPr>
+          <a:xfrm>
+            <a:off x="1670730" y="1263299"/>
+            <a:ext cx="8616270" cy="1007332"/>
+            <a:chOff x="3129129" y="1121776"/>
+            <a:chExt cx="5933741" cy="1171624"/>
+          </a:xfrm>
+        </p:grpSpPr>
+        <p:sp>
+          <p:nvSpPr>
+            <p:cNvPr id="191" name="Google Shape;191;p5"/>
+            <p:cNvSpPr/>
+            <p:nvPr/>
+          </p:nvSpPr>
+          <p:spPr>
+            <a:xfrm>
+              <a:off x="3129129" y="1121776"/>
+              <a:ext cx="5933741" cy="1171624"/>
+            </a:xfrm>
+            <a:prstGeom prst="roundRect">
+              <a:avLst>
+                <a:gd name="adj" fmla="val 50000"/>
+              </a:avLst>
+            </a:prstGeom>
+            <a:solidFill>
+              <a:srgbClr val="D8D8D8">
+                <a:alpha val="49803"/>
+              </a:srgbClr>
+            </a:solidFill>
+            <a:ln>
+              <a:noFill/>
+            </a:ln>
+          </p:spPr>
+          <p:txBody>
+            <a:bodyPr spcFirstLastPara="1" wrap="square" lIns="91425" tIns="45700" rIns="91425" bIns="45700" anchor="ctr" anchorCtr="0">
+              <a:noAutofit/>
+            </a:bodyPr>
+            <a:lstStyle/>
+            <a:p>
+              <a:pPr marL="0" marR="0" lvl="0" indent="0" algn="l" rtl="0">
+                <a:spcBef>
+                  <a:spcPts val="0"/>
+                </a:spcBef>
+                <a:spcAft>
+                  <a:spcPts val="0"/>
+                </a:spcAft>
+                <a:buNone/>
+              </a:pPr>
+              <a:endParaRPr sz="2800">
+                <a:solidFill>
+                  <a:srgbClr val="FFAA2D"/>
+                </a:solidFill>
+                <a:latin typeface="Arial"/>
+                <a:ea typeface="Arial"/>
+                <a:cs typeface="Arial"/>
+                <a:sym typeface="Arial"/>
+              </a:endParaRPr>
+            </a:p>
+          </p:txBody>
+        </p:sp>
+        <p:sp>
+          <p:nvSpPr>
+            <p:cNvPr id="192" name="Google Shape;192;p5"/>
+            <p:cNvSpPr/>
+            <p:nvPr/>
+          </p:nvSpPr>
+          <p:spPr>
+            <a:xfrm>
+              <a:off x="3289330" y="1253414"/>
+              <a:ext cx="5613340" cy="908350"/>
+            </a:xfrm>
+            <a:prstGeom prst="roundRect">
+              <a:avLst>
+                <a:gd name="adj" fmla="val 50000"/>
+              </a:avLst>
+            </a:prstGeom>
+            <a:gradFill>
+              <a:gsLst>
+                <a:gs pos="0">
+                  <a:srgbClr val="FFAA2D"/>
+                </a:gs>
+                <a:gs pos="100000">
+                  <a:srgbClr val="FFD393"/>
+                </a:gs>
+              </a:gsLst>
+              <a:lin ang="0" scaled="0"/>
+            </a:gradFill>
+            <a:ln w="19050" cap="flat" cmpd="sng">
+              <a:solidFill>
+                <a:srgbClr val="BFBFBF"/>
+              </a:solidFill>
+              <a:prstDash val="solid"/>
+              <a:miter lim="800000"/>
+              <a:headEnd type="none" w="sm" len="sm"/>
+              <a:tailEnd type="none" w="sm" len="sm"/>
+            </a:ln>
+          </p:spPr>
+          <p:txBody>
+            <a:bodyPr spcFirstLastPara="1" wrap="square" lIns="91425" tIns="45700" rIns="91425" bIns="45700" anchor="ctr" anchorCtr="0">
+              <a:noAutofit/>
+            </a:bodyPr>
+            <a:lstStyle/>
+            <a:p>
+              <a:pPr marL="0" marR="0" lvl="0" indent="0" algn="l" rtl="0">
+                <a:spcBef>
+                  <a:spcPts val="0"/>
+                </a:spcBef>
+                <a:spcAft>
+                  <a:spcPts val="0"/>
+                </a:spcAft>
+                <a:buNone/>
+              </a:pPr>
+              <a:endParaRPr sz="2800">
+                <a:solidFill>
+                  <a:srgbClr val="FFAA2D"/>
+                </a:solidFill>
+                <a:latin typeface="Arial"/>
+                <a:ea typeface="Arial"/>
+                <a:cs typeface="Arial"/>
+                <a:sym typeface="Arial"/>
+              </a:endParaRPr>
+            </a:p>
+          </p:txBody>
+        </p:sp>
+      </p:grpSp>
+      <p:grpSp>
+        <p:nvGrpSpPr>
+          <p:cNvPr id="193" name="Google Shape;193;p5"/>
+          <p:cNvGrpSpPr/>
+          <p:nvPr/>
+        </p:nvGrpSpPr>
+        <p:grpSpPr>
+          <a:xfrm>
+            <a:off x="1782659" y="1240148"/>
+            <a:ext cx="1674310" cy="1522886"/>
+            <a:chOff x="3020983" y="881796"/>
+            <a:chExt cx="2097410" cy="2097410"/>
+          </a:xfrm>
+        </p:grpSpPr>
+        <p:grpSp>
+          <p:nvGrpSpPr>
+            <p:cNvPr id="194" name="Google Shape;194;p5"/>
+            <p:cNvGrpSpPr/>
+            <p:nvPr/>
+          </p:nvGrpSpPr>
+          <p:grpSpPr>
+            <a:xfrm>
+              <a:off x="3020983" y="881796"/>
+              <a:ext cx="2097410" cy="2097410"/>
+              <a:chOff x="3099689" y="1098878"/>
+              <a:chExt cx="1995612" cy="1995615"/>
+            </a:xfrm>
+          </p:grpSpPr>
+          <p:grpSp>
+            <p:nvGrpSpPr>
+              <p:cNvPr id="195" name="Google Shape;195;p5"/>
+              <p:cNvGrpSpPr/>
+              <p:nvPr/>
+            </p:nvGrpSpPr>
+            <p:grpSpPr>
+              <a:xfrm>
+                <a:off x="3099689" y="1098878"/>
+                <a:ext cx="1995612" cy="1995615"/>
+                <a:chOff x="6804316" y="2574806"/>
+                <a:chExt cx="3585705" cy="3585705"/>
+              </a:xfrm>
+            </p:grpSpPr>
+            <p:sp>
+              <p:nvSpPr>
+                <p:cNvPr id="196" name="Google Shape;196;p5"/>
+                <p:cNvSpPr/>
+                <p:nvPr/>
+              </p:nvSpPr>
+              <p:spPr>
+                <a:xfrm rot="-2700000">
+                  <a:off x="7501948" y="2927402"/>
+                  <a:ext cx="2190440" cy="2880512"/>
+                </a:xfrm>
+                <a:custGeom>
+                  <a:avLst/>
+                  <a:gdLst/>
+                  <a:ahLst/>
+                  <a:cxnLst/>
+                  <a:rect l="l" t="t" r="r" b="b"/>
+                  <a:pathLst>
+                    <a:path w="1696474" h="2070736" extrusionOk="0">
+                      <a:moveTo>
+                        <a:pt x="13249" y="1035368"/>
+                      </a:moveTo>
+                      <a:cubicBezTo>
+                        <a:pt x="112309" y="471170"/>
+                        <a:pt x="388098" y="0"/>
+                        <a:pt x="850497" y="0"/>
+                      </a:cubicBezTo>
+                      <a:cubicBezTo>
+                        <a:pt x="1312896" y="0"/>
+                        <a:pt x="1611545" y="478790"/>
+                        <a:pt x="1687745" y="1035368"/>
+                      </a:cubicBezTo>
+                      <a:cubicBezTo>
+                        <a:pt x="1765308" y="1601901"/>
+                        <a:pt x="1312896" y="2070736"/>
+                        <a:pt x="850497" y="2070736"/>
+                      </a:cubicBezTo>
+                      <a:cubicBezTo>
+                        <a:pt x="388098" y="2070736"/>
+                        <a:pt x="-85811" y="1599566"/>
+                        <a:pt x="13249" y="1035368"/>
+                      </a:cubicBezTo>
+                      <a:close/>
+                    </a:path>
+                  </a:pathLst>
+                </a:custGeom>
+                <a:gradFill>
+                  <a:gsLst>
+                    <a:gs pos="0">
+                      <a:schemeClr val="dk1"/>
+                    </a:gs>
+                    <a:gs pos="17000">
+                      <a:srgbClr val="000000">
+                        <a:alpha val="45882"/>
+                      </a:srgbClr>
+                    </a:gs>
+                    <a:gs pos="34000">
+                      <a:srgbClr val="000000">
+                        <a:alpha val="42745"/>
+                      </a:srgbClr>
+                    </a:gs>
+                    <a:gs pos="51000">
+                      <a:srgbClr val="000000">
+                        <a:alpha val="20000"/>
+                      </a:srgbClr>
+                    </a:gs>
+                    <a:gs pos="65000">
+                      <a:srgbClr val="000000">
+                        <a:alpha val="9803"/>
+                      </a:srgbClr>
+                    </a:gs>
+                    <a:gs pos="78000">
+                      <a:srgbClr val="000000">
+                        <a:alpha val="4705"/>
+                      </a:srgbClr>
+                    </a:gs>
+                    <a:gs pos="100000">
+                      <a:srgbClr val="000000">
+                        <a:alpha val="0"/>
+                      </a:srgbClr>
+                    </a:gs>
+                  </a:gsLst>
+                  <a:lin ang="5400000" scaled="0"/>
+                </a:gradFill>
+                <a:ln>
+                  <a:noFill/>
+                </a:ln>
+              </p:spPr>
+              <p:txBody>
+                <a:bodyPr spcFirstLastPara="1" wrap="square" lIns="91425" tIns="45700" rIns="91425" bIns="45700" anchor="ctr" anchorCtr="0">
+                  <a:noAutofit/>
+                </a:bodyPr>
+                <a:lstStyle/>
+                <a:p>
+                  <a:pPr marL="0" marR="0" lvl="0" indent="0" algn="l" rtl="0">
+                    <a:spcBef>
+                      <a:spcPts val="0"/>
+                    </a:spcBef>
+                    <a:spcAft>
+                      <a:spcPts val="0"/>
+                    </a:spcAft>
+                    <a:buNone/>
+                  </a:pPr>
+                  <a:endParaRPr sz="2800">
+                    <a:solidFill>
+                      <a:schemeClr val="lt1"/>
+                    </a:solidFill>
+                    <a:latin typeface="Arial"/>
+                    <a:ea typeface="Arial"/>
+                    <a:cs typeface="Arial"/>
+                    <a:sym typeface="Arial"/>
+                  </a:endParaRPr>
+                </a:p>
+              </p:txBody>
+            </p:sp>
+            <p:sp>
+              <p:nvSpPr>
+                <p:cNvPr id="197" name="Google Shape;197;p5"/>
+                <p:cNvSpPr/>
+                <p:nvPr/>
+              </p:nvSpPr>
+              <p:spPr>
+                <a:xfrm>
+                  <a:off x="7567583" y="3243359"/>
+                  <a:ext cx="1344545" cy="1344543"/>
+                </a:xfrm>
+                <a:prstGeom prst="ellipse">
+                  <a:avLst/>
+                </a:prstGeom>
+                <a:gradFill>
+                  <a:gsLst>
+                    <a:gs pos="0">
+                      <a:srgbClr val="FFFFFF">
+                        <a:alpha val="98823"/>
+                      </a:srgbClr>
+                    </a:gs>
+                    <a:gs pos="43000">
+                      <a:srgbClr val="F7F7F7"/>
+                    </a:gs>
+                    <a:gs pos="100000">
+                      <a:srgbClr val="B8C0C0"/>
+                    </a:gs>
+                  </a:gsLst>
+                  <a:lin ang="2700000" scaled="0"/>
+                </a:gradFill>
+                <a:ln>
+                  <a:noFill/>
+                </a:ln>
+                <a:effectLst>
+                  <a:outerShdw blurRad="139700" dist="88900" dir="2700000" algn="tl" rotWithShape="0">
+                    <a:srgbClr val="494949">
+                      <a:alpha val="29803"/>
+                    </a:srgbClr>
+                  </a:outerShdw>
+                </a:effectLst>
+              </p:spPr>
+              <p:txBody>
+                <a:bodyPr spcFirstLastPara="1" wrap="square" lIns="91425" tIns="45700" rIns="91425" bIns="45700" anchor="ctr" anchorCtr="0">
+                  <a:noAutofit/>
+                </a:bodyPr>
+                <a:lstStyle/>
+                <a:p>
+                  <a:pPr marL="0" marR="0" lvl="0" indent="0" algn="l" rtl="0">
+                    <a:spcBef>
+                      <a:spcPts val="0"/>
+                    </a:spcBef>
+                    <a:spcAft>
+                      <a:spcPts val="0"/>
+                    </a:spcAft>
+                    <a:buNone/>
+                  </a:pPr>
+                  <a:endParaRPr sz="2800">
+                    <a:solidFill>
+                      <a:schemeClr val="lt1"/>
+                    </a:solidFill>
+                    <a:latin typeface="Arial"/>
+                    <a:ea typeface="Arial"/>
+                    <a:cs typeface="Arial"/>
+                    <a:sym typeface="Arial"/>
+                  </a:endParaRPr>
+                </a:p>
+              </p:txBody>
+            </p:sp>
+            <p:sp>
+              <p:nvSpPr>
+                <p:cNvPr id="198" name="Google Shape;198;p5"/>
+                <p:cNvSpPr/>
+                <p:nvPr/>
+              </p:nvSpPr>
+              <p:spPr>
+                <a:xfrm>
+                  <a:off x="7380501" y="3019185"/>
+                  <a:ext cx="1596494" cy="1596494"/>
+                </a:xfrm>
+                <a:prstGeom prst="ellipse">
+                  <a:avLst/>
+                </a:prstGeom>
+                <a:gradFill>
+                  <a:gsLst>
+                    <a:gs pos="0">
+                      <a:srgbClr val="FFFFFF">
+                        <a:alpha val="98823"/>
+                      </a:srgbClr>
+                    </a:gs>
+                    <a:gs pos="11000">
+                      <a:srgbClr val="FFFFFF">
+                        <a:alpha val="98823"/>
+                      </a:srgbClr>
+                    </a:gs>
+                    <a:gs pos="39000">
+                      <a:schemeClr val="lt1"/>
+                    </a:gs>
+                    <a:gs pos="52999">
+                      <a:srgbClr val="F7F7F7"/>
+                    </a:gs>
+                    <a:gs pos="100000">
+                      <a:srgbClr val="B8C0C0"/>
+                    </a:gs>
+                  </a:gsLst>
+                  <a:lin ang="2700000" scaled="0"/>
+                </a:gradFill>
+                <a:ln>
+                  <a:noFill/>
+                </a:ln>
+              </p:spPr>
+              <p:txBody>
+                <a:bodyPr spcFirstLastPara="1" wrap="square" lIns="91425" tIns="45700" rIns="91425" bIns="45700" anchor="ctr" anchorCtr="0">
+                  <a:noAutofit/>
+                </a:bodyPr>
+                <a:lstStyle/>
+                <a:p>
+                  <a:pPr marL="0" marR="0" lvl="0" indent="0" algn="l" rtl="0">
+                    <a:spcBef>
+                      <a:spcPts val="0"/>
+                    </a:spcBef>
+                    <a:spcAft>
+                      <a:spcPts val="0"/>
+                    </a:spcAft>
+                    <a:buNone/>
+                  </a:pPr>
+                  <a:endParaRPr sz="2800">
+                    <a:solidFill>
+                      <a:schemeClr val="lt1"/>
+                    </a:solidFill>
+                    <a:latin typeface="Arial"/>
+                    <a:ea typeface="Arial"/>
+                    <a:cs typeface="Arial"/>
+                    <a:sym typeface="Arial"/>
+                  </a:endParaRPr>
+                </a:p>
+              </p:txBody>
+            </p:sp>
+          </p:grpSp>
+          <p:sp>
+            <p:nvSpPr>
+              <p:cNvPr id="199" name="Google Shape;199;p5"/>
+              <p:cNvSpPr/>
+              <p:nvPr/>
+            </p:nvSpPr>
+            <p:spPr>
+              <a:xfrm>
+                <a:off x="3222820" y="1148080"/>
+                <a:ext cx="1284820" cy="1284821"/>
+              </a:xfrm>
+              <a:prstGeom prst="ellipse">
+                <a:avLst/>
+              </a:prstGeom>
+              <a:solidFill>
+                <a:schemeClr val="lt1">
+                  <a:alpha val="13725"/>
+                </a:schemeClr>
+              </a:solidFill>
+              <a:ln w="15875" cap="flat" cmpd="sng">
+                <a:solidFill>
+                  <a:schemeClr val="lt1"/>
+                </a:solidFill>
+                <a:prstDash val="solid"/>
+                <a:miter lim="800000"/>
+                <a:headEnd type="none" w="sm" len="sm"/>
+                <a:tailEnd type="none" w="sm" len="sm"/>
+              </a:ln>
+              <a:effectLst>
+                <a:outerShdw blurRad="215900" dist="88900" dir="2700000" algn="tl" rotWithShape="0">
+                  <a:srgbClr val="000000">
+                    <a:alpha val="10980"/>
+                  </a:srgbClr>
+                </a:outerShdw>
+              </a:effectLst>
+            </p:spPr>
+            <p:txBody>
+              <a:bodyPr spcFirstLastPara="1" wrap="square" lIns="91425" tIns="45700" rIns="91425" bIns="45700" anchor="ctr" anchorCtr="0">
+                <a:noAutofit/>
+              </a:bodyPr>
+              <a:lstStyle/>
+              <a:p>
+                <a:pPr marL="0" marR="0" lvl="0" indent="0" algn="l" rtl="0">
+                  <a:spcBef>
+                    <a:spcPts val="0"/>
+                  </a:spcBef>
+                  <a:spcAft>
+                    <a:spcPts val="0"/>
+                  </a:spcAft>
+                  <a:buNone/>
+                </a:pPr>
+                <a:endParaRPr sz="2800">
+                  <a:solidFill>
+                    <a:schemeClr val="lt1"/>
+                  </a:solidFill>
+                  <a:latin typeface="Arial"/>
+                  <a:ea typeface="Arial"/>
+                  <a:cs typeface="Arial"/>
+                  <a:sym typeface="Arial"/>
+                </a:endParaRPr>
+              </a:p>
+            </p:txBody>
+          </p:sp>
+        </p:grpSp>
+        <p:sp>
+          <p:nvSpPr>
+            <p:cNvPr id="200" name="Google Shape;200;p5"/>
+            <p:cNvSpPr txBox="1"/>
+            <p:nvPr/>
+          </p:nvSpPr>
+          <p:spPr>
+            <a:xfrm>
+              <a:off x="3514455" y="1292811"/>
+              <a:ext cx="774240" cy="720610"/>
+            </a:xfrm>
+            <a:prstGeom prst="rect">
+              <a:avLst/>
+            </a:prstGeom>
+            <a:noFill/>
+            <a:ln>
+              <a:noFill/>
+            </a:ln>
+          </p:spPr>
+          <p:txBody>
+            <a:bodyPr spcFirstLastPara="1" wrap="square" lIns="91425" tIns="45700" rIns="91425" bIns="45700" anchor="t" anchorCtr="0">
+              <a:spAutoFit/>
+            </a:bodyPr>
+            <a:lstStyle/>
+            <a:p>
+              <a:pPr marL="0" marR="0" lvl="0" indent="0" algn="l" rtl="0">
+                <a:spcBef>
+                  <a:spcPts val="0"/>
+                </a:spcBef>
+                <a:spcAft>
+                  <a:spcPts val="0"/>
+                </a:spcAft>
+                <a:buNone/>
+              </a:pPr>
+              <a:r>
+                <a:rPr lang="en-US" sz="2800">
+                  <a:solidFill>
+                    <a:srgbClr val="FFB850"/>
+                  </a:solidFill>
+                  <a:latin typeface="Impact"/>
+                  <a:ea typeface="Impact"/>
+                  <a:cs typeface="Impact"/>
+                  <a:sym typeface="Impact"/>
+                </a:rPr>
+                <a:t>01</a:t>
+              </a:r>
+              <a:endParaRPr sz="2800">
+                <a:solidFill>
+                  <a:srgbClr val="FFB850"/>
+                </a:solidFill>
+                <a:latin typeface="Impact"/>
+                <a:ea typeface="Impact"/>
+                <a:cs typeface="Impact"/>
+                <a:sym typeface="Impact"/>
+              </a:endParaRPr>
+            </a:p>
+          </p:txBody>
+        </p:sp>
+      </p:grpSp>
+      <p:sp>
+        <p:nvSpPr>
+          <p:cNvPr id="201" name="Google Shape;201;p5"/>
+          <p:cNvSpPr txBox="1"/>
+          <p:nvPr/>
+        </p:nvSpPr>
+        <p:spPr>
+          <a:xfrm>
+            <a:off x="2980807" y="1521544"/>
+            <a:ext cx="6905838" cy="523220"/>
+          </a:xfrm>
+          <a:prstGeom prst="rect">
+            <a:avLst/>
+          </a:prstGeom>
+          <a:noFill/>
+          <a:ln>
+            <a:noFill/>
+          </a:ln>
+        </p:spPr>
+        <p:txBody>
+          <a:bodyPr spcFirstLastPara="1" wrap="square" lIns="91425" tIns="45700" rIns="91425" bIns="45700" anchor="t" anchorCtr="0">
+            <a:spAutoFit/>
+          </a:bodyPr>
+          <a:lstStyle/>
+          <a:p>
+            <a:pPr marL="0" marR="0" lvl="0" indent="0" algn="l" rtl="0">
+              <a:spcBef>
+                <a:spcPts val="0"/>
+              </a:spcBef>
+              <a:spcAft>
+                <a:spcPts val="0"/>
+              </a:spcAft>
+              <a:buNone/>
+            </a:pPr>
+            <a:r>
+              <a:rPr lang="en-US" sz="2800" b="1" dirty="0">
+                <a:solidFill>
+                  <a:schemeClr val="dk1"/>
+                </a:solidFill>
+                <a:latin typeface="Times New Roman"/>
+                <a:ea typeface="Times New Roman"/>
+                <a:cs typeface="Times New Roman"/>
+                <a:sym typeface="Times New Roman"/>
+              </a:rPr>
+              <a:t>Spring data JPA</a:t>
+            </a:r>
+            <a:endParaRPr sz="2800" b="1" dirty="0">
+              <a:solidFill>
+                <a:schemeClr val="dk1"/>
+              </a:solidFill>
+              <a:latin typeface="Times New Roman"/>
+              <a:ea typeface="Times New Roman"/>
+              <a:cs typeface="Times New Roman"/>
+              <a:sym typeface="Times New Roman"/>
+            </a:endParaRPr>
+          </a:p>
+        </p:txBody>
+      </p:sp>
+      <p:sp>
+        <p:nvSpPr>
+          <p:cNvPr id="202" name="Google Shape;202;p5"/>
+          <p:cNvSpPr/>
+          <p:nvPr/>
+        </p:nvSpPr>
+        <p:spPr>
+          <a:xfrm>
+            <a:off x="1670730" y="2505849"/>
+            <a:ext cx="8616269" cy="3437751"/>
+          </a:xfrm>
+          <a:prstGeom prst="rect">
+            <a:avLst/>
+          </a:prstGeom>
+          <a:solidFill>
+            <a:schemeClr val="lt1"/>
+          </a:solidFill>
+          <a:ln w="12700" cap="flat" cmpd="sng">
+            <a:solidFill>
+              <a:schemeClr val="accent4"/>
+            </a:solidFill>
+            <a:prstDash val="solid"/>
+            <a:miter lim="800000"/>
+            <a:headEnd type="none" w="sm" len="sm"/>
+            <a:tailEnd type="none" w="sm" len="sm"/>
+          </a:ln>
+        </p:spPr>
+        <p:txBody>
+          <a:bodyPr spcFirstLastPara="1" wrap="square" lIns="91425" tIns="45700" rIns="91425" bIns="45700" anchor="t" anchorCtr="0">
+            <a:noAutofit/>
+          </a:bodyPr>
+          <a:lstStyle/>
+          <a:p>
+            <a:pPr marL="0" marR="0" lvl="0" indent="0" algn="l" rtl="0">
+              <a:spcBef>
+                <a:spcPts val="0"/>
+              </a:spcBef>
+              <a:spcAft>
+                <a:spcPts val="0"/>
+              </a:spcAft>
+              <a:buNone/>
+            </a:pPr>
+            <a:r>
+              <a:rPr lang="vi-VN" sz="2800" b="0" i="0" dirty="0">
+                <a:solidFill>
+                  <a:srgbClr val="222222"/>
+                </a:solidFill>
+                <a:effectLst/>
+                <a:latin typeface="Times New Roman" panose="02020603050405020304" pitchFamily="18" charset="0"/>
+                <a:cs typeface="Times New Roman" panose="02020603050405020304" pitchFamily="18" charset="0"/>
+              </a:rPr>
+              <a:t>Spring Data JPA là một phần của Spring Framework, được sử dụng để đơn giản hóa việc truy cập và thao tác cơ sở dữ liệu bằng cách tích hợp với JPA (Java Persistence API)</a:t>
+            </a:r>
+            <a:endParaRPr lang="vi-VN" sz="2800" dirty="0">
+              <a:solidFill>
+                <a:schemeClr val="dk1"/>
+              </a:solidFill>
+              <a:latin typeface="Times New Roman" panose="02020603050405020304" pitchFamily="18" charset="0"/>
+              <a:ea typeface="Times New Roman"/>
+              <a:cs typeface="Times New Roman" panose="02020603050405020304" pitchFamily="18" charset="0"/>
+              <a:sym typeface="Times New Roman"/>
+            </a:endParaRPr>
+          </a:p>
+        </p:txBody>
+      </p:sp>
+    </p:spTree>
+  </p:cSld>
+  <p:clrMapOvr>
+    <a:masterClrMapping/>
+  </p:clrMapOvr>
+  <mc:AlternateContent xmlns:mc="http://schemas.openxmlformats.org/markup-compatibility/2006" xmlns:p14="http://schemas.microsoft.com/office/powerpoint/2010/main">
+    <mc:Choice Requires="p14">
+      <p:transition spd="med" p14:dur="700">
+        <p:fade/>
+      </p:transition>
+    </mc:Choice>
+    <mc:Fallback xmlns="" xmlns:mv="urn:schemas-microsoft-com:mac:vml" xmlns:c="http://schemas.openxmlformats.org/drawingml/2006/chart" xmlns:dgm="http://schemas.openxmlformats.org/drawingml/2006/diagram" xmlns:o="urn:schemas-microsoft-com:office:office" xmlns:v="urn:schemas-microsoft-com:vml" xmlns:pvml="urn:schemas-microsoft-com:office:powerpoint" xmlns:com="http://schemas.openxmlformats.org/drawingml/2006/compatibility" xmlns:p15="http://schemas.microsoft.com/office/powerpoint/2012/main" xmlns:ahyp="http://schemas.microsoft.com/office/drawing/2018/hyperlinkcolor">
+      <p:transition spd="slow">
+        <p:fade/>
+      </p:transition>
+    </mc:Fallback>
+  </mc:AlternateContent>
+  <p:timing>
+    <p:tnLst>
+      <p:par>
+        <p:cTn id="1" dur="indefinite" restart="never" nodeType="tmRoot">
+          <p:childTnLst>
+            <p:seq concurrent="1" nextAc="seek">
+              <p:cTn id="2" dur="indefinite" nodeType="mainSeq">
+                <p:childTnLst>
+                  <p:par>
+                    <p:cTn id="3" fill="hold">
+                      <p:stCondLst>
+                        <p:cond delay="indefinite"/>
+                        <p:cond evt="onBegin" delay="0">
+                          <p:tn val="2"/>
+                        </p:cond>
+                      </p:stCondLst>
+                      <p:childTnLst>
+                        <p:par>
+                          <p:cTn id="4" fill="hold">
+                            <p:stCondLst>
+                              <p:cond delay="0"/>
+                            </p:stCondLst>
+                            <p:childTnLst>
+                              <p:par>
+                                <p:cTn id="5" presetID="2" presetClass="entr" presetSubtype="8" fill="hold" nodeType="withEffect">
+                                  <p:stCondLst>
+                                    <p:cond delay="0"/>
+                                  </p:stCondLst>
+                                  <p:childTnLst>
+                                    <p:set>
+                                      <p:cBhvr>
+                                        <p:cTn id="6" dur="1" fill="hold">
+                                          <p:stCondLst>
+                                            <p:cond delay="0"/>
+                                          </p:stCondLst>
+                                        </p:cTn>
+                                        <p:tgtEl>
+                                          <p:spTgt spid="193"/>
+                                        </p:tgtEl>
+                                        <p:attrNameLst>
+                                          <p:attrName>style.visibility</p:attrName>
+                                        </p:attrNameLst>
+                                      </p:cBhvr>
+                                      <p:to>
+                                        <p:strVal val="visible"/>
+                                      </p:to>
+                                    </p:set>
+                                    <p:anim calcmode="lin" valueType="num">
+                                      <p:cBhvr additive="base">
+                                        <p:cTn id="7" dur="500"/>
+                                        <p:tgtEl>
+                                          <p:spTgt spid="193"/>
+                                        </p:tgtEl>
+                                        <p:attrNameLst>
+                                          <p:attrName>ppt_x</p:attrName>
+                                        </p:attrNameLst>
+                                      </p:cBhvr>
+                                      <p:tavLst>
+                                        <p:tav tm="0">
+                                          <p:val>
+                                            <p:strVal val="#ppt_x-1"/>
+                                          </p:val>
+                                        </p:tav>
+                                        <p:tav tm="100000">
+                                          <p:val>
+                                            <p:strVal val="#ppt_x"/>
+                                          </p:val>
+                                        </p:tav>
+                                      </p:tavLst>
+                                    </p:anim>
+                                  </p:childTnLst>
+                                </p:cTn>
+                              </p:par>
+                              <p:par>
+                                <p:cTn id="8" presetID="2" presetClass="entr" presetSubtype="2" fill="hold" nodeType="withEffect">
+                                  <p:stCondLst>
+                                    <p:cond delay="0"/>
+                                  </p:stCondLst>
+                                  <p:childTnLst>
+                                    <p:set>
+                                      <p:cBhvr>
+                                        <p:cTn id="9" dur="1" fill="hold">
+                                          <p:stCondLst>
+                                            <p:cond delay="0"/>
+                                          </p:stCondLst>
+                                        </p:cTn>
+                                        <p:tgtEl>
+                                          <p:spTgt spid="190"/>
+                                        </p:tgtEl>
+                                        <p:attrNameLst>
+                                          <p:attrName>style.visibility</p:attrName>
+                                        </p:attrNameLst>
+                                      </p:cBhvr>
+                                      <p:to>
+                                        <p:strVal val="visible"/>
+                                      </p:to>
+                                    </p:set>
+                                    <p:anim calcmode="lin" valueType="num">
+                                      <p:cBhvr additive="base">
+                                        <p:cTn id="10" dur="500"/>
+                                        <p:tgtEl>
+                                          <p:spTgt spid="190"/>
+                                        </p:tgtEl>
+                                        <p:attrNameLst>
+                                          <p:attrName>ppt_x</p:attrName>
+                                        </p:attrNameLst>
+                                      </p:cBhvr>
+                                      <p:tavLst>
+                                        <p:tav tm="0">
+                                          <p:val>
+                                            <p:strVal val="#ppt_x+1"/>
+                                          </p:val>
+                                        </p:tav>
+                                        <p:tav tm="100000">
+                                          <p:val>
+                                            <p:strVal val="#ppt_x"/>
+                                          </p:val>
+                                        </p:tav>
+                                      </p:tavLst>
+                                    </p:anim>
+                                  </p:childTnLst>
+                                </p:cTn>
+                              </p:par>
+                            </p:childTnLst>
+                          </p:cTn>
+                        </p:par>
+                      </p:childTnLst>
+                    </p:cTn>
+                  </p:par>
+                </p:childTnLst>
+              </p:cTn>
+              <p:prevCondLst>
+                <p:cond evt="onPrev" delay="0">
+                  <p:tgtEl>
+                    <p:sldTgt/>
+                  </p:tgtEl>
+                </p:cond>
+              </p:prevCondLst>
+              <p:nextCondLst>
+                <p:cond evt="onNext" delay="0">
+                  <p:tgtEl>
+                    <p:sldTgt/>
+                  </p:tgtEl>
+                </p:cond>
+              </p:nextCondLst>
+            </p:seq>
+          </p:childTnLst>
+        </p:cTn>
+      </p:par>
+    </p:tnLst>
+  </p:timing>
+</p:sld>
+</file>
+
+<file path=ppt/slides/slide4.xml><?xml version="1.0" encoding="utf-8"?>
+<p:sld xmlns:a="http://schemas.openxmlformats.org/drawingml/2006/main" xmlns:r="http://schemas.openxmlformats.org/officeDocument/2006/relationships" xmlns:p="http://schemas.openxmlformats.org/presentationml/2006/main">
+  <p:cSld>
+    <p:spTree>
+      <p:nvGrpSpPr>
+        <p:cNvPr id="1" name="Shape 186">
+          <a:extLst>
+            <a:ext uri="{FF2B5EF4-FFF2-40B4-BE49-F238E27FC236}">
+              <a16:creationId xmlns:a16="http://schemas.microsoft.com/office/drawing/2014/main" id="{C63AE550-75FF-625D-F6DB-893903872DB4}"/>
+            </a:ext>
+          </a:extLst>
+        </p:cNvPr>
+        <p:cNvGrpSpPr/>
+        <p:nvPr/>
+      </p:nvGrpSpPr>
+      <p:grpSpPr>
+        <a:xfrm>
+          <a:off x="0" y="0"/>
+          <a:ext cx="0" cy="0"/>
+          <a:chOff x="0" y="0"/>
+          <a:chExt cx="0" cy="0"/>
+        </a:xfrm>
+      </p:grpSpPr>
+      <p:grpSp>
+        <p:nvGrpSpPr>
+          <p:cNvPr id="190" name="Google Shape;190;p5">
+            <a:extLst>
+              <a:ext uri="{FF2B5EF4-FFF2-40B4-BE49-F238E27FC236}">
+                <a16:creationId xmlns:a16="http://schemas.microsoft.com/office/drawing/2014/main" id="{6CD42A5F-2E54-F217-32CD-E78B2BF6FB2B}"/>
+              </a:ext>
+            </a:extLst>
+          </p:cNvPr>
+          <p:cNvGrpSpPr/>
+          <p:nvPr/>
+        </p:nvGrpSpPr>
+        <p:grpSpPr>
+          <a:xfrm>
+            <a:off x="1670730" y="1263299"/>
+            <a:ext cx="8616270" cy="1007332"/>
+            <a:chOff x="3129129" y="1121776"/>
+            <a:chExt cx="5933741" cy="1171624"/>
+          </a:xfrm>
+        </p:grpSpPr>
+        <p:sp>
+          <p:nvSpPr>
+            <p:cNvPr id="191" name="Google Shape;191;p5">
+              <a:extLst>
+                <a:ext uri="{FF2B5EF4-FFF2-40B4-BE49-F238E27FC236}">
+                  <a16:creationId xmlns:a16="http://schemas.microsoft.com/office/drawing/2014/main" id="{D7289725-BD5B-6AB0-FEF8-01D06BF5C748}"/>
+                </a:ext>
+              </a:extLst>
+            </p:cNvPr>
+            <p:cNvSpPr/>
+            <p:nvPr/>
+          </p:nvSpPr>
+          <p:spPr>
+            <a:xfrm>
+              <a:off x="3129129" y="1121776"/>
+              <a:ext cx="5933741" cy="1171624"/>
+            </a:xfrm>
+            <a:prstGeom prst="roundRect">
+              <a:avLst>
+                <a:gd name="adj" fmla="val 50000"/>
+              </a:avLst>
+            </a:prstGeom>
+            <a:solidFill>
+              <a:srgbClr val="D8D8D8">
+                <a:alpha val="49803"/>
+              </a:srgbClr>
+            </a:solidFill>
+            <a:ln>
+              <a:noFill/>
+            </a:ln>
+          </p:spPr>
+          <p:txBody>
+            <a:bodyPr spcFirstLastPara="1" wrap="square" lIns="91425" tIns="45700" rIns="91425" bIns="45700" anchor="ctr" anchorCtr="0">
+              <a:noAutofit/>
+            </a:bodyPr>
+            <a:lstStyle/>
+            <a:p>
+              <a:pPr marL="0" marR="0" lvl="0" indent="0" algn="l" rtl="0">
+                <a:spcBef>
+                  <a:spcPts val="0"/>
+                </a:spcBef>
+                <a:spcAft>
+                  <a:spcPts val="0"/>
+                </a:spcAft>
+                <a:buNone/>
+              </a:pPr>
+              <a:endParaRPr sz="2800">
+                <a:solidFill>
+                  <a:srgbClr val="FFAA2D"/>
+                </a:solidFill>
+                <a:latin typeface="Arial"/>
+                <a:ea typeface="Arial"/>
+                <a:cs typeface="Arial"/>
+                <a:sym typeface="Arial"/>
+              </a:endParaRPr>
+            </a:p>
+          </p:txBody>
+        </p:sp>
+        <p:sp>
+          <p:nvSpPr>
+            <p:cNvPr id="192" name="Google Shape;192;p5">
+              <a:extLst>
+                <a:ext uri="{FF2B5EF4-FFF2-40B4-BE49-F238E27FC236}">
+                  <a16:creationId xmlns:a16="http://schemas.microsoft.com/office/drawing/2014/main" id="{CC9843F6-1C78-7EA7-8740-AEADDBB069E1}"/>
+                </a:ext>
+              </a:extLst>
+            </p:cNvPr>
+            <p:cNvSpPr/>
+            <p:nvPr/>
+          </p:nvSpPr>
+          <p:spPr>
+            <a:xfrm>
+              <a:off x="3289330" y="1253414"/>
+              <a:ext cx="5613340" cy="908350"/>
+            </a:xfrm>
+            <a:prstGeom prst="roundRect">
+              <a:avLst>
+                <a:gd name="adj" fmla="val 50000"/>
+              </a:avLst>
+            </a:prstGeom>
+            <a:gradFill>
+              <a:gsLst>
+                <a:gs pos="0">
+                  <a:srgbClr val="FFAA2D"/>
+                </a:gs>
+                <a:gs pos="100000">
+                  <a:srgbClr val="FFD393"/>
+                </a:gs>
+              </a:gsLst>
+              <a:lin ang="0" scaled="0"/>
+            </a:gradFill>
+            <a:ln w="19050" cap="flat" cmpd="sng">
+              <a:solidFill>
+                <a:srgbClr val="BFBFBF"/>
+              </a:solidFill>
+              <a:prstDash val="solid"/>
+              <a:miter lim="800000"/>
+              <a:headEnd type="none" w="sm" len="sm"/>
+              <a:tailEnd type="none" w="sm" len="sm"/>
+            </a:ln>
+          </p:spPr>
+          <p:txBody>
+            <a:bodyPr spcFirstLastPara="1" wrap="square" lIns="91425" tIns="45700" rIns="91425" bIns="45700" anchor="ctr" anchorCtr="0">
+              <a:noAutofit/>
+            </a:bodyPr>
+            <a:lstStyle/>
+            <a:p>
+              <a:pPr marL="0" marR="0" lvl="0" indent="0" algn="l" rtl="0">
+                <a:spcBef>
+                  <a:spcPts val="0"/>
+                </a:spcBef>
+                <a:spcAft>
+                  <a:spcPts val="0"/>
+                </a:spcAft>
+                <a:buNone/>
+              </a:pPr>
+              <a:endParaRPr sz="2800">
+                <a:solidFill>
+                  <a:srgbClr val="FFAA2D"/>
+                </a:solidFill>
+                <a:latin typeface="Arial"/>
+                <a:ea typeface="Arial"/>
+                <a:cs typeface="Arial"/>
+                <a:sym typeface="Arial"/>
+              </a:endParaRPr>
+            </a:p>
+          </p:txBody>
+        </p:sp>
+      </p:grpSp>
+      <p:grpSp>
+        <p:nvGrpSpPr>
+          <p:cNvPr id="193" name="Google Shape;193;p5">
+            <a:extLst>
+              <a:ext uri="{FF2B5EF4-FFF2-40B4-BE49-F238E27FC236}">
+                <a16:creationId xmlns:a16="http://schemas.microsoft.com/office/drawing/2014/main" id="{AEACE206-9F6F-405C-F04F-C6D41627AB34}"/>
+              </a:ext>
+            </a:extLst>
+          </p:cNvPr>
+          <p:cNvGrpSpPr/>
+          <p:nvPr/>
+        </p:nvGrpSpPr>
+        <p:grpSpPr>
+          <a:xfrm>
+            <a:off x="1782659" y="1240148"/>
+            <a:ext cx="1674310" cy="1522886"/>
+            <a:chOff x="3020983" y="881796"/>
+            <a:chExt cx="2097410" cy="2097410"/>
+          </a:xfrm>
+        </p:grpSpPr>
+        <p:grpSp>
+          <p:nvGrpSpPr>
+            <p:cNvPr id="194" name="Google Shape;194;p5">
+              <a:extLst>
+                <a:ext uri="{FF2B5EF4-FFF2-40B4-BE49-F238E27FC236}">
+                  <a16:creationId xmlns:a16="http://schemas.microsoft.com/office/drawing/2014/main" id="{6DBF4E99-7EB9-8883-E213-0582C46FDAB1}"/>
+                </a:ext>
+              </a:extLst>
+            </p:cNvPr>
+            <p:cNvGrpSpPr/>
+            <p:nvPr/>
+          </p:nvGrpSpPr>
+          <p:grpSpPr>
+            <a:xfrm>
+              <a:off x="3020983" y="881796"/>
+              <a:ext cx="2097410" cy="2097410"/>
+              <a:chOff x="3099689" y="1098878"/>
+              <a:chExt cx="1995612" cy="1995615"/>
+            </a:xfrm>
+          </p:grpSpPr>
+          <p:grpSp>
+            <p:nvGrpSpPr>
+              <p:cNvPr id="195" name="Google Shape;195;p5">
+                <a:extLst>
+                  <a:ext uri="{FF2B5EF4-FFF2-40B4-BE49-F238E27FC236}">
+                    <a16:creationId xmlns:a16="http://schemas.microsoft.com/office/drawing/2014/main" id="{42EC720A-2DC2-81B0-299F-E96EC7D69F9D}"/>
+                  </a:ext>
+                </a:extLst>
+              </p:cNvPr>
+              <p:cNvGrpSpPr/>
+              <p:nvPr/>
+            </p:nvGrpSpPr>
+            <p:grpSpPr>
+              <a:xfrm>
+                <a:off x="3099689" y="1098878"/>
+                <a:ext cx="1995612" cy="1995615"/>
+                <a:chOff x="6804316" y="2574806"/>
+                <a:chExt cx="3585705" cy="3585705"/>
+              </a:xfrm>
+            </p:grpSpPr>
+            <p:sp>
+              <p:nvSpPr>
+                <p:cNvPr id="196" name="Google Shape;196;p5">
+                  <a:extLst>
+                    <a:ext uri="{FF2B5EF4-FFF2-40B4-BE49-F238E27FC236}">
+                      <a16:creationId xmlns:a16="http://schemas.microsoft.com/office/drawing/2014/main" id="{315E151F-1491-1F95-A251-60E53331A5A7}"/>
+                    </a:ext>
+                  </a:extLst>
+                </p:cNvPr>
+                <p:cNvSpPr/>
+                <p:nvPr/>
+              </p:nvSpPr>
+              <p:spPr>
+                <a:xfrm rot="-2700000">
+                  <a:off x="7501948" y="2927402"/>
+                  <a:ext cx="2190440" cy="2880512"/>
+                </a:xfrm>
+                <a:custGeom>
+                  <a:avLst/>
+                  <a:gdLst/>
+                  <a:ahLst/>
+                  <a:cxnLst/>
+                  <a:rect l="l" t="t" r="r" b="b"/>
+                  <a:pathLst>
+                    <a:path w="1696474" h="2070736" extrusionOk="0">
+                      <a:moveTo>
+                        <a:pt x="13249" y="1035368"/>
+                      </a:moveTo>
+                      <a:cubicBezTo>
+                        <a:pt x="112309" y="471170"/>
+                        <a:pt x="388098" y="0"/>
+                        <a:pt x="850497" y="0"/>
+                      </a:cubicBezTo>
+                      <a:cubicBezTo>
+                        <a:pt x="1312896" y="0"/>
+                        <a:pt x="1611545" y="478790"/>
+                        <a:pt x="1687745" y="1035368"/>
+                      </a:cubicBezTo>
+                      <a:cubicBezTo>
+                        <a:pt x="1765308" y="1601901"/>
+                        <a:pt x="1312896" y="2070736"/>
+                        <a:pt x="850497" y="2070736"/>
+                      </a:cubicBezTo>
+                      <a:cubicBezTo>
+                        <a:pt x="388098" y="2070736"/>
+                        <a:pt x="-85811" y="1599566"/>
+                        <a:pt x="13249" y="1035368"/>
+                      </a:cubicBezTo>
+                      <a:close/>
+                    </a:path>
+                  </a:pathLst>
+                </a:custGeom>
+                <a:gradFill>
+                  <a:gsLst>
+                    <a:gs pos="0">
+                      <a:schemeClr val="dk1"/>
+                    </a:gs>
+                    <a:gs pos="17000">
+                      <a:srgbClr val="000000">
+                        <a:alpha val="45882"/>
+                      </a:srgbClr>
+                    </a:gs>
+                    <a:gs pos="34000">
+                      <a:srgbClr val="000000">
+                        <a:alpha val="42745"/>
+                      </a:srgbClr>
+                    </a:gs>
+                    <a:gs pos="51000">
+                      <a:srgbClr val="000000">
+                        <a:alpha val="20000"/>
+                      </a:srgbClr>
+                    </a:gs>
+                    <a:gs pos="65000">
+                      <a:srgbClr val="000000">
+                        <a:alpha val="9803"/>
+                      </a:srgbClr>
+                    </a:gs>
+                    <a:gs pos="78000">
+                      <a:srgbClr val="000000">
+                        <a:alpha val="4705"/>
+                      </a:srgbClr>
+                    </a:gs>
+                    <a:gs pos="100000">
+                      <a:srgbClr val="000000">
+                        <a:alpha val="0"/>
+                      </a:srgbClr>
+                    </a:gs>
+                  </a:gsLst>
+                  <a:lin ang="5400000" scaled="0"/>
+                </a:gradFill>
+                <a:ln>
+                  <a:noFill/>
+                </a:ln>
+              </p:spPr>
+              <p:txBody>
+                <a:bodyPr spcFirstLastPara="1" wrap="square" lIns="91425" tIns="45700" rIns="91425" bIns="45700" anchor="ctr" anchorCtr="0">
+                  <a:noAutofit/>
+                </a:bodyPr>
+                <a:lstStyle/>
+                <a:p>
+                  <a:pPr marL="0" marR="0" lvl="0" indent="0" algn="l" rtl="0">
+                    <a:spcBef>
+                      <a:spcPts val="0"/>
+                    </a:spcBef>
+                    <a:spcAft>
+                      <a:spcPts val="0"/>
+                    </a:spcAft>
+                    <a:buNone/>
+                  </a:pPr>
+                  <a:endParaRPr sz="2800">
+                    <a:solidFill>
+                      <a:schemeClr val="lt1"/>
+                    </a:solidFill>
+                    <a:latin typeface="Arial"/>
+                    <a:ea typeface="Arial"/>
+                    <a:cs typeface="Arial"/>
+                    <a:sym typeface="Arial"/>
+                  </a:endParaRPr>
+                </a:p>
+              </p:txBody>
+            </p:sp>
+            <p:sp>
+              <p:nvSpPr>
+                <p:cNvPr id="197" name="Google Shape;197;p5">
+                  <a:extLst>
+                    <a:ext uri="{FF2B5EF4-FFF2-40B4-BE49-F238E27FC236}">
+                      <a16:creationId xmlns:a16="http://schemas.microsoft.com/office/drawing/2014/main" id="{A6BE1973-3B56-9736-23C6-45B2F5A3A365}"/>
+                    </a:ext>
+                  </a:extLst>
+                </p:cNvPr>
+                <p:cNvSpPr/>
+                <p:nvPr/>
+              </p:nvSpPr>
+              <p:spPr>
+                <a:xfrm>
+                  <a:off x="7567583" y="3243359"/>
+                  <a:ext cx="1344545" cy="1344543"/>
+                </a:xfrm>
+                <a:prstGeom prst="ellipse">
+                  <a:avLst/>
+                </a:prstGeom>
+                <a:gradFill>
+                  <a:gsLst>
+                    <a:gs pos="0">
+                      <a:srgbClr val="FFFFFF">
+                        <a:alpha val="98823"/>
+                      </a:srgbClr>
+                    </a:gs>
+                    <a:gs pos="43000">
+                      <a:srgbClr val="F7F7F7"/>
+                    </a:gs>
+                    <a:gs pos="100000">
+                      <a:srgbClr val="B8C0C0"/>
+                    </a:gs>
+                  </a:gsLst>
+                  <a:lin ang="2700000" scaled="0"/>
+                </a:gradFill>
+                <a:ln>
+                  <a:noFill/>
+                </a:ln>
+                <a:effectLst>
+                  <a:outerShdw blurRad="139700" dist="88900" dir="2700000" algn="tl" rotWithShape="0">
+                    <a:srgbClr val="494949">
+                      <a:alpha val="29803"/>
+                    </a:srgbClr>
+                  </a:outerShdw>
+                </a:effectLst>
+              </p:spPr>
+              <p:txBody>
+                <a:bodyPr spcFirstLastPara="1" wrap="square" lIns="91425" tIns="45700" rIns="91425" bIns="45700" anchor="ctr" anchorCtr="0">
+                  <a:noAutofit/>
+                </a:bodyPr>
+                <a:lstStyle/>
+                <a:p>
+                  <a:pPr marL="0" marR="0" lvl="0" indent="0" algn="l" rtl="0">
+                    <a:spcBef>
+                      <a:spcPts val="0"/>
+                    </a:spcBef>
+                    <a:spcAft>
+                      <a:spcPts val="0"/>
+                    </a:spcAft>
+                    <a:buNone/>
+                  </a:pPr>
+                  <a:endParaRPr sz="2800">
+                    <a:solidFill>
+                      <a:schemeClr val="lt1"/>
+                    </a:solidFill>
+                    <a:latin typeface="Arial"/>
+                    <a:ea typeface="Arial"/>
+                    <a:cs typeface="Arial"/>
+                    <a:sym typeface="Arial"/>
+                  </a:endParaRPr>
+                </a:p>
+              </p:txBody>
+            </p:sp>
+            <p:sp>
+              <p:nvSpPr>
+                <p:cNvPr id="198" name="Google Shape;198;p5">
+                  <a:extLst>
+                    <a:ext uri="{FF2B5EF4-FFF2-40B4-BE49-F238E27FC236}">
+                      <a16:creationId xmlns:a16="http://schemas.microsoft.com/office/drawing/2014/main" id="{C8410AE1-9841-E3D4-0C73-8275E8D37DDD}"/>
+                    </a:ext>
+                  </a:extLst>
+                </p:cNvPr>
+                <p:cNvSpPr/>
+                <p:nvPr/>
+              </p:nvSpPr>
+              <p:spPr>
+                <a:xfrm>
+                  <a:off x="7380501" y="3019185"/>
+                  <a:ext cx="1596494" cy="1596494"/>
+                </a:xfrm>
+                <a:prstGeom prst="ellipse">
+                  <a:avLst/>
+                </a:prstGeom>
+                <a:gradFill>
+                  <a:gsLst>
+                    <a:gs pos="0">
+                      <a:srgbClr val="FFFFFF">
+                        <a:alpha val="98823"/>
+                      </a:srgbClr>
+                    </a:gs>
+                    <a:gs pos="11000">
+                      <a:srgbClr val="FFFFFF">
+                        <a:alpha val="98823"/>
+                      </a:srgbClr>
+                    </a:gs>
+                    <a:gs pos="39000">
+                      <a:schemeClr val="lt1"/>
+                    </a:gs>
+                    <a:gs pos="52999">
+                      <a:srgbClr val="F7F7F7"/>
+                    </a:gs>
+                    <a:gs pos="100000">
+                      <a:srgbClr val="B8C0C0"/>
+                    </a:gs>
+                  </a:gsLst>
+                  <a:lin ang="2700000" scaled="0"/>
+                </a:gradFill>
+                <a:ln>
+                  <a:noFill/>
+                </a:ln>
+              </p:spPr>
+              <p:txBody>
+                <a:bodyPr spcFirstLastPara="1" wrap="square" lIns="91425" tIns="45700" rIns="91425" bIns="45700" anchor="ctr" anchorCtr="0">
+                  <a:noAutofit/>
+                </a:bodyPr>
+                <a:lstStyle/>
+                <a:p>
+                  <a:pPr marL="0" marR="0" lvl="0" indent="0" algn="l" rtl="0">
+                    <a:spcBef>
+                      <a:spcPts val="0"/>
+                    </a:spcBef>
+                    <a:spcAft>
+                      <a:spcPts val="0"/>
+                    </a:spcAft>
+                    <a:buNone/>
+                  </a:pPr>
+                  <a:endParaRPr sz="2800">
+                    <a:solidFill>
+                      <a:schemeClr val="lt1"/>
+                    </a:solidFill>
+                    <a:latin typeface="Arial"/>
+                    <a:ea typeface="Arial"/>
+                    <a:cs typeface="Arial"/>
+                    <a:sym typeface="Arial"/>
+                  </a:endParaRPr>
+                </a:p>
+              </p:txBody>
+            </p:sp>
+          </p:grpSp>
+          <p:sp>
+            <p:nvSpPr>
+              <p:cNvPr id="199" name="Google Shape;199;p5">
+                <a:extLst>
+                  <a:ext uri="{FF2B5EF4-FFF2-40B4-BE49-F238E27FC236}">
+                    <a16:creationId xmlns:a16="http://schemas.microsoft.com/office/drawing/2014/main" id="{7B0FBC1A-5640-25AA-C647-857F2E983E58}"/>
+                  </a:ext>
+                </a:extLst>
+              </p:cNvPr>
+              <p:cNvSpPr/>
+              <p:nvPr/>
+            </p:nvSpPr>
+            <p:spPr>
+              <a:xfrm>
+                <a:off x="3222820" y="1148080"/>
+                <a:ext cx="1284820" cy="1284821"/>
+              </a:xfrm>
+              <a:prstGeom prst="ellipse">
+                <a:avLst/>
+              </a:prstGeom>
+              <a:solidFill>
+                <a:schemeClr val="lt1">
+                  <a:alpha val="13725"/>
+                </a:schemeClr>
+              </a:solidFill>
+              <a:ln w="15875" cap="flat" cmpd="sng">
+                <a:solidFill>
+                  <a:schemeClr val="lt1"/>
+                </a:solidFill>
+                <a:prstDash val="solid"/>
+                <a:miter lim="800000"/>
+                <a:headEnd type="none" w="sm" len="sm"/>
+                <a:tailEnd type="none" w="sm" len="sm"/>
+              </a:ln>
+              <a:effectLst>
+                <a:outerShdw blurRad="215900" dist="88900" dir="2700000" algn="tl" rotWithShape="0">
+                  <a:srgbClr val="000000">
+                    <a:alpha val="10980"/>
+                  </a:srgbClr>
+                </a:outerShdw>
+              </a:effectLst>
+            </p:spPr>
+            <p:txBody>
+              <a:bodyPr spcFirstLastPara="1" wrap="square" lIns="91425" tIns="45700" rIns="91425" bIns="45700" anchor="ctr" anchorCtr="0">
+                <a:noAutofit/>
+              </a:bodyPr>
+              <a:lstStyle/>
+              <a:p>
+                <a:pPr marL="0" marR="0" lvl="0" indent="0" algn="l" rtl="0">
+                  <a:spcBef>
+                    <a:spcPts val="0"/>
+                  </a:spcBef>
+                  <a:spcAft>
+                    <a:spcPts val="0"/>
+                  </a:spcAft>
+                  <a:buNone/>
+                </a:pPr>
+                <a:endParaRPr sz="2800">
+                  <a:solidFill>
+                    <a:schemeClr val="lt1"/>
+                  </a:solidFill>
+                  <a:latin typeface="Arial"/>
+                  <a:ea typeface="Arial"/>
+                  <a:cs typeface="Arial"/>
+                  <a:sym typeface="Arial"/>
+                </a:endParaRPr>
+              </a:p>
+            </p:txBody>
+          </p:sp>
+        </p:grpSp>
+        <p:sp>
+          <p:nvSpPr>
+            <p:cNvPr id="200" name="Google Shape;200;p5">
+              <a:extLst>
+                <a:ext uri="{FF2B5EF4-FFF2-40B4-BE49-F238E27FC236}">
+                  <a16:creationId xmlns:a16="http://schemas.microsoft.com/office/drawing/2014/main" id="{5669DAA2-492B-C9C7-B06F-4A8722D72139}"/>
+                </a:ext>
+              </a:extLst>
+            </p:cNvPr>
+            <p:cNvSpPr txBox="1"/>
+            <p:nvPr/>
+          </p:nvSpPr>
+          <p:spPr>
+            <a:xfrm>
+              <a:off x="3514455" y="1292811"/>
+              <a:ext cx="774240" cy="720610"/>
+            </a:xfrm>
+            <a:prstGeom prst="rect">
+              <a:avLst/>
+            </a:prstGeom>
+            <a:noFill/>
+            <a:ln>
+              <a:noFill/>
+            </a:ln>
+          </p:spPr>
+          <p:txBody>
+            <a:bodyPr spcFirstLastPara="1" wrap="square" lIns="91425" tIns="45700" rIns="91425" bIns="45700" anchor="t" anchorCtr="0">
+              <a:spAutoFit/>
+            </a:bodyPr>
+            <a:lstStyle/>
+            <a:p>
+              <a:pPr marL="0" marR="0" lvl="0" indent="0" algn="l" rtl="0">
+                <a:spcBef>
+                  <a:spcPts val="0"/>
+                </a:spcBef>
+                <a:spcAft>
+                  <a:spcPts val="0"/>
+                </a:spcAft>
+                <a:buNone/>
+              </a:pPr>
+              <a:r>
+                <a:rPr lang="en-US" sz="2800">
+                  <a:solidFill>
+                    <a:srgbClr val="FFB850"/>
+                  </a:solidFill>
+                  <a:latin typeface="Impact"/>
+                  <a:ea typeface="Impact"/>
+                  <a:cs typeface="Impact"/>
+                  <a:sym typeface="Impact"/>
+                </a:rPr>
+                <a:t>01</a:t>
+              </a:r>
+              <a:endParaRPr sz="2800">
+                <a:solidFill>
+                  <a:srgbClr val="FFB850"/>
+                </a:solidFill>
+                <a:latin typeface="Impact"/>
+                <a:ea typeface="Impact"/>
+                <a:cs typeface="Impact"/>
+                <a:sym typeface="Impact"/>
+              </a:endParaRPr>
+            </a:p>
+          </p:txBody>
+        </p:sp>
+      </p:grpSp>
+      <p:sp>
+        <p:nvSpPr>
+          <p:cNvPr id="201" name="Google Shape;201;p5">
+            <a:extLst>
+              <a:ext uri="{FF2B5EF4-FFF2-40B4-BE49-F238E27FC236}">
+                <a16:creationId xmlns:a16="http://schemas.microsoft.com/office/drawing/2014/main" id="{8F2CA49E-5285-1F30-3255-07A735CBB28A}"/>
+              </a:ext>
+            </a:extLst>
+          </p:cNvPr>
+          <p:cNvSpPr txBox="1"/>
+          <p:nvPr/>
+        </p:nvSpPr>
+        <p:spPr>
+          <a:xfrm>
+            <a:off x="2980807" y="1521544"/>
+            <a:ext cx="6905838" cy="523220"/>
+          </a:xfrm>
+          <a:prstGeom prst="rect">
+            <a:avLst/>
+          </a:prstGeom>
+          <a:noFill/>
+          <a:ln>
+            <a:noFill/>
+          </a:ln>
+        </p:spPr>
+        <p:txBody>
+          <a:bodyPr spcFirstLastPara="1" wrap="square" lIns="91425" tIns="45700" rIns="91425" bIns="45700" anchor="t" anchorCtr="0">
+            <a:spAutoFit/>
+          </a:bodyPr>
+          <a:lstStyle/>
+          <a:p>
+            <a:pPr marL="0" marR="0" lvl="0" indent="0" algn="l" rtl="0">
+              <a:spcBef>
+                <a:spcPts val="0"/>
+              </a:spcBef>
+              <a:spcAft>
+                <a:spcPts val="0"/>
+              </a:spcAft>
+              <a:buNone/>
+            </a:pPr>
+            <a:r>
+              <a:rPr lang="en-US" sz="2800" b="1" dirty="0">
+                <a:solidFill>
+                  <a:schemeClr val="dk1"/>
+                </a:solidFill>
+                <a:latin typeface="Times New Roman"/>
+                <a:ea typeface="Times New Roman"/>
+                <a:cs typeface="Times New Roman"/>
+                <a:sym typeface="Times New Roman"/>
+              </a:rPr>
+              <a:t>Spring data JPA</a:t>
+            </a:r>
+            <a:endParaRPr sz="2800" b="1" dirty="0">
+              <a:solidFill>
+                <a:schemeClr val="dk1"/>
+              </a:solidFill>
+              <a:latin typeface="Times New Roman"/>
+              <a:ea typeface="Times New Roman"/>
+              <a:cs typeface="Times New Roman"/>
+              <a:sym typeface="Times New Roman"/>
+            </a:endParaRPr>
+          </a:p>
+        </p:txBody>
+      </p:sp>
+      <p:sp>
+        <p:nvSpPr>
+          <p:cNvPr id="202" name="Google Shape;202;p5">
+            <a:extLst>
+              <a:ext uri="{FF2B5EF4-FFF2-40B4-BE49-F238E27FC236}">
+                <a16:creationId xmlns:a16="http://schemas.microsoft.com/office/drawing/2014/main" id="{80280948-CE7F-E35B-7C88-7F395A8E43E2}"/>
+              </a:ext>
+            </a:extLst>
+          </p:cNvPr>
+          <p:cNvSpPr/>
+          <p:nvPr/>
+        </p:nvSpPr>
+        <p:spPr>
+          <a:xfrm>
+            <a:off x="1670730" y="2505849"/>
+            <a:ext cx="9367384" cy="3437751"/>
+          </a:xfrm>
+          <a:prstGeom prst="rect">
+            <a:avLst/>
+          </a:prstGeom>
+          <a:solidFill>
+            <a:schemeClr val="lt1"/>
+          </a:solidFill>
+          <a:ln w="12700" cap="flat" cmpd="sng">
+            <a:solidFill>
+              <a:schemeClr val="accent4"/>
+            </a:solidFill>
+            <a:prstDash val="solid"/>
+            <a:miter lim="800000"/>
+            <a:headEnd type="none" w="sm" len="sm"/>
+            <a:tailEnd type="none" w="sm" len="sm"/>
+          </a:ln>
+        </p:spPr>
+        <p:txBody>
+          <a:bodyPr spcFirstLastPara="1" wrap="square" lIns="91425" tIns="45700" rIns="91425" bIns="45700" anchor="t" anchorCtr="0">
+            <a:noAutofit/>
+          </a:bodyPr>
+          <a:lstStyle/>
+          <a:p>
+            <a:pPr marL="0" marR="0" lvl="0" indent="0" algn="l" rtl="0">
+              <a:spcBef>
+                <a:spcPts val="0"/>
+              </a:spcBef>
+              <a:spcAft>
+                <a:spcPts val="0"/>
+              </a:spcAft>
+              <a:buNone/>
+            </a:pPr>
+            <a:r>
+              <a:rPr lang="vi-VN" sz="2800" b="0" i="0" dirty="0">
+                <a:solidFill>
+                  <a:srgbClr val="222222"/>
+                </a:solidFill>
+                <a:effectLst/>
+                <a:latin typeface="Times New Roman" panose="02020603050405020304" pitchFamily="18" charset="0"/>
+                <a:cs typeface="Times New Roman" panose="02020603050405020304" pitchFamily="18" charset="0"/>
+              </a:rPr>
+              <a:t>Spring Data JPA cung cấp:</a:t>
+            </a:r>
+            <a:endParaRPr lang="en-US" sz="2800" b="0" i="0" dirty="0">
+              <a:solidFill>
+                <a:srgbClr val="222222"/>
+              </a:solidFill>
+              <a:effectLst/>
+              <a:latin typeface="Times New Roman" panose="02020603050405020304" pitchFamily="18" charset="0"/>
+              <a:cs typeface="Times New Roman" panose="02020603050405020304" pitchFamily="18" charset="0"/>
+            </a:endParaRPr>
+          </a:p>
+          <a:p>
+            <a:pPr marL="0" marR="0" lvl="0" indent="0" algn="l" rtl="0">
+              <a:spcBef>
+                <a:spcPts val="0"/>
+              </a:spcBef>
+              <a:spcAft>
+                <a:spcPts val="0"/>
+              </a:spcAft>
+              <a:buNone/>
+            </a:pPr>
+            <a:r>
+              <a:rPr lang="en-US" sz="2800" b="0" i="0" dirty="0">
+                <a:solidFill>
+                  <a:srgbClr val="222222"/>
+                </a:solidFill>
+                <a:effectLst/>
+                <a:latin typeface="Times New Roman" panose="02020603050405020304" pitchFamily="18" charset="0"/>
+                <a:cs typeface="Times New Roman" panose="02020603050405020304" pitchFamily="18" charset="0"/>
+              </a:rPr>
+              <a:t>- </a:t>
+            </a:r>
+            <a:r>
+              <a:rPr lang="vi-VN" sz="2800" b="0" i="0" dirty="0">
+                <a:solidFill>
+                  <a:srgbClr val="222222"/>
+                </a:solidFill>
+                <a:effectLst/>
+                <a:latin typeface="Times New Roman" panose="02020603050405020304" pitchFamily="18" charset="0"/>
+                <a:cs typeface="Times New Roman" panose="02020603050405020304" pitchFamily="18" charset="0"/>
+              </a:rPr>
+              <a:t>Repository Pattern</a:t>
+            </a:r>
+            <a:endParaRPr lang="en-US" sz="2800" b="0" i="0" dirty="0">
+              <a:solidFill>
+                <a:srgbClr val="222222"/>
+              </a:solidFill>
+              <a:effectLst/>
+              <a:latin typeface="Times New Roman" panose="02020603050405020304" pitchFamily="18" charset="0"/>
+              <a:cs typeface="Times New Roman" panose="02020603050405020304" pitchFamily="18" charset="0"/>
+            </a:endParaRPr>
+          </a:p>
+          <a:p>
+            <a:pPr marR="0" lvl="0" algn="l" rtl="0">
+              <a:spcBef>
+                <a:spcPts val="0"/>
+              </a:spcBef>
+              <a:spcAft>
+                <a:spcPts val="0"/>
+              </a:spcAft>
+            </a:pPr>
+            <a:r>
+              <a:rPr lang="en-US" sz="2800" b="0" i="0" dirty="0">
+                <a:solidFill>
+                  <a:srgbClr val="222222"/>
+                </a:solidFill>
+                <a:effectLst/>
+                <a:latin typeface="Times New Roman" panose="02020603050405020304" pitchFamily="18" charset="0"/>
+                <a:cs typeface="Times New Roman" panose="02020603050405020304" pitchFamily="18" charset="0"/>
+              </a:rPr>
+              <a:t>- </a:t>
+            </a:r>
+            <a:r>
+              <a:rPr lang="vi-VN" sz="2800" b="0" i="0" dirty="0">
+                <a:solidFill>
+                  <a:srgbClr val="222222"/>
+                </a:solidFill>
+                <a:effectLst/>
+                <a:latin typeface="Times New Roman" panose="02020603050405020304" pitchFamily="18" charset="0"/>
+                <a:cs typeface="Times New Roman" panose="02020603050405020304" pitchFamily="18" charset="0"/>
+              </a:rPr>
+              <a:t>Query Methods</a:t>
+            </a:r>
+            <a:endParaRPr lang="en-US" sz="2800" b="0" i="0" dirty="0">
+              <a:solidFill>
+                <a:srgbClr val="222222"/>
+              </a:solidFill>
+              <a:effectLst/>
+              <a:latin typeface="Times New Roman" panose="02020603050405020304" pitchFamily="18" charset="0"/>
+              <a:cs typeface="Times New Roman" panose="02020603050405020304" pitchFamily="18" charset="0"/>
+            </a:endParaRPr>
+          </a:p>
+          <a:p>
+            <a:pPr marR="0" lvl="0" algn="l" rtl="0">
+              <a:spcBef>
+                <a:spcPts val="0"/>
+              </a:spcBef>
+              <a:spcAft>
+                <a:spcPts val="0"/>
+              </a:spcAft>
+            </a:pPr>
+            <a:r>
+              <a:rPr lang="en-US" sz="2800" dirty="0">
+                <a:solidFill>
+                  <a:srgbClr val="222222"/>
+                </a:solidFill>
+                <a:latin typeface="Times New Roman" panose="02020603050405020304" pitchFamily="18" charset="0"/>
+                <a:cs typeface="Times New Roman" panose="02020603050405020304" pitchFamily="18" charset="0"/>
+              </a:rPr>
+              <a:t>- Custom Queries (JPQL, SQL)</a:t>
+            </a:r>
+          </a:p>
+          <a:p>
+            <a:pPr marR="0" lvl="0" algn="l" rtl="0">
+              <a:spcBef>
+                <a:spcPts val="0"/>
+              </a:spcBef>
+              <a:spcAft>
+                <a:spcPts val="0"/>
+              </a:spcAft>
+            </a:pPr>
+            <a:r>
+              <a:rPr lang="en-US" sz="2800" b="0" i="0" dirty="0">
+                <a:solidFill>
+                  <a:srgbClr val="222222"/>
+                </a:solidFill>
+                <a:effectLst/>
+                <a:latin typeface="Times New Roman" panose="02020603050405020304" pitchFamily="18" charset="0"/>
+                <a:cs typeface="Times New Roman" panose="02020603050405020304" pitchFamily="18" charset="0"/>
+              </a:rPr>
+              <a:t>- Pagination </a:t>
+            </a:r>
+            <a:r>
+              <a:rPr lang="en-US" sz="2800" b="0" i="0" dirty="0" err="1">
+                <a:solidFill>
+                  <a:srgbClr val="222222"/>
+                </a:solidFill>
+                <a:effectLst/>
+                <a:latin typeface="Times New Roman" panose="02020603050405020304" pitchFamily="18" charset="0"/>
+                <a:cs typeface="Times New Roman" panose="02020603050405020304" pitchFamily="18" charset="0"/>
+              </a:rPr>
+              <a:t>và</a:t>
+            </a:r>
+            <a:r>
+              <a:rPr lang="en-US" sz="2800" b="0" i="0" dirty="0">
+                <a:solidFill>
+                  <a:srgbClr val="222222"/>
+                </a:solidFill>
+                <a:effectLst/>
+                <a:latin typeface="Times New Roman" panose="02020603050405020304" pitchFamily="18" charset="0"/>
+                <a:cs typeface="Times New Roman" panose="02020603050405020304" pitchFamily="18" charset="0"/>
+              </a:rPr>
+              <a:t> Sorting</a:t>
+            </a:r>
+          </a:p>
+          <a:p>
+            <a:pPr marR="0" lvl="0" algn="l" rtl="0">
+              <a:spcBef>
+                <a:spcPts val="0"/>
+              </a:spcBef>
+              <a:spcAft>
+                <a:spcPts val="0"/>
+              </a:spcAft>
+            </a:pPr>
+            <a:r>
+              <a:rPr lang="en-US" sz="2800" b="0" i="0" dirty="0">
+                <a:solidFill>
+                  <a:srgbClr val="222222"/>
+                </a:solidFill>
+                <a:effectLst/>
+                <a:latin typeface="Times New Roman" panose="02020603050405020304" pitchFamily="18" charset="0"/>
+                <a:cs typeface="Times New Roman" panose="02020603050405020304" pitchFamily="18" charset="0"/>
+              </a:rPr>
+              <a:t>- Auditing</a:t>
+            </a:r>
+          </a:p>
+          <a:p>
+            <a:pPr marL="0" marR="0" lvl="0" indent="0" algn="l" rtl="0">
+              <a:spcBef>
+                <a:spcPts val="0"/>
+              </a:spcBef>
+              <a:spcAft>
+                <a:spcPts val="0"/>
+              </a:spcAft>
+              <a:buNone/>
+            </a:pPr>
+            <a:r>
+              <a:rPr lang="en-US" sz="2800" b="0" i="0" dirty="0">
+                <a:solidFill>
+                  <a:srgbClr val="222222"/>
+                </a:solidFill>
+                <a:effectLst/>
+                <a:latin typeface="Times New Roman" panose="02020603050405020304" pitchFamily="18" charset="0"/>
+                <a:cs typeface="Times New Roman" panose="02020603050405020304" pitchFamily="18" charset="0"/>
+              </a:rPr>
+              <a:t>- </a:t>
+            </a:r>
+            <a:r>
+              <a:rPr lang="vi-VN" sz="2800" b="0" i="0" dirty="0">
+                <a:solidFill>
+                  <a:srgbClr val="222222"/>
+                </a:solidFill>
+                <a:effectLst/>
+                <a:latin typeface="Times New Roman" panose="02020603050405020304" pitchFamily="18" charset="0"/>
+                <a:cs typeface="Times New Roman" panose="02020603050405020304" pitchFamily="18" charset="0"/>
+              </a:rPr>
+              <a:t>Integration với Spring Framework</a:t>
+            </a:r>
+            <a:endParaRPr lang="en-US" sz="2800" b="0" i="0" dirty="0">
+              <a:solidFill>
+                <a:srgbClr val="222222"/>
+              </a:solidFill>
+              <a:effectLst/>
+              <a:latin typeface="Times New Roman" panose="02020603050405020304" pitchFamily="18" charset="0"/>
+              <a:cs typeface="Times New Roman" panose="02020603050405020304" pitchFamily="18" charset="0"/>
+            </a:endParaRPr>
+          </a:p>
+          <a:p>
+            <a:pPr marL="457200" marR="0" lvl="0" indent="-457200" algn="l" rtl="0">
+              <a:spcBef>
+                <a:spcPts val="0"/>
+              </a:spcBef>
+              <a:spcAft>
+                <a:spcPts val="0"/>
+              </a:spcAft>
+              <a:buFontTx/>
+              <a:buChar char="-"/>
+            </a:pPr>
+            <a:r>
+              <a:rPr lang="vi-VN" sz="2800" b="0" i="0" dirty="0">
+                <a:solidFill>
+                  <a:srgbClr val="222222"/>
+                </a:solidFill>
+                <a:effectLst/>
+                <a:latin typeface="Times New Roman" panose="02020603050405020304" pitchFamily="18" charset="0"/>
+                <a:cs typeface="Times New Roman" panose="02020603050405020304" pitchFamily="18" charset="0"/>
+              </a:rPr>
+              <a:t>Hỗ trợ đa dạng DB</a:t>
+            </a:r>
+            <a:endParaRPr lang="en-US" sz="2800" b="0" i="0" dirty="0">
+              <a:solidFill>
+                <a:srgbClr val="222222"/>
+              </a:solidFill>
+              <a:effectLst/>
+              <a:latin typeface="Times New Roman" panose="02020603050405020304" pitchFamily="18" charset="0"/>
+              <a:cs typeface="Times New Roman" panose="02020603050405020304" pitchFamily="18" charset="0"/>
+            </a:endParaRPr>
+          </a:p>
+        </p:txBody>
+      </p:sp>
+    </p:spTree>
+    <p:extLst>
+      <p:ext uri="{BB962C8B-B14F-4D97-AF65-F5344CB8AC3E}">
+        <p14:creationId xmlns:p14="http://schemas.microsoft.com/office/powerpoint/2010/main" val="1906787013"/>
+      </p:ext>
+    </p:extLst>
+  </p:cSld>
+  <p:clrMapOvr>
+    <a:masterClrMapping/>
+  </p:clrMapOvr>
+  <mc:AlternateContent xmlns:mc="http://schemas.openxmlformats.org/markup-compatibility/2006" xmlns:p14="http://schemas.microsoft.com/office/powerpoint/2010/main">
+    <mc:Choice Requires="p14">
+      <p:transition spd="med" p14:dur="700">
+        <p:fade/>
+      </p:transition>
+    </mc:Choice>
+    <mc:Fallback xmlns="" xmlns:mv="urn:schemas-microsoft-com:mac:vml" xmlns:c="http://schemas.openxmlformats.org/drawingml/2006/chart" xmlns:dgm="http://schemas.openxmlformats.org/drawingml/2006/diagram" xmlns:o="urn:schemas-microsoft-com:office:office" xmlns:v="urn:schemas-microsoft-com:vml" xmlns:pvml="urn:schemas-microsoft-com:office:powerpoint" xmlns:com="http://schemas.openxmlformats.org/drawingml/2006/compatibility" xmlns:p15="http://schemas.microsoft.com/office/powerpoint/2012/main" xmlns:ahyp="http://schemas.microsoft.com/office/drawing/2018/hyperlinkcolor">
+      <p:transition spd="slow">
+        <p:fade/>
+      </p:transition>
+    </mc:Fallback>
+  </mc:AlternateContent>
+  <p:timing>
+    <p:tnLst>
+      <p:par>
+        <p:cTn id="1" dur="indefinite" restart="never" nodeType="tmRoot">
+          <p:childTnLst>
+            <p:seq concurrent="1" nextAc="seek">
+              <p:cTn id="2" dur="indefinite" nodeType="mainSeq">
+                <p:childTnLst>
+                  <p:par>
+                    <p:cTn id="3" fill="hold">
+                      <p:stCondLst>
+                        <p:cond delay="indefinite"/>
+                        <p:cond evt="onBegin" delay="0">
+                          <p:tn val="2"/>
+                        </p:cond>
+                      </p:stCondLst>
+                      <p:childTnLst>
+                        <p:par>
+                          <p:cTn id="4" fill="hold">
+                            <p:stCondLst>
+                              <p:cond delay="0"/>
+                            </p:stCondLst>
+                            <p:childTnLst>
+                              <p:par>
+                                <p:cTn id="5" presetID="2" presetClass="entr" presetSubtype="8" fill="hold" nodeType="withEffect">
+                                  <p:stCondLst>
+                                    <p:cond delay="0"/>
+                                  </p:stCondLst>
+                                  <p:childTnLst>
+                                    <p:set>
+                                      <p:cBhvr>
+                                        <p:cTn id="6" dur="1" fill="hold">
+                                          <p:stCondLst>
+                                            <p:cond delay="0"/>
+                                          </p:stCondLst>
+                                        </p:cTn>
+                                        <p:tgtEl>
+                                          <p:spTgt spid="193"/>
+                                        </p:tgtEl>
+                                        <p:attrNameLst>
+                                          <p:attrName>style.visibility</p:attrName>
+                                        </p:attrNameLst>
+                                      </p:cBhvr>
+                                      <p:to>
+                                        <p:strVal val="visible"/>
+                                      </p:to>
+                                    </p:set>
+                                    <p:anim calcmode="lin" valueType="num">
+                                      <p:cBhvr additive="base">
+                                        <p:cTn id="7" dur="500"/>
+                                        <p:tgtEl>
+                                          <p:spTgt spid="193"/>
+                                        </p:tgtEl>
+                                        <p:attrNameLst>
+                                          <p:attrName>ppt_x</p:attrName>
+                                        </p:attrNameLst>
+                                      </p:cBhvr>
+                                      <p:tavLst>
+                                        <p:tav tm="0">
+                                          <p:val>
+                                            <p:strVal val="#ppt_x-1"/>
+                                          </p:val>
+                                        </p:tav>
+                                        <p:tav tm="100000">
+                                          <p:val>
+                                            <p:strVal val="#ppt_x"/>
+                                          </p:val>
+                                        </p:tav>
+                                      </p:tavLst>
+                                    </p:anim>
+                                  </p:childTnLst>
+                                </p:cTn>
+                              </p:par>
+                              <p:par>
+                                <p:cTn id="8" presetID="2" presetClass="entr" presetSubtype="2" fill="hold" nodeType="withEffect">
+                                  <p:stCondLst>
+                                    <p:cond delay="0"/>
+                                  </p:stCondLst>
+                                  <p:childTnLst>
+                                    <p:set>
+                                      <p:cBhvr>
+                                        <p:cTn id="9" dur="1" fill="hold">
+                                          <p:stCondLst>
+                                            <p:cond delay="0"/>
+                                          </p:stCondLst>
+                                        </p:cTn>
+                                        <p:tgtEl>
+                                          <p:spTgt spid="190"/>
+                                        </p:tgtEl>
+                                        <p:attrNameLst>
+                                          <p:attrName>style.visibility</p:attrName>
+                                        </p:attrNameLst>
+                                      </p:cBhvr>
+                                      <p:to>
+                                        <p:strVal val="visible"/>
+                                      </p:to>
+                                    </p:set>
+                                    <p:anim calcmode="lin" valueType="num">
+                                      <p:cBhvr additive="base">
+                                        <p:cTn id="10" dur="500"/>
+                                        <p:tgtEl>
+                                          <p:spTgt spid="190"/>
+                                        </p:tgtEl>
+                                        <p:attrNameLst>
+                                          <p:attrName>ppt_x</p:attrName>
+                                        </p:attrNameLst>
+                                      </p:cBhvr>
+                                      <p:tavLst>
+                                        <p:tav tm="0">
+                                          <p:val>
+                                            <p:strVal val="#ppt_x+1"/>
+                                          </p:val>
+                                        </p:tav>
+                                        <p:tav tm="100000">
+                                          <p:val>
+                                            <p:strVal val="#ppt_x"/>
+                                          </p:val>
+                                        </p:tav>
+                                      </p:tavLst>
+                                    </p:anim>
+                                  </p:childTnLst>
+                                </p:cTn>
+                              </p:par>
+                            </p:childTnLst>
+                          </p:cTn>
+                        </p:par>
+                      </p:childTnLst>
+                    </p:cTn>
+                  </p:par>
+                </p:childTnLst>
+              </p:cTn>
+              <p:prevCondLst>
+                <p:cond evt="onPrev" delay="0">
+                  <p:tgtEl>
+                    <p:sldTgt/>
+                  </p:tgtEl>
+                </p:cond>
+              </p:prevCondLst>
+              <p:nextCondLst>
+                <p:cond evt="onNext" delay="0">
+                  <p:tgtEl>
+                    <p:sldTgt/>
+                  </p:tgtEl>
+                </p:cond>
+              </p:nextCondLst>
+            </p:seq>
+          </p:childTnLst>
+        </p:cTn>
+      </p:par>
+    </p:tnLst>
+  </p:timing>
+</p:sld>
+</file>
+
+<file path=ppt/slides/slide5.xml><?xml version="1.0" encoding="utf-8"?>
+<p:sld xmlns:a="http://schemas.openxmlformats.org/drawingml/2006/main" xmlns:r="http://schemas.openxmlformats.org/officeDocument/2006/relationships" xmlns:p="http://schemas.openxmlformats.org/presentationml/2006/main">
+  <p:cSld>
+    <p:spTree>
+      <p:nvGrpSpPr>
+        <p:cNvPr id="1" name="Shape 186">
+          <a:extLst>
+            <a:ext uri="{FF2B5EF4-FFF2-40B4-BE49-F238E27FC236}">
+              <a16:creationId xmlns:a16="http://schemas.microsoft.com/office/drawing/2014/main" id="{677A682B-7872-9E01-89AF-FEA79B400002}"/>
+            </a:ext>
+          </a:extLst>
+        </p:cNvPr>
+        <p:cNvGrpSpPr/>
+        <p:nvPr/>
+      </p:nvGrpSpPr>
+      <p:grpSpPr>
+        <a:xfrm>
+          <a:off x="0" y="0"/>
+          <a:ext cx="0" cy="0"/>
+          <a:chOff x="0" y="0"/>
+          <a:chExt cx="0" cy="0"/>
+        </a:xfrm>
+      </p:grpSpPr>
+      <p:grpSp>
+        <p:nvGrpSpPr>
+          <p:cNvPr id="190" name="Google Shape;190;p5">
+            <a:extLst>
+              <a:ext uri="{FF2B5EF4-FFF2-40B4-BE49-F238E27FC236}">
+                <a16:creationId xmlns:a16="http://schemas.microsoft.com/office/drawing/2014/main" id="{58A35E5B-B74F-2896-9CD6-9085FCB4FBB6}"/>
+              </a:ext>
+            </a:extLst>
+          </p:cNvPr>
+          <p:cNvGrpSpPr/>
+          <p:nvPr/>
+        </p:nvGrpSpPr>
+        <p:grpSpPr>
+          <a:xfrm>
+            <a:off x="1670730" y="1263299"/>
+            <a:ext cx="8616270" cy="1007332"/>
+            <a:chOff x="3129129" y="1121776"/>
+            <a:chExt cx="5933741" cy="1171624"/>
+          </a:xfrm>
+        </p:grpSpPr>
+        <p:sp>
+          <p:nvSpPr>
+            <p:cNvPr id="191" name="Google Shape;191;p5">
+              <a:extLst>
+                <a:ext uri="{FF2B5EF4-FFF2-40B4-BE49-F238E27FC236}">
+                  <a16:creationId xmlns:a16="http://schemas.microsoft.com/office/drawing/2014/main" id="{A5716FB5-6471-2BC1-89A3-D030AE6F7420}"/>
+                </a:ext>
+              </a:extLst>
+            </p:cNvPr>
+            <p:cNvSpPr/>
+            <p:nvPr/>
+          </p:nvSpPr>
+          <p:spPr>
+            <a:xfrm>
+              <a:off x="3129129" y="1121776"/>
+              <a:ext cx="5933741" cy="1171624"/>
+            </a:xfrm>
+            <a:prstGeom prst="roundRect">
+              <a:avLst>
+                <a:gd name="adj" fmla="val 50000"/>
+              </a:avLst>
+            </a:prstGeom>
+            <a:solidFill>
+              <a:srgbClr val="D8D8D8">
+                <a:alpha val="49803"/>
+              </a:srgbClr>
+            </a:solidFill>
+            <a:ln>
+              <a:noFill/>
+            </a:ln>
+          </p:spPr>
+          <p:txBody>
+            <a:bodyPr spcFirstLastPara="1" wrap="square" lIns="91425" tIns="45700" rIns="91425" bIns="45700" anchor="ctr" anchorCtr="0">
+              <a:noAutofit/>
+            </a:bodyPr>
+            <a:lstStyle/>
+            <a:p>
+              <a:pPr marL="0" marR="0" lvl="0" indent="0" algn="l" rtl="0">
+                <a:spcBef>
+                  <a:spcPts val="0"/>
+                </a:spcBef>
+                <a:spcAft>
+                  <a:spcPts val="0"/>
+                </a:spcAft>
+                <a:buNone/>
+              </a:pPr>
+              <a:endParaRPr sz="2800">
+                <a:solidFill>
+                  <a:srgbClr val="FFAA2D"/>
+                </a:solidFill>
+                <a:latin typeface="Arial"/>
+                <a:ea typeface="Arial"/>
+                <a:cs typeface="Arial"/>
+                <a:sym typeface="Arial"/>
+              </a:endParaRPr>
+            </a:p>
+          </p:txBody>
+        </p:sp>
+        <p:sp>
+          <p:nvSpPr>
+            <p:cNvPr id="192" name="Google Shape;192;p5">
+              <a:extLst>
+                <a:ext uri="{FF2B5EF4-FFF2-40B4-BE49-F238E27FC236}">
+                  <a16:creationId xmlns:a16="http://schemas.microsoft.com/office/drawing/2014/main" id="{5BAA2AFA-BEAD-0115-287E-ACA9CB1E5272}"/>
+                </a:ext>
+              </a:extLst>
+            </p:cNvPr>
+            <p:cNvSpPr/>
+            <p:nvPr/>
+          </p:nvSpPr>
+          <p:spPr>
+            <a:xfrm>
+              <a:off x="3289330" y="1253414"/>
+              <a:ext cx="5613340" cy="908350"/>
+            </a:xfrm>
+            <a:prstGeom prst="roundRect">
+              <a:avLst>
+                <a:gd name="adj" fmla="val 50000"/>
+              </a:avLst>
+            </a:prstGeom>
+            <a:gradFill>
+              <a:gsLst>
+                <a:gs pos="0">
+                  <a:srgbClr val="FFAA2D"/>
+                </a:gs>
+                <a:gs pos="100000">
+                  <a:srgbClr val="FFD393"/>
+                </a:gs>
+              </a:gsLst>
+              <a:lin ang="0" scaled="0"/>
+            </a:gradFill>
+            <a:ln w="19050" cap="flat" cmpd="sng">
+              <a:solidFill>
+                <a:srgbClr val="BFBFBF"/>
+              </a:solidFill>
+              <a:prstDash val="solid"/>
+              <a:miter lim="800000"/>
+              <a:headEnd type="none" w="sm" len="sm"/>
+              <a:tailEnd type="none" w="sm" len="sm"/>
+            </a:ln>
+          </p:spPr>
+          <p:txBody>
+            <a:bodyPr spcFirstLastPara="1" wrap="square" lIns="91425" tIns="45700" rIns="91425" bIns="45700" anchor="ctr" anchorCtr="0">
+              <a:noAutofit/>
+            </a:bodyPr>
+            <a:lstStyle/>
+            <a:p>
+              <a:pPr marL="0" marR="0" lvl="0" indent="0" algn="l" rtl="0">
+                <a:spcBef>
+                  <a:spcPts val="0"/>
+                </a:spcBef>
+                <a:spcAft>
+                  <a:spcPts val="0"/>
+                </a:spcAft>
+                <a:buNone/>
+              </a:pPr>
+              <a:endParaRPr sz="2800">
+                <a:solidFill>
+                  <a:srgbClr val="FFAA2D"/>
+                </a:solidFill>
+                <a:latin typeface="Arial"/>
+                <a:ea typeface="Arial"/>
+                <a:cs typeface="Arial"/>
+                <a:sym typeface="Arial"/>
+              </a:endParaRPr>
+            </a:p>
+          </p:txBody>
+        </p:sp>
+      </p:grpSp>
+      <p:grpSp>
+        <p:nvGrpSpPr>
+          <p:cNvPr id="193" name="Google Shape;193;p5">
+            <a:extLst>
+              <a:ext uri="{FF2B5EF4-FFF2-40B4-BE49-F238E27FC236}">
+                <a16:creationId xmlns:a16="http://schemas.microsoft.com/office/drawing/2014/main" id="{E59BDF28-B9D6-B159-EC14-9E12F1E199F1}"/>
+              </a:ext>
+            </a:extLst>
+          </p:cNvPr>
+          <p:cNvGrpSpPr/>
+          <p:nvPr/>
+        </p:nvGrpSpPr>
+        <p:grpSpPr>
+          <a:xfrm>
+            <a:off x="1782659" y="1240148"/>
+            <a:ext cx="1674310" cy="1522886"/>
+            <a:chOff x="3020983" y="881796"/>
+            <a:chExt cx="2097410" cy="2097410"/>
+          </a:xfrm>
+        </p:grpSpPr>
+        <p:grpSp>
+          <p:nvGrpSpPr>
+            <p:cNvPr id="194" name="Google Shape;194;p5">
+              <a:extLst>
+                <a:ext uri="{FF2B5EF4-FFF2-40B4-BE49-F238E27FC236}">
+                  <a16:creationId xmlns:a16="http://schemas.microsoft.com/office/drawing/2014/main" id="{BBB5DEF7-0B24-667D-DF6B-890E0A77883F}"/>
+                </a:ext>
+              </a:extLst>
+            </p:cNvPr>
+            <p:cNvGrpSpPr/>
+            <p:nvPr/>
+          </p:nvGrpSpPr>
+          <p:grpSpPr>
+            <a:xfrm>
+              <a:off x="3020983" y="881796"/>
+              <a:ext cx="2097410" cy="2097410"/>
+              <a:chOff x="3099689" y="1098878"/>
+              <a:chExt cx="1995612" cy="1995615"/>
+            </a:xfrm>
+          </p:grpSpPr>
+          <p:grpSp>
+            <p:nvGrpSpPr>
+              <p:cNvPr id="195" name="Google Shape;195;p5">
+                <a:extLst>
+                  <a:ext uri="{FF2B5EF4-FFF2-40B4-BE49-F238E27FC236}">
+                    <a16:creationId xmlns:a16="http://schemas.microsoft.com/office/drawing/2014/main" id="{F91FBD86-AB1E-AC3E-7DC9-DF6D617022D3}"/>
+                  </a:ext>
+                </a:extLst>
+              </p:cNvPr>
+              <p:cNvGrpSpPr/>
+              <p:nvPr/>
+            </p:nvGrpSpPr>
+            <p:grpSpPr>
+              <a:xfrm>
+                <a:off x="3099689" y="1098878"/>
+                <a:ext cx="1995612" cy="1995615"/>
+                <a:chOff x="6804316" y="2574806"/>
+                <a:chExt cx="3585705" cy="3585705"/>
+              </a:xfrm>
+            </p:grpSpPr>
+            <p:sp>
+              <p:nvSpPr>
+                <p:cNvPr id="196" name="Google Shape;196;p5">
+                  <a:extLst>
+                    <a:ext uri="{FF2B5EF4-FFF2-40B4-BE49-F238E27FC236}">
+                      <a16:creationId xmlns:a16="http://schemas.microsoft.com/office/drawing/2014/main" id="{46F2D7E0-CBDC-3E81-A011-3ACC4B53FC14}"/>
+                    </a:ext>
+                  </a:extLst>
+                </p:cNvPr>
+                <p:cNvSpPr/>
+                <p:nvPr/>
+              </p:nvSpPr>
+              <p:spPr>
+                <a:xfrm rot="-2700000">
+                  <a:off x="7501948" y="2927402"/>
+                  <a:ext cx="2190440" cy="2880512"/>
+                </a:xfrm>
+                <a:custGeom>
+                  <a:avLst/>
+                  <a:gdLst/>
+                  <a:ahLst/>
+                  <a:cxnLst/>
+                  <a:rect l="l" t="t" r="r" b="b"/>
+                  <a:pathLst>
+                    <a:path w="1696474" h="2070736" extrusionOk="0">
+                      <a:moveTo>
+                        <a:pt x="13249" y="1035368"/>
+                      </a:moveTo>
+                      <a:cubicBezTo>
+                        <a:pt x="112309" y="471170"/>
+                        <a:pt x="388098" y="0"/>
+                        <a:pt x="850497" y="0"/>
+                      </a:cubicBezTo>
+                      <a:cubicBezTo>
+                        <a:pt x="1312896" y="0"/>
+                        <a:pt x="1611545" y="478790"/>
+                        <a:pt x="1687745" y="1035368"/>
+                      </a:cubicBezTo>
+                      <a:cubicBezTo>
+                        <a:pt x="1765308" y="1601901"/>
+                        <a:pt x="1312896" y="2070736"/>
+                        <a:pt x="850497" y="2070736"/>
+                      </a:cubicBezTo>
+                      <a:cubicBezTo>
+                        <a:pt x="388098" y="2070736"/>
+                        <a:pt x="-85811" y="1599566"/>
+                        <a:pt x="13249" y="1035368"/>
+                      </a:cubicBezTo>
+                      <a:close/>
+                    </a:path>
+                  </a:pathLst>
+                </a:custGeom>
+                <a:gradFill>
+                  <a:gsLst>
+                    <a:gs pos="0">
+                      <a:schemeClr val="dk1"/>
+                    </a:gs>
+                    <a:gs pos="17000">
+                      <a:srgbClr val="000000">
+                        <a:alpha val="45882"/>
+                      </a:srgbClr>
+                    </a:gs>
+                    <a:gs pos="34000">
+                      <a:srgbClr val="000000">
+                        <a:alpha val="42745"/>
+                      </a:srgbClr>
+                    </a:gs>
+                    <a:gs pos="51000">
+                      <a:srgbClr val="000000">
+                        <a:alpha val="20000"/>
+                      </a:srgbClr>
+                    </a:gs>
+                    <a:gs pos="65000">
+                      <a:srgbClr val="000000">
+                        <a:alpha val="9803"/>
+                      </a:srgbClr>
+                    </a:gs>
+                    <a:gs pos="78000">
+                      <a:srgbClr val="000000">
+                        <a:alpha val="4705"/>
+                      </a:srgbClr>
+                    </a:gs>
+                    <a:gs pos="100000">
+                      <a:srgbClr val="000000">
+                        <a:alpha val="0"/>
+                      </a:srgbClr>
+                    </a:gs>
+                  </a:gsLst>
+                  <a:lin ang="5400000" scaled="0"/>
+                </a:gradFill>
+                <a:ln>
+                  <a:noFill/>
+                </a:ln>
+              </p:spPr>
+              <p:txBody>
+                <a:bodyPr spcFirstLastPara="1" wrap="square" lIns="91425" tIns="45700" rIns="91425" bIns="45700" anchor="ctr" anchorCtr="0">
+                  <a:noAutofit/>
+                </a:bodyPr>
+                <a:lstStyle/>
+                <a:p>
+                  <a:pPr marL="0" marR="0" lvl="0" indent="0" algn="l" rtl="0">
+                    <a:spcBef>
+                      <a:spcPts val="0"/>
+                    </a:spcBef>
+                    <a:spcAft>
+                      <a:spcPts val="0"/>
+                    </a:spcAft>
+                    <a:buNone/>
+                  </a:pPr>
+                  <a:endParaRPr sz="2800">
+                    <a:solidFill>
+                      <a:schemeClr val="lt1"/>
+                    </a:solidFill>
+                    <a:latin typeface="Arial"/>
+                    <a:ea typeface="Arial"/>
+                    <a:cs typeface="Arial"/>
+                    <a:sym typeface="Arial"/>
+                  </a:endParaRPr>
+                </a:p>
+              </p:txBody>
+            </p:sp>
+            <p:sp>
+              <p:nvSpPr>
+                <p:cNvPr id="197" name="Google Shape;197;p5">
+                  <a:extLst>
+                    <a:ext uri="{FF2B5EF4-FFF2-40B4-BE49-F238E27FC236}">
+                      <a16:creationId xmlns:a16="http://schemas.microsoft.com/office/drawing/2014/main" id="{602F42EE-DB7A-9CE8-96DB-7C8F3FCAF124}"/>
+                    </a:ext>
+                  </a:extLst>
+                </p:cNvPr>
+                <p:cNvSpPr/>
+                <p:nvPr/>
+              </p:nvSpPr>
+              <p:spPr>
+                <a:xfrm>
+                  <a:off x="7567583" y="3243359"/>
+                  <a:ext cx="1344545" cy="1344543"/>
+                </a:xfrm>
+                <a:prstGeom prst="ellipse">
+                  <a:avLst/>
+                </a:prstGeom>
+                <a:gradFill>
+                  <a:gsLst>
+                    <a:gs pos="0">
+                      <a:srgbClr val="FFFFFF">
+                        <a:alpha val="98823"/>
+                      </a:srgbClr>
+                    </a:gs>
+                    <a:gs pos="43000">
+                      <a:srgbClr val="F7F7F7"/>
+                    </a:gs>
+                    <a:gs pos="100000">
+                      <a:srgbClr val="B8C0C0"/>
+                    </a:gs>
+                  </a:gsLst>
+                  <a:lin ang="2700000" scaled="0"/>
+                </a:gradFill>
+                <a:ln>
+                  <a:noFill/>
+                </a:ln>
+                <a:effectLst>
+                  <a:outerShdw blurRad="139700" dist="88900" dir="2700000" algn="tl" rotWithShape="0">
+                    <a:srgbClr val="494949">
+                      <a:alpha val="29803"/>
+                    </a:srgbClr>
+                  </a:outerShdw>
+                </a:effectLst>
+              </p:spPr>
+              <p:txBody>
+                <a:bodyPr spcFirstLastPara="1" wrap="square" lIns="91425" tIns="45700" rIns="91425" bIns="45700" anchor="ctr" anchorCtr="0">
+                  <a:noAutofit/>
+                </a:bodyPr>
+                <a:lstStyle/>
+                <a:p>
+                  <a:pPr marL="0" marR="0" lvl="0" indent="0" algn="l" rtl="0">
+                    <a:spcBef>
+                      <a:spcPts val="0"/>
+                    </a:spcBef>
+                    <a:spcAft>
+                      <a:spcPts val="0"/>
+                    </a:spcAft>
+                    <a:buNone/>
+                  </a:pPr>
+                  <a:endParaRPr sz="2800">
+                    <a:solidFill>
+                      <a:schemeClr val="lt1"/>
+                    </a:solidFill>
+                    <a:latin typeface="Arial"/>
+                    <a:ea typeface="Arial"/>
+                    <a:cs typeface="Arial"/>
+                    <a:sym typeface="Arial"/>
+                  </a:endParaRPr>
+                </a:p>
+              </p:txBody>
+            </p:sp>
+            <p:sp>
+              <p:nvSpPr>
+                <p:cNvPr id="198" name="Google Shape;198;p5">
+                  <a:extLst>
+                    <a:ext uri="{FF2B5EF4-FFF2-40B4-BE49-F238E27FC236}">
+                      <a16:creationId xmlns:a16="http://schemas.microsoft.com/office/drawing/2014/main" id="{C641423A-0825-E957-3FC8-7E899FA5173A}"/>
+                    </a:ext>
+                  </a:extLst>
+                </p:cNvPr>
+                <p:cNvSpPr/>
+                <p:nvPr/>
+              </p:nvSpPr>
+              <p:spPr>
+                <a:xfrm>
+                  <a:off x="7380501" y="3019185"/>
+                  <a:ext cx="1596494" cy="1596494"/>
+                </a:xfrm>
+                <a:prstGeom prst="ellipse">
+                  <a:avLst/>
+                </a:prstGeom>
+                <a:gradFill>
+                  <a:gsLst>
+                    <a:gs pos="0">
+                      <a:srgbClr val="FFFFFF">
+                        <a:alpha val="98823"/>
+                      </a:srgbClr>
+                    </a:gs>
+                    <a:gs pos="11000">
+                      <a:srgbClr val="FFFFFF">
+                        <a:alpha val="98823"/>
+                      </a:srgbClr>
+                    </a:gs>
+                    <a:gs pos="39000">
+                      <a:schemeClr val="lt1"/>
+                    </a:gs>
+                    <a:gs pos="52999">
+                      <a:srgbClr val="F7F7F7"/>
+                    </a:gs>
+                    <a:gs pos="100000">
+                      <a:srgbClr val="B8C0C0"/>
+                    </a:gs>
+                  </a:gsLst>
+                  <a:lin ang="2700000" scaled="0"/>
+                </a:gradFill>
+                <a:ln>
+                  <a:noFill/>
+                </a:ln>
+              </p:spPr>
+              <p:txBody>
+                <a:bodyPr spcFirstLastPara="1" wrap="square" lIns="91425" tIns="45700" rIns="91425" bIns="45700" anchor="ctr" anchorCtr="0">
+                  <a:noAutofit/>
+                </a:bodyPr>
+                <a:lstStyle/>
+                <a:p>
+                  <a:pPr marL="0" marR="0" lvl="0" indent="0" algn="l" rtl="0">
+                    <a:spcBef>
+                      <a:spcPts val="0"/>
+                    </a:spcBef>
+                    <a:spcAft>
+                      <a:spcPts val="0"/>
+                    </a:spcAft>
+                    <a:buNone/>
+                  </a:pPr>
+                  <a:endParaRPr sz="2800">
+                    <a:solidFill>
+                      <a:schemeClr val="lt1"/>
+                    </a:solidFill>
+                    <a:latin typeface="Arial"/>
+                    <a:ea typeface="Arial"/>
+                    <a:cs typeface="Arial"/>
+                    <a:sym typeface="Arial"/>
+                  </a:endParaRPr>
+                </a:p>
+              </p:txBody>
+            </p:sp>
+          </p:grpSp>
+          <p:sp>
+            <p:nvSpPr>
+              <p:cNvPr id="199" name="Google Shape;199;p5">
+                <a:extLst>
+                  <a:ext uri="{FF2B5EF4-FFF2-40B4-BE49-F238E27FC236}">
+                    <a16:creationId xmlns:a16="http://schemas.microsoft.com/office/drawing/2014/main" id="{AD5E311E-4060-1E22-9E52-F3CEB24A25DC}"/>
+                  </a:ext>
+                </a:extLst>
+              </p:cNvPr>
+              <p:cNvSpPr/>
+              <p:nvPr/>
+            </p:nvSpPr>
+            <p:spPr>
+              <a:xfrm>
+                <a:off x="3222820" y="1148080"/>
+                <a:ext cx="1284820" cy="1284821"/>
+              </a:xfrm>
+              <a:prstGeom prst="ellipse">
+                <a:avLst/>
+              </a:prstGeom>
+              <a:solidFill>
+                <a:schemeClr val="lt1">
+                  <a:alpha val="13725"/>
+                </a:schemeClr>
+              </a:solidFill>
+              <a:ln w="15875" cap="flat" cmpd="sng">
+                <a:solidFill>
+                  <a:schemeClr val="lt1"/>
+                </a:solidFill>
+                <a:prstDash val="solid"/>
+                <a:miter lim="800000"/>
+                <a:headEnd type="none" w="sm" len="sm"/>
+                <a:tailEnd type="none" w="sm" len="sm"/>
+              </a:ln>
+              <a:effectLst>
+                <a:outerShdw blurRad="215900" dist="88900" dir="2700000" algn="tl" rotWithShape="0">
+                  <a:srgbClr val="000000">
+                    <a:alpha val="10980"/>
+                  </a:srgbClr>
+                </a:outerShdw>
+              </a:effectLst>
+            </p:spPr>
+            <p:txBody>
+              <a:bodyPr spcFirstLastPara="1" wrap="square" lIns="91425" tIns="45700" rIns="91425" bIns="45700" anchor="ctr" anchorCtr="0">
+                <a:noAutofit/>
+              </a:bodyPr>
+              <a:lstStyle/>
+              <a:p>
+                <a:pPr marL="0" marR="0" lvl="0" indent="0" algn="l" rtl="0">
+                  <a:spcBef>
+                    <a:spcPts val="0"/>
+                  </a:spcBef>
+                  <a:spcAft>
+                    <a:spcPts val="0"/>
+                  </a:spcAft>
+                  <a:buNone/>
+                </a:pPr>
+                <a:endParaRPr sz="2800">
+                  <a:solidFill>
+                    <a:schemeClr val="lt1"/>
+                  </a:solidFill>
+                  <a:latin typeface="Arial"/>
+                  <a:ea typeface="Arial"/>
+                  <a:cs typeface="Arial"/>
+                  <a:sym typeface="Arial"/>
+                </a:endParaRPr>
+              </a:p>
+            </p:txBody>
+          </p:sp>
+        </p:grpSp>
+        <p:sp>
+          <p:nvSpPr>
+            <p:cNvPr id="200" name="Google Shape;200;p5">
+              <a:extLst>
+                <a:ext uri="{FF2B5EF4-FFF2-40B4-BE49-F238E27FC236}">
+                  <a16:creationId xmlns:a16="http://schemas.microsoft.com/office/drawing/2014/main" id="{2DF3EE90-59B8-B9C7-3B50-E2F38111E55F}"/>
+                </a:ext>
+              </a:extLst>
+            </p:cNvPr>
+            <p:cNvSpPr txBox="1"/>
+            <p:nvPr/>
+          </p:nvSpPr>
+          <p:spPr>
+            <a:xfrm>
+              <a:off x="3514455" y="1292811"/>
+              <a:ext cx="774240" cy="720610"/>
+            </a:xfrm>
+            <a:prstGeom prst="rect">
+              <a:avLst/>
+            </a:prstGeom>
+            <a:noFill/>
+            <a:ln>
+              <a:noFill/>
+            </a:ln>
+          </p:spPr>
+          <p:txBody>
+            <a:bodyPr spcFirstLastPara="1" wrap="square" lIns="91425" tIns="45700" rIns="91425" bIns="45700" anchor="t" anchorCtr="0">
+              <a:spAutoFit/>
+            </a:bodyPr>
+            <a:lstStyle/>
+            <a:p>
+              <a:pPr marL="0" marR="0" lvl="0" indent="0" algn="l" rtl="0">
+                <a:spcBef>
+                  <a:spcPts val="0"/>
+                </a:spcBef>
+                <a:spcAft>
+                  <a:spcPts val="0"/>
+                </a:spcAft>
+                <a:buNone/>
+              </a:pPr>
+              <a:r>
+                <a:rPr lang="en-US" sz="2800" dirty="0">
+                  <a:solidFill>
+                    <a:srgbClr val="FFB850"/>
+                  </a:solidFill>
+                  <a:latin typeface="Impact"/>
+                  <a:ea typeface="Impact"/>
+                  <a:cs typeface="Impact"/>
+                  <a:sym typeface="Impact"/>
+                </a:rPr>
+                <a:t>02</a:t>
+              </a:r>
+              <a:endParaRPr sz="2800" dirty="0">
+                <a:solidFill>
+                  <a:srgbClr val="FFB850"/>
+                </a:solidFill>
+                <a:latin typeface="Impact"/>
+                <a:ea typeface="Impact"/>
+                <a:cs typeface="Impact"/>
+                <a:sym typeface="Impact"/>
+              </a:endParaRPr>
+            </a:p>
+          </p:txBody>
+        </p:sp>
+      </p:grpSp>
+      <p:sp>
+        <p:nvSpPr>
+          <p:cNvPr id="201" name="Google Shape;201;p5">
+            <a:extLst>
+              <a:ext uri="{FF2B5EF4-FFF2-40B4-BE49-F238E27FC236}">
+                <a16:creationId xmlns:a16="http://schemas.microsoft.com/office/drawing/2014/main" id="{9988179A-3E97-0D11-A477-60562B63D1A4}"/>
+              </a:ext>
+            </a:extLst>
+          </p:cNvPr>
+          <p:cNvSpPr txBox="1"/>
+          <p:nvPr/>
+        </p:nvSpPr>
+        <p:spPr>
+          <a:xfrm>
+            <a:off x="2980807" y="1521544"/>
+            <a:ext cx="6905838" cy="523220"/>
+          </a:xfrm>
+          <a:prstGeom prst="rect">
+            <a:avLst/>
+          </a:prstGeom>
+          <a:noFill/>
+          <a:ln>
+            <a:noFill/>
+          </a:ln>
+        </p:spPr>
+        <p:txBody>
+          <a:bodyPr spcFirstLastPara="1" wrap="square" lIns="91425" tIns="45700" rIns="91425" bIns="45700" anchor="t" anchorCtr="0">
+            <a:spAutoFit/>
+          </a:bodyPr>
+          <a:lstStyle/>
+          <a:p>
+            <a:pPr marL="0" marR="0" lvl="0" indent="0" algn="l" rtl="0">
+              <a:spcBef>
+                <a:spcPts val="0"/>
+              </a:spcBef>
+              <a:spcAft>
+                <a:spcPts val="0"/>
+              </a:spcAft>
+              <a:buNone/>
+            </a:pPr>
+            <a:r>
+              <a:rPr lang="en-US" sz="2800" b="1" dirty="0">
+                <a:solidFill>
+                  <a:schemeClr val="dk1"/>
+                </a:solidFill>
+                <a:latin typeface="Times New Roman"/>
+                <a:ea typeface="Times New Roman"/>
+                <a:cs typeface="Times New Roman"/>
+                <a:sym typeface="Times New Roman"/>
+              </a:rPr>
+              <a:t>Hibernate ORM</a:t>
+            </a:r>
+            <a:endParaRPr sz="2800" b="1" dirty="0">
+              <a:solidFill>
+                <a:schemeClr val="dk1"/>
+              </a:solidFill>
+              <a:latin typeface="Times New Roman"/>
+              <a:ea typeface="Times New Roman"/>
+              <a:cs typeface="Times New Roman"/>
+              <a:sym typeface="Times New Roman"/>
+            </a:endParaRPr>
+          </a:p>
+        </p:txBody>
+      </p:sp>
+      <p:sp>
+        <p:nvSpPr>
+          <p:cNvPr id="202" name="Google Shape;202;p5">
+            <a:extLst>
+              <a:ext uri="{FF2B5EF4-FFF2-40B4-BE49-F238E27FC236}">
+                <a16:creationId xmlns:a16="http://schemas.microsoft.com/office/drawing/2014/main" id="{3AC3A81E-48E2-4382-B2D5-5E60C3A2B2A6}"/>
+              </a:ext>
+            </a:extLst>
+          </p:cNvPr>
+          <p:cNvSpPr/>
+          <p:nvPr/>
+        </p:nvSpPr>
+        <p:spPr>
+          <a:xfrm>
+            <a:off x="1670730" y="2505849"/>
+            <a:ext cx="9367384" cy="3437751"/>
+          </a:xfrm>
+          <a:prstGeom prst="rect">
+            <a:avLst/>
+          </a:prstGeom>
+          <a:solidFill>
+            <a:schemeClr val="lt1"/>
+          </a:solidFill>
+          <a:ln w="12700" cap="flat" cmpd="sng">
+            <a:solidFill>
+              <a:schemeClr val="accent4"/>
+            </a:solidFill>
+            <a:prstDash val="solid"/>
+            <a:miter lim="800000"/>
+            <a:headEnd type="none" w="sm" len="sm"/>
+            <a:tailEnd type="none" w="sm" len="sm"/>
+          </a:ln>
+        </p:spPr>
+        <p:txBody>
+          <a:bodyPr spcFirstLastPara="1" wrap="square" lIns="91425" tIns="45700" rIns="91425" bIns="45700" anchor="t" anchorCtr="0">
+            <a:noAutofit/>
+          </a:bodyPr>
+          <a:lstStyle/>
+          <a:p>
+            <a:pPr marL="0" marR="0" lvl="0" indent="0" algn="l" rtl="0">
+              <a:spcBef>
+                <a:spcPts val="0"/>
+              </a:spcBef>
+              <a:spcAft>
+                <a:spcPts val="0"/>
+              </a:spcAft>
+              <a:buNone/>
+            </a:pPr>
+            <a:r>
+              <a:rPr lang="vi-VN" sz="2800" b="0" i="0" dirty="0">
+                <a:solidFill>
+                  <a:srgbClr val="222222"/>
+                </a:solidFill>
+                <a:effectLst/>
+                <a:latin typeface="Times New Roman" panose="02020603050405020304" pitchFamily="18" charset="0"/>
+                <a:cs typeface="Times New Roman" panose="02020603050405020304" pitchFamily="18" charset="0"/>
+              </a:rPr>
+              <a:t>Hibernate ORM (Object-Relational Mapping) là một framework phổ biến để ánh xạ các đối tượng Java với các bảng trong cơ sở dữ liệu quan hệ. Nó giúp quản lý dữ liệu thông qua JPA hoặc giao diện API riêng của Hibernate.</a:t>
+            </a:r>
+            <a:endParaRPr lang="vi-VN" sz="2800" dirty="0">
+              <a:solidFill>
+                <a:schemeClr val="dk1"/>
+              </a:solidFill>
+              <a:latin typeface="Times New Roman" panose="02020603050405020304" pitchFamily="18" charset="0"/>
+              <a:ea typeface="Times New Roman"/>
+              <a:cs typeface="Times New Roman" panose="02020603050405020304" pitchFamily="18" charset="0"/>
+              <a:sym typeface="Times New Roman"/>
+            </a:endParaRPr>
+          </a:p>
+        </p:txBody>
+      </p:sp>
+    </p:spTree>
+    <p:extLst>
+      <p:ext uri="{BB962C8B-B14F-4D97-AF65-F5344CB8AC3E}">
+        <p14:creationId xmlns:p14="http://schemas.microsoft.com/office/powerpoint/2010/main" val="714814640"/>
+      </p:ext>
+    </p:extLst>
+  </p:cSld>
+  <p:clrMapOvr>
+    <a:masterClrMapping/>
+  </p:clrMapOvr>
+  <mc:AlternateContent xmlns:mc="http://schemas.openxmlformats.org/markup-compatibility/2006" xmlns:p14="http://schemas.microsoft.com/office/powerpoint/2010/main">
+    <mc:Choice Requires="p14">
+      <p:transition spd="med" p14:dur="700">
+        <p:fade/>
+      </p:transition>
+    </mc:Choice>
+    <mc:Fallback xmlns="" xmlns:mv="urn:schemas-microsoft-com:mac:vml" xmlns:c="http://schemas.openxmlformats.org/drawingml/2006/chart" xmlns:dgm="http://schemas.openxmlformats.org/drawingml/2006/diagram" xmlns:o="urn:schemas-microsoft-com:office:office" xmlns:v="urn:schemas-microsoft-com:vml" xmlns:pvml="urn:schemas-microsoft-com:office:powerpoint" xmlns:com="http://schemas.openxmlformats.org/drawingml/2006/compatibility" xmlns:p15="http://schemas.microsoft.com/office/powerpoint/2012/main" xmlns:ahyp="http://schemas.microsoft.com/office/drawing/2018/hyperlinkcolor">
+      <p:transition spd="slow">
+        <p:fade/>
+      </p:transition>
+    </mc:Fallback>
+  </mc:AlternateContent>
+  <p:timing>
+    <p:tnLst>
+      <p:par>
+        <p:cTn id="1" dur="indefinite" restart="never" nodeType="tmRoot">
+          <p:childTnLst>
+            <p:seq concurrent="1" nextAc="seek">
+              <p:cTn id="2" dur="indefinite" nodeType="mainSeq">
+                <p:childTnLst>
+                  <p:par>
+                    <p:cTn id="3" fill="hold">
+                      <p:stCondLst>
+                        <p:cond delay="indefinite"/>
+                        <p:cond evt="onBegin" delay="0">
+                          <p:tn val="2"/>
+                        </p:cond>
+                      </p:stCondLst>
+                      <p:childTnLst>
+                        <p:par>
+                          <p:cTn id="4" fill="hold">
+                            <p:stCondLst>
+                              <p:cond delay="0"/>
+                            </p:stCondLst>
+                            <p:childTnLst>
+                              <p:par>
+                                <p:cTn id="5" presetID="2" presetClass="entr" presetSubtype="8" fill="hold" nodeType="withEffect">
+                                  <p:stCondLst>
+                                    <p:cond delay="0"/>
+                                  </p:stCondLst>
+                                  <p:childTnLst>
+                                    <p:set>
+                                      <p:cBhvr>
+                                        <p:cTn id="6" dur="1" fill="hold">
+                                          <p:stCondLst>
+                                            <p:cond delay="0"/>
+                                          </p:stCondLst>
+                                        </p:cTn>
+                                        <p:tgtEl>
+                                          <p:spTgt spid="193"/>
+                                        </p:tgtEl>
+                                        <p:attrNameLst>
+                                          <p:attrName>style.visibility</p:attrName>
+                                        </p:attrNameLst>
+                                      </p:cBhvr>
+                                      <p:to>
+                                        <p:strVal val="visible"/>
+                                      </p:to>
+                                    </p:set>
+                                    <p:anim calcmode="lin" valueType="num">
+                                      <p:cBhvr additive="base">
+                                        <p:cTn id="7" dur="500"/>
+                                        <p:tgtEl>
+                                          <p:spTgt spid="193"/>
+                                        </p:tgtEl>
+                                        <p:attrNameLst>
+                                          <p:attrName>ppt_x</p:attrName>
+                                        </p:attrNameLst>
+                                      </p:cBhvr>
+                                      <p:tavLst>
+                                        <p:tav tm="0">
+                                          <p:val>
+                                            <p:strVal val="#ppt_x-1"/>
+                                          </p:val>
+                                        </p:tav>
+                                        <p:tav tm="100000">
+                                          <p:val>
+                                            <p:strVal val="#ppt_x"/>
+                                          </p:val>
+                                        </p:tav>
+                                      </p:tavLst>
+                                    </p:anim>
+                                  </p:childTnLst>
+                                </p:cTn>
+                              </p:par>
+                              <p:par>
+                                <p:cTn id="8" presetID="2" presetClass="entr" presetSubtype="2" fill="hold" nodeType="withEffect">
+                                  <p:stCondLst>
+                                    <p:cond delay="0"/>
+                                  </p:stCondLst>
+                                  <p:childTnLst>
+                                    <p:set>
+                                      <p:cBhvr>
+                                        <p:cTn id="9" dur="1" fill="hold">
+                                          <p:stCondLst>
+                                            <p:cond delay="0"/>
+                                          </p:stCondLst>
+                                        </p:cTn>
+                                        <p:tgtEl>
+                                          <p:spTgt spid="190"/>
+                                        </p:tgtEl>
+                                        <p:attrNameLst>
+                                          <p:attrName>style.visibility</p:attrName>
+                                        </p:attrNameLst>
+                                      </p:cBhvr>
+                                      <p:to>
+                                        <p:strVal val="visible"/>
+                                      </p:to>
+                                    </p:set>
+                                    <p:anim calcmode="lin" valueType="num">
+                                      <p:cBhvr additive="base">
+                                        <p:cTn id="10" dur="500"/>
+                                        <p:tgtEl>
+                                          <p:spTgt spid="190"/>
+                                        </p:tgtEl>
+                                        <p:attrNameLst>
+                                          <p:attrName>ppt_x</p:attrName>
+                                        </p:attrNameLst>
+                                      </p:cBhvr>
+                                      <p:tavLst>
+                                        <p:tav tm="0">
+                                          <p:val>
+                                            <p:strVal val="#ppt_x+1"/>
+                                          </p:val>
+                                        </p:tav>
+                                        <p:tav tm="100000">
+                                          <p:val>
+                                            <p:strVal val="#ppt_x"/>
+                                          </p:val>
+                                        </p:tav>
+                                      </p:tavLst>
+                                    </p:anim>
+                                  </p:childTnLst>
+                                </p:cTn>
+                              </p:par>
+                            </p:childTnLst>
+                          </p:cTn>
+                        </p:par>
+                      </p:childTnLst>
+                    </p:cTn>
+                  </p:par>
+                </p:childTnLst>
+              </p:cTn>
+              <p:prevCondLst>
+                <p:cond evt="onPrev" delay="0">
+                  <p:tgtEl>
+                    <p:sldTgt/>
+                  </p:tgtEl>
+                </p:cond>
+              </p:prevCondLst>
+              <p:nextCondLst>
+                <p:cond evt="onNext" delay="0">
+                  <p:tgtEl>
+                    <p:sldTgt/>
+                  </p:tgtEl>
+                </p:cond>
+              </p:nextCondLst>
+            </p:seq>
+          </p:childTnLst>
+        </p:cTn>
+      </p:par>
+    </p:tnLst>
+  </p:timing>
+</p:sld>
+</file>
+
+<file path=ppt/slides/slide6.xml><?xml version="1.0" encoding="utf-8"?>
+<p:sld xmlns:a="http://schemas.openxmlformats.org/drawingml/2006/main" xmlns:r="http://schemas.openxmlformats.org/officeDocument/2006/relationships" xmlns:p="http://schemas.openxmlformats.org/presentationml/2006/main">
+  <p:cSld>
+    <p:spTree>
+      <p:nvGrpSpPr>
+        <p:cNvPr id="1" name="Shape 186">
+          <a:extLst>
+            <a:ext uri="{FF2B5EF4-FFF2-40B4-BE49-F238E27FC236}">
+              <a16:creationId xmlns:a16="http://schemas.microsoft.com/office/drawing/2014/main" id="{9EC16BB2-0BA1-CCE8-0276-3BEAE47884CA}"/>
+            </a:ext>
+          </a:extLst>
+        </p:cNvPr>
+        <p:cNvGrpSpPr/>
+        <p:nvPr/>
+      </p:nvGrpSpPr>
+      <p:grpSpPr>
+        <a:xfrm>
+          <a:off x="0" y="0"/>
+          <a:ext cx="0" cy="0"/>
+          <a:chOff x="0" y="0"/>
+          <a:chExt cx="0" cy="0"/>
+        </a:xfrm>
+      </p:grpSpPr>
+      <p:grpSp>
+        <p:nvGrpSpPr>
+          <p:cNvPr id="190" name="Google Shape;190;p5">
+            <a:extLst>
+              <a:ext uri="{FF2B5EF4-FFF2-40B4-BE49-F238E27FC236}">
+                <a16:creationId xmlns:a16="http://schemas.microsoft.com/office/drawing/2014/main" id="{953F512F-4587-D214-EFBF-3361582CE512}"/>
+              </a:ext>
+            </a:extLst>
+          </p:cNvPr>
+          <p:cNvGrpSpPr/>
+          <p:nvPr/>
+        </p:nvGrpSpPr>
+        <p:grpSpPr>
+          <a:xfrm>
+            <a:off x="1670730" y="1263299"/>
+            <a:ext cx="8616270" cy="1007332"/>
+            <a:chOff x="3129129" y="1121776"/>
+            <a:chExt cx="5933741" cy="1171624"/>
+          </a:xfrm>
+        </p:grpSpPr>
+        <p:sp>
+          <p:nvSpPr>
+            <p:cNvPr id="191" name="Google Shape;191;p5">
+              <a:extLst>
+                <a:ext uri="{FF2B5EF4-FFF2-40B4-BE49-F238E27FC236}">
+                  <a16:creationId xmlns:a16="http://schemas.microsoft.com/office/drawing/2014/main" id="{2BCBB517-E45A-1E39-3153-93A9481B0B5A}"/>
+                </a:ext>
+              </a:extLst>
+            </p:cNvPr>
+            <p:cNvSpPr/>
+            <p:nvPr/>
+          </p:nvSpPr>
+          <p:spPr>
+            <a:xfrm>
+              <a:off x="3129129" y="1121776"/>
+              <a:ext cx="5933741" cy="1171624"/>
+            </a:xfrm>
+            <a:prstGeom prst="roundRect">
+              <a:avLst>
+                <a:gd name="adj" fmla="val 50000"/>
+              </a:avLst>
+            </a:prstGeom>
+            <a:solidFill>
+              <a:srgbClr val="D8D8D8">
+                <a:alpha val="49803"/>
+              </a:srgbClr>
+            </a:solidFill>
+            <a:ln>
+              <a:noFill/>
+            </a:ln>
+          </p:spPr>
+          <p:txBody>
+            <a:bodyPr spcFirstLastPara="1" wrap="square" lIns="91425" tIns="45700" rIns="91425" bIns="45700" anchor="ctr" anchorCtr="0">
+              <a:noAutofit/>
+            </a:bodyPr>
+            <a:lstStyle/>
+            <a:p>
+              <a:pPr marL="0" marR="0" lvl="0" indent="0" algn="l" rtl="0">
+                <a:spcBef>
+                  <a:spcPts val="0"/>
+                </a:spcBef>
+                <a:spcAft>
+                  <a:spcPts val="0"/>
+                </a:spcAft>
+                <a:buNone/>
+              </a:pPr>
+              <a:endParaRPr sz="2800">
+                <a:solidFill>
+                  <a:srgbClr val="FFAA2D"/>
+                </a:solidFill>
+                <a:latin typeface="Arial"/>
+                <a:ea typeface="Arial"/>
+                <a:cs typeface="Arial"/>
+                <a:sym typeface="Arial"/>
+              </a:endParaRPr>
+            </a:p>
+          </p:txBody>
+        </p:sp>
+        <p:sp>
+          <p:nvSpPr>
+            <p:cNvPr id="192" name="Google Shape;192;p5">
+              <a:extLst>
+                <a:ext uri="{FF2B5EF4-FFF2-40B4-BE49-F238E27FC236}">
+                  <a16:creationId xmlns:a16="http://schemas.microsoft.com/office/drawing/2014/main" id="{EB4700BD-9ACA-5FDB-2864-1917C24C41C4}"/>
+                </a:ext>
+              </a:extLst>
+            </p:cNvPr>
+            <p:cNvSpPr/>
+            <p:nvPr/>
+          </p:nvSpPr>
+          <p:spPr>
+            <a:xfrm>
+              <a:off x="3289330" y="1253414"/>
+              <a:ext cx="5613340" cy="908350"/>
+            </a:xfrm>
+            <a:prstGeom prst="roundRect">
+              <a:avLst>
+                <a:gd name="adj" fmla="val 50000"/>
+              </a:avLst>
+            </a:prstGeom>
+            <a:gradFill>
+              <a:gsLst>
+                <a:gs pos="0">
+                  <a:srgbClr val="FFAA2D"/>
+                </a:gs>
+                <a:gs pos="100000">
+                  <a:srgbClr val="FFD393"/>
+                </a:gs>
+              </a:gsLst>
+              <a:lin ang="0" scaled="0"/>
+            </a:gradFill>
+            <a:ln w="19050" cap="flat" cmpd="sng">
+              <a:solidFill>
+                <a:srgbClr val="BFBFBF"/>
+              </a:solidFill>
+              <a:prstDash val="solid"/>
+              <a:miter lim="800000"/>
+              <a:headEnd type="none" w="sm" len="sm"/>
+              <a:tailEnd type="none" w="sm" len="sm"/>
+            </a:ln>
+          </p:spPr>
+          <p:txBody>
+            <a:bodyPr spcFirstLastPara="1" wrap="square" lIns="91425" tIns="45700" rIns="91425" bIns="45700" anchor="ctr" anchorCtr="0">
+              <a:noAutofit/>
+            </a:bodyPr>
+            <a:lstStyle/>
+            <a:p>
+              <a:pPr marL="0" marR="0" lvl="0" indent="0" algn="l" rtl="0">
+                <a:spcBef>
+                  <a:spcPts val="0"/>
+                </a:spcBef>
+                <a:spcAft>
+                  <a:spcPts val="0"/>
+                </a:spcAft>
+                <a:buNone/>
+              </a:pPr>
+              <a:endParaRPr sz="2800">
+                <a:solidFill>
+                  <a:srgbClr val="FFAA2D"/>
+                </a:solidFill>
+                <a:latin typeface="Arial"/>
+                <a:ea typeface="Arial"/>
+                <a:cs typeface="Arial"/>
+                <a:sym typeface="Arial"/>
+              </a:endParaRPr>
+            </a:p>
+          </p:txBody>
+        </p:sp>
+      </p:grpSp>
+      <p:grpSp>
+        <p:nvGrpSpPr>
+          <p:cNvPr id="193" name="Google Shape;193;p5">
+            <a:extLst>
+              <a:ext uri="{FF2B5EF4-FFF2-40B4-BE49-F238E27FC236}">
+                <a16:creationId xmlns:a16="http://schemas.microsoft.com/office/drawing/2014/main" id="{20A3EBBC-E727-466D-F06D-C1F783DC8A86}"/>
+              </a:ext>
+            </a:extLst>
+          </p:cNvPr>
+          <p:cNvGrpSpPr/>
+          <p:nvPr/>
+        </p:nvGrpSpPr>
+        <p:grpSpPr>
+          <a:xfrm>
+            <a:off x="1782659" y="1240148"/>
+            <a:ext cx="1674310" cy="1522886"/>
+            <a:chOff x="3020983" y="881796"/>
+            <a:chExt cx="2097410" cy="2097410"/>
+          </a:xfrm>
+        </p:grpSpPr>
+        <p:grpSp>
+          <p:nvGrpSpPr>
+            <p:cNvPr id="194" name="Google Shape;194;p5">
+              <a:extLst>
+                <a:ext uri="{FF2B5EF4-FFF2-40B4-BE49-F238E27FC236}">
+                  <a16:creationId xmlns:a16="http://schemas.microsoft.com/office/drawing/2014/main" id="{F27DCD13-616F-0360-BF64-6F96BA89D364}"/>
+                </a:ext>
+              </a:extLst>
+            </p:cNvPr>
+            <p:cNvGrpSpPr/>
+            <p:nvPr/>
+          </p:nvGrpSpPr>
+          <p:grpSpPr>
+            <a:xfrm>
+              <a:off x="3020983" y="881796"/>
+              <a:ext cx="2097410" cy="2097410"/>
+              <a:chOff x="3099689" y="1098878"/>
+              <a:chExt cx="1995612" cy="1995615"/>
+            </a:xfrm>
+          </p:grpSpPr>
+          <p:grpSp>
+            <p:nvGrpSpPr>
+              <p:cNvPr id="195" name="Google Shape;195;p5">
+                <a:extLst>
+                  <a:ext uri="{FF2B5EF4-FFF2-40B4-BE49-F238E27FC236}">
+                    <a16:creationId xmlns:a16="http://schemas.microsoft.com/office/drawing/2014/main" id="{C0A739B1-B2EE-BCB4-52CA-EB486AD4D218}"/>
+                  </a:ext>
+                </a:extLst>
+              </p:cNvPr>
+              <p:cNvGrpSpPr/>
+              <p:nvPr/>
+            </p:nvGrpSpPr>
+            <p:grpSpPr>
+              <a:xfrm>
+                <a:off x="3099689" y="1098878"/>
+                <a:ext cx="1995612" cy="1995615"/>
+                <a:chOff x="6804316" y="2574806"/>
+                <a:chExt cx="3585705" cy="3585705"/>
+              </a:xfrm>
+            </p:grpSpPr>
+            <p:sp>
+              <p:nvSpPr>
+                <p:cNvPr id="196" name="Google Shape;196;p5">
+                  <a:extLst>
+                    <a:ext uri="{FF2B5EF4-FFF2-40B4-BE49-F238E27FC236}">
+                      <a16:creationId xmlns:a16="http://schemas.microsoft.com/office/drawing/2014/main" id="{CA18B24B-EFA3-42C5-B448-D0C2856B7E2E}"/>
+                    </a:ext>
+                  </a:extLst>
+                </p:cNvPr>
+                <p:cNvSpPr/>
+                <p:nvPr/>
+              </p:nvSpPr>
+              <p:spPr>
+                <a:xfrm rot="-2700000">
+                  <a:off x="7501948" y="2927402"/>
+                  <a:ext cx="2190440" cy="2880512"/>
+                </a:xfrm>
+                <a:custGeom>
+                  <a:avLst/>
+                  <a:gdLst/>
+                  <a:ahLst/>
+                  <a:cxnLst/>
+                  <a:rect l="l" t="t" r="r" b="b"/>
+                  <a:pathLst>
+                    <a:path w="1696474" h="2070736" extrusionOk="0">
+                      <a:moveTo>
+                        <a:pt x="13249" y="1035368"/>
+                      </a:moveTo>
+                      <a:cubicBezTo>
+                        <a:pt x="112309" y="471170"/>
+                        <a:pt x="388098" y="0"/>
+                        <a:pt x="850497" y="0"/>
+                      </a:cubicBezTo>
+                      <a:cubicBezTo>
+                        <a:pt x="1312896" y="0"/>
+                        <a:pt x="1611545" y="478790"/>
+                        <a:pt x="1687745" y="1035368"/>
+                      </a:cubicBezTo>
+                      <a:cubicBezTo>
+                        <a:pt x="1765308" y="1601901"/>
+                        <a:pt x="1312896" y="2070736"/>
+                        <a:pt x="850497" y="2070736"/>
+                      </a:cubicBezTo>
+                      <a:cubicBezTo>
+                        <a:pt x="388098" y="2070736"/>
+                        <a:pt x="-85811" y="1599566"/>
+                        <a:pt x="13249" y="1035368"/>
+                      </a:cubicBezTo>
+                      <a:close/>
+                    </a:path>
+                  </a:pathLst>
+                </a:custGeom>
+                <a:gradFill>
+                  <a:gsLst>
+                    <a:gs pos="0">
+                      <a:schemeClr val="dk1"/>
+                    </a:gs>
+                    <a:gs pos="17000">
+                      <a:srgbClr val="000000">
+                        <a:alpha val="45882"/>
+                      </a:srgbClr>
+                    </a:gs>
+                    <a:gs pos="34000">
+                      <a:srgbClr val="000000">
+                        <a:alpha val="42745"/>
+                      </a:srgbClr>
+                    </a:gs>
+                    <a:gs pos="51000">
+                      <a:srgbClr val="000000">
+                        <a:alpha val="20000"/>
+                      </a:srgbClr>
+                    </a:gs>
+                    <a:gs pos="65000">
+                      <a:srgbClr val="000000">
+                        <a:alpha val="9803"/>
+                      </a:srgbClr>
+                    </a:gs>
+                    <a:gs pos="78000">
+                      <a:srgbClr val="000000">
+                        <a:alpha val="4705"/>
+                      </a:srgbClr>
+                    </a:gs>
+                    <a:gs pos="100000">
+                      <a:srgbClr val="000000">
+                        <a:alpha val="0"/>
+                      </a:srgbClr>
+                    </a:gs>
+                  </a:gsLst>
+                  <a:lin ang="5400000" scaled="0"/>
+                </a:gradFill>
+                <a:ln>
+                  <a:noFill/>
+                </a:ln>
+              </p:spPr>
+              <p:txBody>
+                <a:bodyPr spcFirstLastPara="1" wrap="square" lIns="91425" tIns="45700" rIns="91425" bIns="45700" anchor="ctr" anchorCtr="0">
+                  <a:noAutofit/>
+                </a:bodyPr>
+                <a:lstStyle/>
+                <a:p>
+                  <a:pPr marL="0" marR="0" lvl="0" indent="0" algn="l" rtl="0">
+                    <a:spcBef>
+                      <a:spcPts val="0"/>
+                    </a:spcBef>
+                    <a:spcAft>
+                      <a:spcPts val="0"/>
+                    </a:spcAft>
+                    <a:buNone/>
+                  </a:pPr>
+                  <a:endParaRPr sz="2800">
+                    <a:solidFill>
+                      <a:schemeClr val="lt1"/>
+                    </a:solidFill>
+                    <a:latin typeface="Arial"/>
+                    <a:ea typeface="Arial"/>
+                    <a:cs typeface="Arial"/>
+                    <a:sym typeface="Arial"/>
+                  </a:endParaRPr>
+                </a:p>
+              </p:txBody>
+            </p:sp>
+            <p:sp>
+              <p:nvSpPr>
+                <p:cNvPr id="197" name="Google Shape;197;p5">
+                  <a:extLst>
+                    <a:ext uri="{FF2B5EF4-FFF2-40B4-BE49-F238E27FC236}">
+                      <a16:creationId xmlns:a16="http://schemas.microsoft.com/office/drawing/2014/main" id="{1AB83451-F4E7-0A30-0B56-F761CD9E3D30}"/>
+                    </a:ext>
+                  </a:extLst>
+                </p:cNvPr>
+                <p:cNvSpPr/>
+                <p:nvPr/>
+              </p:nvSpPr>
+              <p:spPr>
+                <a:xfrm>
+                  <a:off x="7567583" y="3243359"/>
+                  <a:ext cx="1344545" cy="1344543"/>
+                </a:xfrm>
+                <a:prstGeom prst="ellipse">
+                  <a:avLst/>
+                </a:prstGeom>
+                <a:gradFill>
+                  <a:gsLst>
+                    <a:gs pos="0">
+                      <a:srgbClr val="FFFFFF">
+                        <a:alpha val="98823"/>
+                      </a:srgbClr>
+                    </a:gs>
+                    <a:gs pos="43000">
+                      <a:srgbClr val="F7F7F7"/>
+                    </a:gs>
+                    <a:gs pos="100000">
+                      <a:srgbClr val="B8C0C0"/>
+                    </a:gs>
+                  </a:gsLst>
+                  <a:lin ang="2700000" scaled="0"/>
+                </a:gradFill>
+                <a:ln>
+                  <a:noFill/>
+                </a:ln>
+                <a:effectLst>
+                  <a:outerShdw blurRad="139700" dist="88900" dir="2700000" algn="tl" rotWithShape="0">
+                    <a:srgbClr val="494949">
+                      <a:alpha val="29803"/>
+                    </a:srgbClr>
+                  </a:outerShdw>
+                </a:effectLst>
+              </p:spPr>
+              <p:txBody>
+                <a:bodyPr spcFirstLastPara="1" wrap="square" lIns="91425" tIns="45700" rIns="91425" bIns="45700" anchor="ctr" anchorCtr="0">
+                  <a:noAutofit/>
+                </a:bodyPr>
+                <a:lstStyle/>
+                <a:p>
+                  <a:pPr marL="0" marR="0" lvl="0" indent="0" algn="l" rtl="0">
+                    <a:spcBef>
+                      <a:spcPts val="0"/>
+                    </a:spcBef>
+                    <a:spcAft>
+                      <a:spcPts val="0"/>
+                    </a:spcAft>
+                    <a:buNone/>
+                  </a:pPr>
+                  <a:endParaRPr sz="2800">
+                    <a:solidFill>
+                      <a:schemeClr val="lt1"/>
+                    </a:solidFill>
+                    <a:latin typeface="Arial"/>
+                    <a:ea typeface="Arial"/>
+                    <a:cs typeface="Arial"/>
+                    <a:sym typeface="Arial"/>
+                  </a:endParaRPr>
+                </a:p>
+              </p:txBody>
+            </p:sp>
+            <p:sp>
+              <p:nvSpPr>
+                <p:cNvPr id="198" name="Google Shape;198;p5">
+                  <a:extLst>
+                    <a:ext uri="{FF2B5EF4-FFF2-40B4-BE49-F238E27FC236}">
+                      <a16:creationId xmlns:a16="http://schemas.microsoft.com/office/drawing/2014/main" id="{D3CB7909-1330-9029-9637-34ECEC688EDB}"/>
+                    </a:ext>
+                  </a:extLst>
+                </p:cNvPr>
+                <p:cNvSpPr/>
+                <p:nvPr/>
+              </p:nvSpPr>
+              <p:spPr>
+                <a:xfrm>
+                  <a:off x="7380501" y="3019185"/>
+                  <a:ext cx="1596494" cy="1596494"/>
+                </a:xfrm>
+                <a:prstGeom prst="ellipse">
+                  <a:avLst/>
+                </a:prstGeom>
+                <a:gradFill>
+                  <a:gsLst>
+                    <a:gs pos="0">
+                      <a:srgbClr val="FFFFFF">
+                        <a:alpha val="98823"/>
+                      </a:srgbClr>
+                    </a:gs>
+                    <a:gs pos="11000">
+                      <a:srgbClr val="FFFFFF">
+                        <a:alpha val="98823"/>
+                      </a:srgbClr>
+                    </a:gs>
+                    <a:gs pos="39000">
+                      <a:schemeClr val="lt1"/>
+                    </a:gs>
+                    <a:gs pos="52999">
+                      <a:srgbClr val="F7F7F7"/>
+                    </a:gs>
+                    <a:gs pos="100000">
+                      <a:srgbClr val="B8C0C0"/>
+                    </a:gs>
+                  </a:gsLst>
+                  <a:lin ang="2700000" scaled="0"/>
+                </a:gradFill>
+                <a:ln>
+                  <a:noFill/>
+                </a:ln>
+              </p:spPr>
+              <p:txBody>
+                <a:bodyPr spcFirstLastPara="1" wrap="square" lIns="91425" tIns="45700" rIns="91425" bIns="45700" anchor="ctr" anchorCtr="0">
+                  <a:noAutofit/>
+                </a:bodyPr>
+                <a:lstStyle/>
+                <a:p>
+                  <a:pPr marL="0" marR="0" lvl="0" indent="0" algn="l" rtl="0">
+                    <a:spcBef>
+                      <a:spcPts val="0"/>
+                    </a:spcBef>
+                    <a:spcAft>
+                      <a:spcPts val="0"/>
+                    </a:spcAft>
+                    <a:buNone/>
+                  </a:pPr>
+                  <a:endParaRPr sz="2800">
+                    <a:solidFill>
+                      <a:schemeClr val="lt1"/>
+                    </a:solidFill>
+                    <a:latin typeface="Arial"/>
+                    <a:ea typeface="Arial"/>
+                    <a:cs typeface="Arial"/>
+                    <a:sym typeface="Arial"/>
+                  </a:endParaRPr>
+                </a:p>
+              </p:txBody>
+            </p:sp>
+          </p:grpSp>
+          <p:sp>
+            <p:nvSpPr>
+              <p:cNvPr id="199" name="Google Shape;199;p5">
+                <a:extLst>
+                  <a:ext uri="{FF2B5EF4-FFF2-40B4-BE49-F238E27FC236}">
+                    <a16:creationId xmlns:a16="http://schemas.microsoft.com/office/drawing/2014/main" id="{955DD059-C461-E3C7-67D1-510271968A8E}"/>
+                  </a:ext>
+                </a:extLst>
+              </p:cNvPr>
+              <p:cNvSpPr/>
+              <p:nvPr/>
+            </p:nvSpPr>
+            <p:spPr>
+              <a:xfrm>
+                <a:off x="3222820" y="1148080"/>
+                <a:ext cx="1284820" cy="1284821"/>
+              </a:xfrm>
+              <a:prstGeom prst="ellipse">
+                <a:avLst/>
+              </a:prstGeom>
+              <a:solidFill>
+                <a:schemeClr val="lt1">
+                  <a:alpha val="13725"/>
+                </a:schemeClr>
+              </a:solidFill>
+              <a:ln w="15875" cap="flat" cmpd="sng">
+                <a:solidFill>
+                  <a:schemeClr val="lt1"/>
+                </a:solidFill>
+                <a:prstDash val="solid"/>
+                <a:miter lim="800000"/>
+                <a:headEnd type="none" w="sm" len="sm"/>
+                <a:tailEnd type="none" w="sm" len="sm"/>
+              </a:ln>
+              <a:effectLst>
+                <a:outerShdw blurRad="215900" dist="88900" dir="2700000" algn="tl" rotWithShape="0">
+                  <a:srgbClr val="000000">
+                    <a:alpha val="10980"/>
+                  </a:srgbClr>
+                </a:outerShdw>
+              </a:effectLst>
+            </p:spPr>
+            <p:txBody>
+              <a:bodyPr spcFirstLastPara="1" wrap="square" lIns="91425" tIns="45700" rIns="91425" bIns="45700" anchor="ctr" anchorCtr="0">
+                <a:noAutofit/>
+              </a:bodyPr>
+              <a:lstStyle/>
+              <a:p>
+                <a:pPr marL="0" marR="0" lvl="0" indent="0" algn="l" rtl="0">
+                  <a:spcBef>
+                    <a:spcPts val="0"/>
+                  </a:spcBef>
+                  <a:spcAft>
+                    <a:spcPts val="0"/>
+                  </a:spcAft>
+                  <a:buNone/>
+                </a:pPr>
+                <a:endParaRPr sz="2800">
+                  <a:solidFill>
+                    <a:schemeClr val="lt1"/>
+                  </a:solidFill>
+                  <a:latin typeface="Arial"/>
+                  <a:ea typeface="Arial"/>
+                  <a:cs typeface="Arial"/>
+                  <a:sym typeface="Arial"/>
+                </a:endParaRPr>
+              </a:p>
+            </p:txBody>
+          </p:sp>
+        </p:grpSp>
+        <p:sp>
+          <p:nvSpPr>
+            <p:cNvPr id="200" name="Google Shape;200;p5">
+              <a:extLst>
+                <a:ext uri="{FF2B5EF4-FFF2-40B4-BE49-F238E27FC236}">
+                  <a16:creationId xmlns:a16="http://schemas.microsoft.com/office/drawing/2014/main" id="{2E6A94A7-078A-5805-66E9-5D7EA82D5A1D}"/>
+                </a:ext>
+              </a:extLst>
+            </p:cNvPr>
+            <p:cNvSpPr txBox="1"/>
+            <p:nvPr/>
+          </p:nvSpPr>
+          <p:spPr>
+            <a:xfrm>
+              <a:off x="3514455" y="1292811"/>
+              <a:ext cx="774240" cy="720610"/>
+            </a:xfrm>
+            <a:prstGeom prst="rect">
+              <a:avLst/>
+            </a:prstGeom>
+            <a:noFill/>
+            <a:ln>
+              <a:noFill/>
+            </a:ln>
+          </p:spPr>
+          <p:txBody>
+            <a:bodyPr spcFirstLastPara="1" wrap="square" lIns="91425" tIns="45700" rIns="91425" bIns="45700" anchor="t" anchorCtr="0">
+              <a:spAutoFit/>
+            </a:bodyPr>
+            <a:lstStyle/>
+            <a:p>
+              <a:pPr marL="0" marR="0" lvl="0" indent="0" algn="l" rtl="0">
+                <a:spcBef>
+                  <a:spcPts val="0"/>
+                </a:spcBef>
+                <a:spcAft>
+                  <a:spcPts val="0"/>
+                </a:spcAft>
+                <a:buNone/>
+              </a:pPr>
+              <a:r>
+                <a:rPr lang="en-US" sz="2800" dirty="0">
+                  <a:solidFill>
+                    <a:srgbClr val="FFB850"/>
+                  </a:solidFill>
+                  <a:latin typeface="Impact"/>
+                  <a:ea typeface="Impact"/>
+                  <a:cs typeface="Impact"/>
+                  <a:sym typeface="Impact"/>
+                </a:rPr>
+                <a:t>02</a:t>
+              </a:r>
+              <a:endParaRPr sz="2800" dirty="0">
+                <a:solidFill>
+                  <a:srgbClr val="FFB850"/>
+                </a:solidFill>
+                <a:latin typeface="Impact"/>
+                <a:ea typeface="Impact"/>
+                <a:cs typeface="Impact"/>
+                <a:sym typeface="Impact"/>
+              </a:endParaRPr>
+            </a:p>
+          </p:txBody>
+        </p:sp>
+      </p:grpSp>
+      <p:sp>
+        <p:nvSpPr>
+          <p:cNvPr id="201" name="Google Shape;201;p5">
+            <a:extLst>
+              <a:ext uri="{FF2B5EF4-FFF2-40B4-BE49-F238E27FC236}">
+                <a16:creationId xmlns:a16="http://schemas.microsoft.com/office/drawing/2014/main" id="{D889E76C-5FA7-F61B-A559-2111AECE7545}"/>
+              </a:ext>
+            </a:extLst>
+          </p:cNvPr>
+          <p:cNvSpPr txBox="1"/>
+          <p:nvPr/>
+        </p:nvSpPr>
+        <p:spPr>
+          <a:xfrm>
+            <a:off x="2980807" y="1521544"/>
+            <a:ext cx="6905838" cy="523220"/>
+          </a:xfrm>
+          <a:prstGeom prst="rect">
+            <a:avLst/>
+          </a:prstGeom>
+          <a:noFill/>
+          <a:ln>
+            <a:noFill/>
+          </a:ln>
+        </p:spPr>
+        <p:txBody>
+          <a:bodyPr spcFirstLastPara="1" wrap="square" lIns="91425" tIns="45700" rIns="91425" bIns="45700" anchor="t" anchorCtr="0">
+            <a:spAutoFit/>
+          </a:bodyPr>
+          <a:lstStyle/>
+          <a:p>
+            <a:pPr marL="0" marR="0" lvl="0" indent="0" algn="l" rtl="0">
+              <a:spcBef>
+                <a:spcPts val="0"/>
+              </a:spcBef>
+              <a:spcAft>
+                <a:spcPts val="0"/>
+              </a:spcAft>
+              <a:buNone/>
+            </a:pPr>
+            <a:r>
+              <a:rPr lang="en-US" sz="2800" b="1" dirty="0">
+                <a:solidFill>
+                  <a:schemeClr val="dk1"/>
+                </a:solidFill>
+                <a:latin typeface="Times New Roman"/>
+                <a:ea typeface="Times New Roman"/>
+                <a:cs typeface="Times New Roman"/>
+                <a:sym typeface="Times New Roman"/>
+              </a:rPr>
+              <a:t>Hibernate ORM</a:t>
+            </a:r>
+            <a:endParaRPr sz="2800" b="1" dirty="0">
+              <a:solidFill>
+                <a:schemeClr val="dk1"/>
+              </a:solidFill>
+              <a:latin typeface="Times New Roman"/>
+              <a:ea typeface="Times New Roman"/>
+              <a:cs typeface="Times New Roman"/>
+              <a:sym typeface="Times New Roman"/>
+            </a:endParaRPr>
+          </a:p>
+        </p:txBody>
+      </p:sp>
+      <p:pic>
+        <p:nvPicPr>
+          <p:cNvPr id="3" name="Picture 2">
+            <a:extLst>
+              <a:ext uri="{FF2B5EF4-FFF2-40B4-BE49-F238E27FC236}">
+                <a16:creationId xmlns:a16="http://schemas.microsoft.com/office/drawing/2014/main" id="{F485886F-5073-D560-4E87-EA5F3C16D647}"/>
+              </a:ext>
+            </a:extLst>
+          </p:cNvPr>
+          <p:cNvPicPr>
+            <a:picLocks noChangeAspect="1"/>
+          </p:cNvPicPr>
+          <p:nvPr/>
+        </p:nvPicPr>
+        <p:blipFill>
+          <a:blip r:embed="rId3"/>
+          <a:stretch>
+            <a:fillRect/>
+          </a:stretch>
+        </p:blipFill>
+        <p:spPr>
+          <a:xfrm>
+            <a:off x="2980807" y="2302520"/>
+            <a:ext cx="5549636" cy="4434301"/>
+          </a:xfrm>
+          <a:prstGeom prst="rect">
+            <a:avLst/>
+          </a:prstGeom>
+        </p:spPr>
+      </p:pic>
+    </p:spTree>
+    <p:extLst>
+      <p:ext uri="{BB962C8B-B14F-4D97-AF65-F5344CB8AC3E}">
+        <p14:creationId xmlns:p14="http://schemas.microsoft.com/office/powerpoint/2010/main" val="683800810"/>
+      </p:ext>
+    </p:extLst>
+  </p:cSld>
+  <p:clrMapOvr>
+    <a:masterClrMapping/>
+  </p:clrMapOvr>
+  <mc:AlternateContent xmlns:mc="http://schemas.openxmlformats.org/markup-compatibility/2006">
+    <mc:Choice xmlns:p14="http://schemas.microsoft.com/office/powerpoint/2010/main" Requires="p14">
+      <p:transition spd="med" p14:dur="700">
+        <p:fade/>
+      </p:transition>
+    </mc:Choice>
+    <mc:Fallback>
+      <p:transition spd="med">
+        <p:fade/>
+      </p:transition>
+    </mc:Fallback>
+  </mc:AlternateContent>
+  <p:timing>
+    <p:tnLst>
+      <p:par>
+        <p:cTn id="1" dur="indefinite" restart="never" nodeType="tmRoot">
+          <p:childTnLst>
+            <p:seq concurrent="1" nextAc="seek">
+              <p:cTn id="2" dur="indefinite" nodeType="mainSeq">
+                <p:childTnLst>
+                  <p:par>
+                    <p:cTn id="3" fill="hold">
+                      <p:stCondLst>
+                        <p:cond delay="indefinite"/>
+                        <p:cond evt="onBegin" delay="0">
+                          <p:tn val="2"/>
+                        </p:cond>
+                      </p:stCondLst>
+                      <p:childTnLst>
+                        <p:par>
+                          <p:cTn id="4" fill="hold">
+                            <p:stCondLst>
+                              <p:cond delay="0"/>
+                            </p:stCondLst>
+                            <p:childTnLst>
+                              <p:par>
+                                <p:cTn id="5" presetID="2" presetClass="entr" presetSubtype="8" fill="hold" nodeType="withEffect">
+                                  <p:stCondLst>
+                                    <p:cond delay="0"/>
+                                  </p:stCondLst>
+                                  <p:childTnLst>
+                                    <p:set>
+                                      <p:cBhvr>
+                                        <p:cTn id="6" dur="1" fill="hold">
+                                          <p:stCondLst>
+                                            <p:cond delay="0"/>
+                                          </p:stCondLst>
+                                        </p:cTn>
+                                        <p:tgtEl>
+                                          <p:spTgt spid="193"/>
+                                        </p:tgtEl>
+                                        <p:attrNameLst>
+                                          <p:attrName>style.visibility</p:attrName>
+                                        </p:attrNameLst>
+                                      </p:cBhvr>
+                                      <p:to>
+                                        <p:strVal val="visible"/>
+                                      </p:to>
+                                    </p:set>
+                                    <p:anim calcmode="lin" valueType="num">
+                                      <p:cBhvr additive="base">
+                                        <p:cTn id="7" dur="500"/>
+                                        <p:tgtEl>
+                                          <p:spTgt spid="193"/>
+                                        </p:tgtEl>
+                                        <p:attrNameLst>
+                                          <p:attrName>ppt_x</p:attrName>
+                                        </p:attrNameLst>
+                                      </p:cBhvr>
+                                      <p:tavLst>
+                                        <p:tav tm="0">
+                                          <p:val>
+                                            <p:strVal val="#ppt_x-1"/>
+                                          </p:val>
+                                        </p:tav>
+                                        <p:tav tm="100000">
+                                          <p:val>
+                                            <p:strVal val="#ppt_x"/>
+                                          </p:val>
+                                        </p:tav>
+                                      </p:tavLst>
+                                    </p:anim>
+                                  </p:childTnLst>
+                                </p:cTn>
+                              </p:par>
+                              <p:par>
+                                <p:cTn id="8" presetID="2" presetClass="entr" presetSubtype="2" fill="hold" nodeType="withEffect">
+                                  <p:stCondLst>
+                                    <p:cond delay="0"/>
+                                  </p:stCondLst>
+                                  <p:childTnLst>
+                                    <p:set>
+                                      <p:cBhvr>
+                                        <p:cTn id="9" dur="1" fill="hold">
+                                          <p:stCondLst>
+                                            <p:cond delay="0"/>
+                                          </p:stCondLst>
+                                        </p:cTn>
+                                        <p:tgtEl>
+                                          <p:spTgt spid="190"/>
+                                        </p:tgtEl>
+                                        <p:attrNameLst>
+                                          <p:attrName>style.visibility</p:attrName>
+                                        </p:attrNameLst>
+                                      </p:cBhvr>
+                                      <p:to>
+                                        <p:strVal val="visible"/>
+                                      </p:to>
+                                    </p:set>
+                                    <p:anim calcmode="lin" valueType="num">
+                                      <p:cBhvr additive="base">
+                                        <p:cTn id="10" dur="500"/>
+                                        <p:tgtEl>
+                                          <p:spTgt spid="190"/>
+                                        </p:tgtEl>
+                                        <p:attrNameLst>
+                                          <p:attrName>ppt_x</p:attrName>
+                                        </p:attrNameLst>
+                                      </p:cBhvr>
+                                      <p:tavLst>
+                                        <p:tav tm="0">
+                                          <p:val>
+                                            <p:strVal val="#ppt_x+1"/>
+                                          </p:val>
+                                        </p:tav>
+                                        <p:tav tm="100000">
+                                          <p:val>
+                                            <p:strVal val="#ppt_x"/>
+                                          </p:val>
+                                        </p:tav>
+                                      </p:tavLst>
+                                    </p:anim>
+                                  </p:childTnLst>
+                                </p:cTn>
+                              </p:par>
+                            </p:childTnLst>
+                          </p:cTn>
+                        </p:par>
+                      </p:childTnLst>
+                    </p:cTn>
+                  </p:par>
+                </p:childTnLst>
+              </p:cTn>
+              <p:prevCondLst>
+                <p:cond evt="onPrev" delay="0">
+                  <p:tgtEl>
+                    <p:sldTgt/>
+                  </p:tgtEl>
+                </p:cond>
+              </p:prevCondLst>
+              <p:nextCondLst>
+                <p:cond evt="onNext" delay="0">
+                  <p:tgtEl>
+                    <p:sldTgt/>
+                  </p:tgtEl>
+                </p:cond>
+              </p:nextCondLst>
+            </p:seq>
+          </p:childTnLst>
+        </p:cTn>
+      </p:par>
+    </p:tnLst>
+  </p:timing>
+</p:sld>
+</file>
+
+<file path=ppt/slides/slide7.xml><?xml version="1.0" encoding="utf-8"?>
+<p:sld xmlns:a="http://schemas.openxmlformats.org/drawingml/2006/main" xmlns:r="http://schemas.openxmlformats.org/officeDocument/2006/relationships" xmlns:p="http://schemas.openxmlformats.org/presentationml/2006/main">
+  <p:cSld>
+    <p:spTree>
+      <p:nvGrpSpPr>
+        <p:cNvPr id="1" name="Shape 186">
+          <a:extLst>
+            <a:ext uri="{FF2B5EF4-FFF2-40B4-BE49-F238E27FC236}">
+              <a16:creationId xmlns:a16="http://schemas.microsoft.com/office/drawing/2014/main" id="{464BE347-ACD5-5106-EF8E-E0152AE2A2AC}"/>
+            </a:ext>
+          </a:extLst>
+        </p:cNvPr>
+        <p:cNvGrpSpPr/>
+        <p:nvPr/>
+      </p:nvGrpSpPr>
+      <p:grpSpPr>
+        <a:xfrm>
+          <a:off x="0" y="0"/>
+          <a:ext cx="0" cy="0"/>
+          <a:chOff x="0" y="0"/>
+          <a:chExt cx="0" cy="0"/>
+        </a:xfrm>
+      </p:grpSpPr>
+      <p:grpSp>
+        <p:nvGrpSpPr>
+          <p:cNvPr id="190" name="Google Shape;190;p5">
+            <a:extLst>
+              <a:ext uri="{FF2B5EF4-FFF2-40B4-BE49-F238E27FC236}">
+                <a16:creationId xmlns:a16="http://schemas.microsoft.com/office/drawing/2014/main" id="{8B6AC91E-0D5A-88C8-F5EA-FA56BA25E688}"/>
+              </a:ext>
+            </a:extLst>
+          </p:cNvPr>
+          <p:cNvGrpSpPr/>
+          <p:nvPr/>
+        </p:nvGrpSpPr>
+        <p:grpSpPr>
+          <a:xfrm>
+            <a:off x="1670730" y="1263299"/>
+            <a:ext cx="8616270" cy="1007332"/>
+            <a:chOff x="3129129" y="1121776"/>
+            <a:chExt cx="5933741" cy="1171624"/>
+          </a:xfrm>
+        </p:grpSpPr>
+        <p:sp>
+          <p:nvSpPr>
+            <p:cNvPr id="191" name="Google Shape;191;p5">
+              <a:extLst>
+                <a:ext uri="{FF2B5EF4-FFF2-40B4-BE49-F238E27FC236}">
+                  <a16:creationId xmlns:a16="http://schemas.microsoft.com/office/drawing/2014/main" id="{D4507D98-6429-CFD1-FA1A-903F03F52698}"/>
+                </a:ext>
+              </a:extLst>
+            </p:cNvPr>
+            <p:cNvSpPr/>
+            <p:nvPr/>
+          </p:nvSpPr>
+          <p:spPr>
+            <a:xfrm>
+              <a:off x="3129129" y="1121776"/>
+              <a:ext cx="5933741" cy="1171624"/>
+            </a:xfrm>
+            <a:prstGeom prst="roundRect">
+              <a:avLst>
+                <a:gd name="adj" fmla="val 50000"/>
+              </a:avLst>
+            </a:prstGeom>
+            <a:solidFill>
+              <a:srgbClr val="D8D8D8">
+                <a:alpha val="49803"/>
+              </a:srgbClr>
+            </a:solidFill>
+            <a:ln>
+              <a:noFill/>
+            </a:ln>
+          </p:spPr>
+          <p:txBody>
+            <a:bodyPr spcFirstLastPara="1" wrap="square" lIns="91425" tIns="45700" rIns="91425" bIns="45700" anchor="ctr" anchorCtr="0">
+              <a:noAutofit/>
+            </a:bodyPr>
+            <a:lstStyle/>
+            <a:p>
+              <a:pPr marL="0" marR="0" lvl="0" indent="0" algn="l" rtl="0">
+                <a:spcBef>
+                  <a:spcPts val="0"/>
+                </a:spcBef>
+                <a:spcAft>
+                  <a:spcPts val="0"/>
+                </a:spcAft>
+                <a:buNone/>
+              </a:pPr>
+              <a:endParaRPr sz="2800">
+                <a:solidFill>
+                  <a:srgbClr val="FFAA2D"/>
+                </a:solidFill>
+                <a:latin typeface="Arial"/>
+                <a:ea typeface="Arial"/>
+                <a:cs typeface="Arial"/>
+                <a:sym typeface="Arial"/>
+              </a:endParaRPr>
+            </a:p>
+          </p:txBody>
+        </p:sp>
+        <p:sp>
+          <p:nvSpPr>
+            <p:cNvPr id="192" name="Google Shape;192;p5">
+              <a:extLst>
+                <a:ext uri="{FF2B5EF4-FFF2-40B4-BE49-F238E27FC236}">
+                  <a16:creationId xmlns:a16="http://schemas.microsoft.com/office/drawing/2014/main" id="{EEB48343-68B5-4F09-BCEA-BE31021A8399}"/>
+                </a:ext>
+              </a:extLst>
+            </p:cNvPr>
+            <p:cNvSpPr/>
+            <p:nvPr/>
+          </p:nvSpPr>
+          <p:spPr>
+            <a:xfrm>
+              <a:off x="3289330" y="1253414"/>
+              <a:ext cx="5613340" cy="908350"/>
+            </a:xfrm>
+            <a:prstGeom prst="roundRect">
+              <a:avLst>
+                <a:gd name="adj" fmla="val 50000"/>
+              </a:avLst>
+            </a:prstGeom>
+            <a:gradFill>
+              <a:gsLst>
+                <a:gs pos="0">
+                  <a:srgbClr val="FFAA2D"/>
+                </a:gs>
+                <a:gs pos="100000">
+                  <a:srgbClr val="FFD393"/>
+                </a:gs>
+              </a:gsLst>
+              <a:lin ang="0" scaled="0"/>
+            </a:gradFill>
+            <a:ln w="19050" cap="flat" cmpd="sng">
+              <a:solidFill>
+                <a:srgbClr val="BFBFBF"/>
+              </a:solidFill>
+              <a:prstDash val="solid"/>
+              <a:miter lim="800000"/>
+              <a:headEnd type="none" w="sm" len="sm"/>
+              <a:tailEnd type="none" w="sm" len="sm"/>
+            </a:ln>
+          </p:spPr>
+          <p:txBody>
+            <a:bodyPr spcFirstLastPara="1" wrap="square" lIns="91425" tIns="45700" rIns="91425" bIns="45700" anchor="ctr" anchorCtr="0">
+              <a:noAutofit/>
+            </a:bodyPr>
+            <a:lstStyle/>
+            <a:p>
+              <a:pPr marL="0" marR="0" lvl="0" indent="0" algn="l" rtl="0">
+                <a:spcBef>
+                  <a:spcPts val="0"/>
+                </a:spcBef>
+                <a:spcAft>
+                  <a:spcPts val="0"/>
+                </a:spcAft>
+                <a:buNone/>
+              </a:pPr>
+              <a:endParaRPr sz="2800">
+                <a:solidFill>
+                  <a:srgbClr val="FFAA2D"/>
+                </a:solidFill>
+                <a:latin typeface="Arial"/>
+                <a:ea typeface="Arial"/>
+                <a:cs typeface="Arial"/>
+                <a:sym typeface="Arial"/>
+              </a:endParaRPr>
+            </a:p>
+          </p:txBody>
+        </p:sp>
+      </p:grpSp>
+      <p:grpSp>
+        <p:nvGrpSpPr>
+          <p:cNvPr id="193" name="Google Shape;193;p5">
+            <a:extLst>
+              <a:ext uri="{FF2B5EF4-FFF2-40B4-BE49-F238E27FC236}">
+                <a16:creationId xmlns:a16="http://schemas.microsoft.com/office/drawing/2014/main" id="{7A5AEF1F-114D-AA88-6E76-F9F208D55215}"/>
+              </a:ext>
+            </a:extLst>
+          </p:cNvPr>
+          <p:cNvGrpSpPr/>
+          <p:nvPr/>
+        </p:nvGrpSpPr>
+        <p:grpSpPr>
+          <a:xfrm>
+            <a:off x="1782659" y="1240148"/>
+            <a:ext cx="1674310" cy="1522886"/>
+            <a:chOff x="3020983" y="881796"/>
+            <a:chExt cx="2097410" cy="2097410"/>
+          </a:xfrm>
+        </p:grpSpPr>
+        <p:grpSp>
+          <p:nvGrpSpPr>
+            <p:cNvPr id="194" name="Google Shape;194;p5">
+              <a:extLst>
+                <a:ext uri="{FF2B5EF4-FFF2-40B4-BE49-F238E27FC236}">
+                  <a16:creationId xmlns:a16="http://schemas.microsoft.com/office/drawing/2014/main" id="{89CFFB08-5FBE-22A9-8012-302218FD3F3C}"/>
+                </a:ext>
+              </a:extLst>
+            </p:cNvPr>
+            <p:cNvGrpSpPr/>
+            <p:nvPr/>
+          </p:nvGrpSpPr>
+          <p:grpSpPr>
+            <a:xfrm>
+              <a:off x="3020983" y="881796"/>
+              <a:ext cx="2097410" cy="2097410"/>
+              <a:chOff x="3099689" y="1098878"/>
+              <a:chExt cx="1995612" cy="1995615"/>
+            </a:xfrm>
+          </p:grpSpPr>
+          <p:grpSp>
+            <p:nvGrpSpPr>
+              <p:cNvPr id="195" name="Google Shape;195;p5">
+                <a:extLst>
+                  <a:ext uri="{FF2B5EF4-FFF2-40B4-BE49-F238E27FC236}">
+                    <a16:creationId xmlns:a16="http://schemas.microsoft.com/office/drawing/2014/main" id="{9D23D236-0777-BA29-F0B6-4230738D25B5}"/>
+                  </a:ext>
+                </a:extLst>
+              </p:cNvPr>
+              <p:cNvGrpSpPr/>
+              <p:nvPr/>
+            </p:nvGrpSpPr>
+            <p:grpSpPr>
+              <a:xfrm>
+                <a:off x="3099689" y="1098878"/>
+                <a:ext cx="1995612" cy="1995615"/>
+                <a:chOff x="6804316" y="2574806"/>
+                <a:chExt cx="3585705" cy="3585705"/>
+              </a:xfrm>
+            </p:grpSpPr>
+            <p:sp>
+              <p:nvSpPr>
+                <p:cNvPr id="196" name="Google Shape;196;p5">
+                  <a:extLst>
+                    <a:ext uri="{FF2B5EF4-FFF2-40B4-BE49-F238E27FC236}">
+                      <a16:creationId xmlns:a16="http://schemas.microsoft.com/office/drawing/2014/main" id="{AF173D45-9CBF-D855-D849-662F8155228A}"/>
+                    </a:ext>
+                  </a:extLst>
+                </p:cNvPr>
+                <p:cNvSpPr/>
+                <p:nvPr/>
+              </p:nvSpPr>
+              <p:spPr>
+                <a:xfrm rot="-2700000">
+                  <a:off x="7501948" y="2927402"/>
+                  <a:ext cx="2190440" cy="2880512"/>
+                </a:xfrm>
+                <a:custGeom>
+                  <a:avLst/>
+                  <a:gdLst/>
+                  <a:ahLst/>
+                  <a:cxnLst/>
+                  <a:rect l="l" t="t" r="r" b="b"/>
+                  <a:pathLst>
+                    <a:path w="1696474" h="2070736" extrusionOk="0">
+                      <a:moveTo>
+                        <a:pt x="13249" y="1035368"/>
+                      </a:moveTo>
+                      <a:cubicBezTo>
+                        <a:pt x="112309" y="471170"/>
+                        <a:pt x="388098" y="0"/>
+                        <a:pt x="850497" y="0"/>
+                      </a:cubicBezTo>
+                      <a:cubicBezTo>
+                        <a:pt x="1312896" y="0"/>
+                        <a:pt x="1611545" y="478790"/>
+                        <a:pt x="1687745" y="1035368"/>
+                      </a:cubicBezTo>
+                      <a:cubicBezTo>
+                        <a:pt x="1765308" y="1601901"/>
+                        <a:pt x="1312896" y="2070736"/>
+                        <a:pt x="850497" y="2070736"/>
+                      </a:cubicBezTo>
+                      <a:cubicBezTo>
+                        <a:pt x="388098" y="2070736"/>
+                        <a:pt x="-85811" y="1599566"/>
+                        <a:pt x="13249" y="1035368"/>
+                      </a:cubicBezTo>
+                      <a:close/>
+                    </a:path>
+                  </a:pathLst>
+                </a:custGeom>
+                <a:gradFill>
+                  <a:gsLst>
+                    <a:gs pos="0">
+                      <a:schemeClr val="dk1"/>
+                    </a:gs>
+                    <a:gs pos="17000">
+                      <a:srgbClr val="000000">
+                        <a:alpha val="45882"/>
+                      </a:srgbClr>
+                    </a:gs>
+                    <a:gs pos="34000">
+                      <a:srgbClr val="000000">
+                        <a:alpha val="42745"/>
+                      </a:srgbClr>
+                    </a:gs>
+                    <a:gs pos="51000">
+                      <a:srgbClr val="000000">
+                        <a:alpha val="20000"/>
+                      </a:srgbClr>
+                    </a:gs>
+                    <a:gs pos="65000">
+                      <a:srgbClr val="000000">
+                        <a:alpha val="9803"/>
+                      </a:srgbClr>
+                    </a:gs>
+                    <a:gs pos="78000">
+                      <a:srgbClr val="000000">
+                        <a:alpha val="4705"/>
+                      </a:srgbClr>
+                    </a:gs>
+                    <a:gs pos="100000">
+                      <a:srgbClr val="000000">
+                        <a:alpha val="0"/>
+                      </a:srgbClr>
+                    </a:gs>
+                  </a:gsLst>
+                  <a:lin ang="5400000" scaled="0"/>
+                </a:gradFill>
+                <a:ln>
+                  <a:noFill/>
+                </a:ln>
+              </p:spPr>
+              <p:txBody>
+                <a:bodyPr spcFirstLastPara="1" wrap="square" lIns="91425" tIns="45700" rIns="91425" bIns="45700" anchor="ctr" anchorCtr="0">
+                  <a:noAutofit/>
+                </a:bodyPr>
+                <a:lstStyle/>
+                <a:p>
+                  <a:pPr marL="0" marR="0" lvl="0" indent="0" algn="l" rtl="0">
+                    <a:spcBef>
+                      <a:spcPts val="0"/>
+                    </a:spcBef>
+                    <a:spcAft>
+                      <a:spcPts val="0"/>
+                    </a:spcAft>
+                    <a:buNone/>
+                  </a:pPr>
+                  <a:endParaRPr sz="2800">
+                    <a:solidFill>
+                      <a:schemeClr val="lt1"/>
+                    </a:solidFill>
+                    <a:latin typeface="Arial"/>
+                    <a:ea typeface="Arial"/>
+                    <a:cs typeface="Arial"/>
+                    <a:sym typeface="Arial"/>
+                  </a:endParaRPr>
+                </a:p>
+              </p:txBody>
+            </p:sp>
+            <p:sp>
+              <p:nvSpPr>
+                <p:cNvPr id="197" name="Google Shape;197;p5">
+                  <a:extLst>
+                    <a:ext uri="{FF2B5EF4-FFF2-40B4-BE49-F238E27FC236}">
+                      <a16:creationId xmlns:a16="http://schemas.microsoft.com/office/drawing/2014/main" id="{366EEC81-27AE-AE33-64E2-11F3BA9A0FD3}"/>
+                    </a:ext>
+                  </a:extLst>
+                </p:cNvPr>
+                <p:cNvSpPr/>
+                <p:nvPr/>
+              </p:nvSpPr>
+              <p:spPr>
+                <a:xfrm>
+                  <a:off x="7567583" y="3243359"/>
+                  <a:ext cx="1344545" cy="1344543"/>
+                </a:xfrm>
+                <a:prstGeom prst="ellipse">
+                  <a:avLst/>
+                </a:prstGeom>
+                <a:gradFill>
+                  <a:gsLst>
+                    <a:gs pos="0">
+                      <a:srgbClr val="FFFFFF">
+                        <a:alpha val="98823"/>
+                      </a:srgbClr>
+                    </a:gs>
+                    <a:gs pos="43000">
+                      <a:srgbClr val="F7F7F7"/>
+                    </a:gs>
+                    <a:gs pos="100000">
+                      <a:srgbClr val="B8C0C0"/>
+                    </a:gs>
+                  </a:gsLst>
+                  <a:lin ang="2700000" scaled="0"/>
+                </a:gradFill>
+                <a:ln>
+                  <a:noFill/>
+                </a:ln>
+                <a:effectLst>
+                  <a:outerShdw blurRad="139700" dist="88900" dir="2700000" algn="tl" rotWithShape="0">
+                    <a:srgbClr val="494949">
+                      <a:alpha val="29803"/>
+                    </a:srgbClr>
+                  </a:outerShdw>
+                </a:effectLst>
+              </p:spPr>
+              <p:txBody>
+                <a:bodyPr spcFirstLastPara="1" wrap="square" lIns="91425" tIns="45700" rIns="91425" bIns="45700" anchor="ctr" anchorCtr="0">
+                  <a:noAutofit/>
+                </a:bodyPr>
+                <a:lstStyle/>
+                <a:p>
+                  <a:pPr marL="0" marR="0" lvl="0" indent="0" algn="l" rtl="0">
+                    <a:spcBef>
+                      <a:spcPts val="0"/>
+                    </a:spcBef>
+                    <a:spcAft>
+                      <a:spcPts val="0"/>
+                    </a:spcAft>
+                    <a:buNone/>
+                  </a:pPr>
+                  <a:endParaRPr sz="2800">
+                    <a:solidFill>
+                      <a:schemeClr val="lt1"/>
+                    </a:solidFill>
+                    <a:latin typeface="Arial"/>
+                    <a:ea typeface="Arial"/>
+                    <a:cs typeface="Arial"/>
+                    <a:sym typeface="Arial"/>
+                  </a:endParaRPr>
+                </a:p>
+              </p:txBody>
+            </p:sp>
+            <p:sp>
+              <p:nvSpPr>
+                <p:cNvPr id="198" name="Google Shape;198;p5">
+                  <a:extLst>
+                    <a:ext uri="{FF2B5EF4-FFF2-40B4-BE49-F238E27FC236}">
+                      <a16:creationId xmlns:a16="http://schemas.microsoft.com/office/drawing/2014/main" id="{24BBF488-3AFE-CCF7-14C3-E74B5A3433F0}"/>
+                    </a:ext>
+                  </a:extLst>
+                </p:cNvPr>
+                <p:cNvSpPr/>
+                <p:nvPr/>
+              </p:nvSpPr>
+              <p:spPr>
+                <a:xfrm>
+                  <a:off x="7380501" y="3019185"/>
+                  <a:ext cx="1596494" cy="1596494"/>
+                </a:xfrm>
+                <a:prstGeom prst="ellipse">
+                  <a:avLst/>
+                </a:prstGeom>
+                <a:gradFill>
+                  <a:gsLst>
+                    <a:gs pos="0">
+                      <a:srgbClr val="FFFFFF">
+                        <a:alpha val="98823"/>
+                      </a:srgbClr>
+                    </a:gs>
+                    <a:gs pos="11000">
+                      <a:srgbClr val="FFFFFF">
+                        <a:alpha val="98823"/>
+                      </a:srgbClr>
+                    </a:gs>
+                    <a:gs pos="39000">
+                      <a:schemeClr val="lt1"/>
+                    </a:gs>
+                    <a:gs pos="52999">
+                      <a:srgbClr val="F7F7F7"/>
+                    </a:gs>
+                    <a:gs pos="100000">
+                      <a:srgbClr val="B8C0C0"/>
+                    </a:gs>
+                  </a:gsLst>
+                  <a:lin ang="2700000" scaled="0"/>
+                </a:gradFill>
+                <a:ln>
+                  <a:noFill/>
+                </a:ln>
+              </p:spPr>
+              <p:txBody>
+                <a:bodyPr spcFirstLastPara="1" wrap="square" lIns="91425" tIns="45700" rIns="91425" bIns="45700" anchor="ctr" anchorCtr="0">
+                  <a:noAutofit/>
+                </a:bodyPr>
+                <a:lstStyle/>
+                <a:p>
+                  <a:pPr marL="0" marR="0" lvl="0" indent="0" algn="l" rtl="0">
+                    <a:spcBef>
+                      <a:spcPts val="0"/>
+                    </a:spcBef>
+                    <a:spcAft>
+                      <a:spcPts val="0"/>
+                    </a:spcAft>
+                    <a:buNone/>
+                  </a:pPr>
+                  <a:endParaRPr sz="2800">
+                    <a:solidFill>
+                      <a:schemeClr val="lt1"/>
+                    </a:solidFill>
+                    <a:latin typeface="Arial"/>
+                    <a:ea typeface="Arial"/>
+                    <a:cs typeface="Arial"/>
+                    <a:sym typeface="Arial"/>
+                  </a:endParaRPr>
+                </a:p>
+              </p:txBody>
+            </p:sp>
+          </p:grpSp>
+          <p:sp>
+            <p:nvSpPr>
+              <p:cNvPr id="199" name="Google Shape;199;p5">
+                <a:extLst>
+                  <a:ext uri="{FF2B5EF4-FFF2-40B4-BE49-F238E27FC236}">
+                    <a16:creationId xmlns:a16="http://schemas.microsoft.com/office/drawing/2014/main" id="{57F30AB8-0A91-9B7C-2172-31F2FB535892}"/>
+                  </a:ext>
+                </a:extLst>
+              </p:cNvPr>
+              <p:cNvSpPr/>
+              <p:nvPr/>
+            </p:nvSpPr>
+            <p:spPr>
+              <a:xfrm>
+                <a:off x="3222820" y="1148080"/>
+                <a:ext cx="1284820" cy="1284821"/>
+              </a:xfrm>
+              <a:prstGeom prst="ellipse">
+                <a:avLst/>
+              </a:prstGeom>
+              <a:solidFill>
+                <a:schemeClr val="lt1">
+                  <a:alpha val="13725"/>
+                </a:schemeClr>
+              </a:solidFill>
+              <a:ln w="15875" cap="flat" cmpd="sng">
+                <a:solidFill>
+                  <a:schemeClr val="lt1"/>
+                </a:solidFill>
+                <a:prstDash val="solid"/>
+                <a:miter lim="800000"/>
+                <a:headEnd type="none" w="sm" len="sm"/>
+                <a:tailEnd type="none" w="sm" len="sm"/>
+              </a:ln>
+              <a:effectLst>
+                <a:outerShdw blurRad="215900" dist="88900" dir="2700000" algn="tl" rotWithShape="0">
+                  <a:srgbClr val="000000">
+                    <a:alpha val="10980"/>
+                  </a:srgbClr>
+                </a:outerShdw>
+              </a:effectLst>
+            </p:spPr>
+            <p:txBody>
+              <a:bodyPr spcFirstLastPara="1" wrap="square" lIns="91425" tIns="45700" rIns="91425" bIns="45700" anchor="ctr" anchorCtr="0">
+                <a:noAutofit/>
+              </a:bodyPr>
+              <a:lstStyle/>
+              <a:p>
+                <a:pPr marL="0" marR="0" lvl="0" indent="0" algn="l" rtl="0">
+                  <a:spcBef>
+                    <a:spcPts val="0"/>
+                  </a:spcBef>
+                  <a:spcAft>
+                    <a:spcPts val="0"/>
+                  </a:spcAft>
+                  <a:buNone/>
+                </a:pPr>
+                <a:endParaRPr sz="2800">
+                  <a:solidFill>
+                    <a:schemeClr val="lt1"/>
+                  </a:solidFill>
+                  <a:latin typeface="Arial"/>
+                  <a:ea typeface="Arial"/>
+                  <a:cs typeface="Arial"/>
+                  <a:sym typeface="Arial"/>
+                </a:endParaRPr>
+              </a:p>
+            </p:txBody>
+          </p:sp>
+        </p:grpSp>
+        <p:sp>
+          <p:nvSpPr>
+            <p:cNvPr id="200" name="Google Shape;200;p5">
+              <a:extLst>
+                <a:ext uri="{FF2B5EF4-FFF2-40B4-BE49-F238E27FC236}">
+                  <a16:creationId xmlns:a16="http://schemas.microsoft.com/office/drawing/2014/main" id="{B23B6BD0-DE90-54C9-1261-66C269F8C162}"/>
+                </a:ext>
+              </a:extLst>
+            </p:cNvPr>
+            <p:cNvSpPr txBox="1"/>
+            <p:nvPr/>
+          </p:nvSpPr>
+          <p:spPr>
+            <a:xfrm>
+              <a:off x="3514455" y="1292811"/>
+              <a:ext cx="774240" cy="720610"/>
+            </a:xfrm>
+            <a:prstGeom prst="rect">
+              <a:avLst/>
+            </a:prstGeom>
+            <a:noFill/>
+            <a:ln>
+              <a:noFill/>
+            </a:ln>
+          </p:spPr>
+          <p:txBody>
+            <a:bodyPr spcFirstLastPara="1" wrap="square" lIns="91425" tIns="45700" rIns="91425" bIns="45700" anchor="t" anchorCtr="0">
+              <a:spAutoFit/>
+            </a:bodyPr>
+            <a:lstStyle/>
+            <a:p>
+              <a:pPr marL="0" marR="0" lvl="0" indent="0" algn="l" rtl="0">
+                <a:spcBef>
+                  <a:spcPts val="0"/>
+                </a:spcBef>
+                <a:spcAft>
+                  <a:spcPts val="0"/>
+                </a:spcAft>
+                <a:buNone/>
+              </a:pPr>
+              <a:r>
+                <a:rPr lang="en-US" sz="2800" dirty="0">
+                  <a:solidFill>
+                    <a:srgbClr val="FFB850"/>
+                  </a:solidFill>
+                  <a:latin typeface="Impact"/>
+                  <a:ea typeface="Impact"/>
+                  <a:cs typeface="Impact"/>
+                  <a:sym typeface="Impact"/>
+                </a:rPr>
+                <a:t>03</a:t>
+              </a:r>
+              <a:endParaRPr sz="2800" dirty="0">
+                <a:solidFill>
+                  <a:srgbClr val="FFB850"/>
+                </a:solidFill>
+                <a:latin typeface="Impact"/>
+                <a:ea typeface="Impact"/>
+                <a:cs typeface="Impact"/>
+                <a:sym typeface="Impact"/>
+              </a:endParaRPr>
+            </a:p>
+          </p:txBody>
+        </p:sp>
+      </p:grpSp>
+      <p:sp>
+        <p:nvSpPr>
+          <p:cNvPr id="201" name="Google Shape;201;p5">
+            <a:extLst>
+              <a:ext uri="{FF2B5EF4-FFF2-40B4-BE49-F238E27FC236}">
+                <a16:creationId xmlns:a16="http://schemas.microsoft.com/office/drawing/2014/main" id="{19ED765A-C085-FEE8-622C-71292258D8EE}"/>
+              </a:ext>
+            </a:extLst>
+          </p:cNvPr>
+          <p:cNvSpPr txBox="1"/>
+          <p:nvPr/>
+        </p:nvSpPr>
+        <p:spPr>
+          <a:xfrm>
+            <a:off x="2980807" y="1521544"/>
+            <a:ext cx="6905838" cy="523220"/>
+          </a:xfrm>
+          <a:prstGeom prst="rect">
+            <a:avLst/>
+          </a:prstGeom>
+          <a:noFill/>
+          <a:ln>
+            <a:noFill/>
+          </a:ln>
+        </p:spPr>
+        <p:txBody>
+          <a:bodyPr spcFirstLastPara="1" wrap="square" lIns="91425" tIns="45700" rIns="91425" bIns="45700" anchor="t" anchorCtr="0">
+            <a:spAutoFit/>
+          </a:bodyPr>
+          <a:lstStyle/>
+          <a:p>
+            <a:pPr marL="0" marR="0" lvl="0" indent="0" algn="l" rtl="0">
+              <a:spcBef>
+                <a:spcPts val="0"/>
+              </a:spcBef>
+              <a:spcAft>
+                <a:spcPts val="0"/>
+              </a:spcAft>
+              <a:buNone/>
+            </a:pPr>
+            <a:r>
+              <a:rPr lang="en-US" sz="2800" b="1" dirty="0">
+                <a:solidFill>
+                  <a:schemeClr val="dk1"/>
+                </a:solidFill>
+                <a:latin typeface="Times New Roman"/>
+                <a:ea typeface="Times New Roman"/>
+                <a:cs typeface="Times New Roman"/>
+                <a:sym typeface="Times New Roman"/>
+              </a:rPr>
+              <a:t>Redis</a:t>
+            </a:r>
+            <a:endParaRPr sz="2800" b="1" dirty="0">
+              <a:solidFill>
+                <a:schemeClr val="dk1"/>
+              </a:solidFill>
+              <a:latin typeface="Times New Roman"/>
+              <a:ea typeface="Times New Roman"/>
+              <a:cs typeface="Times New Roman"/>
+              <a:sym typeface="Times New Roman"/>
+            </a:endParaRPr>
+          </a:p>
+        </p:txBody>
+      </p:sp>
+      <p:sp>
+        <p:nvSpPr>
+          <p:cNvPr id="202" name="Google Shape;202;p5">
+            <a:extLst>
+              <a:ext uri="{FF2B5EF4-FFF2-40B4-BE49-F238E27FC236}">
+                <a16:creationId xmlns:a16="http://schemas.microsoft.com/office/drawing/2014/main" id="{CABFB5F9-45A6-F528-463B-AD5714B742AA}"/>
+              </a:ext>
+            </a:extLst>
+          </p:cNvPr>
+          <p:cNvSpPr/>
+          <p:nvPr/>
+        </p:nvSpPr>
+        <p:spPr>
+          <a:xfrm>
+            <a:off x="1670730" y="2505849"/>
+            <a:ext cx="9367384" cy="3437751"/>
+          </a:xfrm>
+          <a:prstGeom prst="rect">
+            <a:avLst/>
+          </a:prstGeom>
+          <a:solidFill>
+            <a:schemeClr val="lt1"/>
+          </a:solidFill>
+          <a:ln w="12700" cap="flat" cmpd="sng">
+            <a:solidFill>
+              <a:schemeClr val="accent4"/>
+            </a:solidFill>
+            <a:prstDash val="solid"/>
+            <a:miter lim="800000"/>
+            <a:headEnd type="none" w="sm" len="sm"/>
+            <a:tailEnd type="none" w="sm" len="sm"/>
+          </a:ln>
+        </p:spPr>
+        <p:txBody>
+          <a:bodyPr spcFirstLastPara="1" wrap="square" lIns="91425" tIns="45700" rIns="91425" bIns="45700" anchor="t" anchorCtr="0">
+            <a:noAutofit/>
+          </a:bodyPr>
+          <a:lstStyle/>
+          <a:p>
+            <a:pPr marL="0" marR="0" lvl="0" indent="0" algn="l" rtl="0">
+              <a:spcBef>
+                <a:spcPts val="0"/>
+              </a:spcBef>
+              <a:spcAft>
+                <a:spcPts val="0"/>
+              </a:spcAft>
+              <a:buNone/>
+            </a:pPr>
+            <a:r>
+              <a:rPr lang="vi-VN" sz="2800" b="0" i="0" dirty="0">
+                <a:solidFill>
+                  <a:srgbClr val="222222"/>
+                </a:solidFill>
+                <a:effectLst/>
+                <a:latin typeface="Times New Roman" panose="02020603050405020304" pitchFamily="18" charset="0"/>
+                <a:cs typeface="Times New Roman" panose="02020603050405020304" pitchFamily="18" charset="0"/>
+              </a:rPr>
+              <a:t>Redis là một hệ thống lưu trữ dữ liệu trên bộ nhớ (in-memory), hoạt động như một cơ sở dữ liệu NoSQL, cache, và message broker.</a:t>
+            </a:r>
+            <a:endParaRPr lang="vi-VN" sz="2800" dirty="0">
+              <a:solidFill>
+                <a:schemeClr val="dk1"/>
+              </a:solidFill>
+              <a:latin typeface="Times New Roman" panose="02020603050405020304" pitchFamily="18" charset="0"/>
+              <a:ea typeface="Times New Roman"/>
+              <a:cs typeface="Times New Roman" panose="02020603050405020304" pitchFamily="18" charset="0"/>
+              <a:sym typeface="Times New Roman"/>
+            </a:endParaRPr>
+          </a:p>
+        </p:txBody>
+      </p:sp>
+    </p:spTree>
+    <p:extLst>
+      <p:ext uri="{BB962C8B-B14F-4D97-AF65-F5344CB8AC3E}">
+        <p14:creationId xmlns:p14="http://schemas.microsoft.com/office/powerpoint/2010/main" val="3280029736"/>
+      </p:ext>
+    </p:extLst>
+  </p:cSld>
+  <p:clrMapOvr>
+    <a:masterClrMapping/>
+  </p:clrMapOvr>
+  <mc:AlternateContent xmlns:mc="http://schemas.openxmlformats.org/markup-compatibility/2006">
+    <mc:Choice xmlns:p14="http://schemas.microsoft.com/office/powerpoint/2010/main" Requires="p14">
+      <p:transition spd="med" p14:dur="700">
+        <p:fade/>
+      </p:transition>
+    </mc:Choice>
+    <mc:Fallback>
+      <p:transition spd="med">
+        <p:fade/>
+      </p:transition>
+    </mc:Fallback>
+  </mc:AlternateContent>
+  <p:timing>
+    <p:tnLst>
+      <p:par>
+        <p:cTn id="1" dur="indefinite" restart="never" nodeType="tmRoot">
+          <p:childTnLst>
+            <p:seq concurrent="1" nextAc="seek">
+              <p:cTn id="2" dur="indefinite" nodeType="mainSeq">
+                <p:childTnLst>
+                  <p:par>
+                    <p:cTn id="3" fill="hold">
+                      <p:stCondLst>
+                        <p:cond delay="indefinite"/>
+                        <p:cond evt="onBegin" delay="0">
+                          <p:tn val="2"/>
+                        </p:cond>
+                      </p:stCondLst>
+                      <p:childTnLst>
+                        <p:par>
+                          <p:cTn id="4" fill="hold">
+                            <p:stCondLst>
+                              <p:cond delay="0"/>
+                            </p:stCondLst>
+                            <p:childTnLst>
+                              <p:par>
+                                <p:cTn id="5" presetID="2" presetClass="entr" presetSubtype="8" fill="hold" nodeType="withEffect">
+                                  <p:stCondLst>
+                                    <p:cond delay="0"/>
+                                  </p:stCondLst>
+                                  <p:childTnLst>
+                                    <p:set>
+                                      <p:cBhvr>
+                                        <p:cTn id="6" dur="1" fill="hold">
+                                          <p:stCondLst>
+                                            <p:cond delay="0"/>
+                                          </p:stCondLst>
+                                        </p:cTn>
+                                        <p:tgtEl>
+                                          <p:spTgt spid="193"/>
+                                        </p:tgtEl>
+                                        <p:attrNameLst>
+                                          <p:attrName>style.visibility</p:attrName>
+                                        </p:attrNameLst>
+                                      </p:cBhvr>
+                                      <p:to>
+                                        <p:strVal val="visible"/>
+                                      </p:to>
+                                    </p:set>
+                                    <p:anim calcmode="lin" valueType="num">
+                                      <p:cBhvr additive="base">
+                                        <p:cTn id="7" dur="500"/>
+                                        <p:tgtEl>
+                                          <p:spTgt spid="193"/>
+                                        </p:tgtEl>
+                                        <p:attrNameLst>
+                                          <p:attrName>ppt_x</p:attrName>
+                                        </p:attrNameLst>
+                                      </p:cBhvr>
+                                      <p:tavLst>
+                                        <p:tav tm="0">
+                                          <p:val>
+                                            <p:strVal val="#ppt_x-1"/>
+                                          </p:val>
+                                        </p:tav>
+                                        <p:tav tm="100000">
+                                          <p:val>
+                                            <p:strVal val="#ppt_x"/>
+                                          </p:val>
+                                        </p:tav>
+                                      </p:tavLst>
+                                    </p:anim>
+                                  </p:childTnLst>
+                                </p:cTn>
+                              </p:par>
+                              <p:par>
+                                <p:cTn id="8" presetID="2" presetClass="entr" presetSubtype="2" fill="hold" nodeType="withEffect">
+                                  <p:stCondLst>
+                                    <p:cond delay="0"/>
+                                  </p:stCondLst>
+                                  <p:childTnLst>
+                                    <p:set>
+                                      <p:cBhvr>
+                                        <p:cTn id="9" dur="1" fill="hold">
+                                          <p:stCondLst>
+                                            <p:cond delay="0"/>
+                                          </p:stCondLst>
+                                        </p:cTn>
+                                        <p:tgtEl>
+                                          <p:spTgt spid="190"/>
+                                        </p:tgtEl>
+                                        <p:attrNameLst>
+                                          <p:attrName>style.visibility</p:attrName>
+                                        </p:attrNameLst>
+                                      </p:cBhvr>
+                                      <p:to>
+                                        <p:strVal val="visible"/>
+                                      </p:to>
+                                    </p:set>
+                                    <p:anim calcmode="lin" valueType="num">
+                                      <p:cBhvr additive="base">
+                                        <p:cTn id="10" dur="500"/>
+                                        <p:tgtEl>
+                                          <p:spTgt spid="190"/>
+                                        </p:tgtEl>
+                                        <p:attrNameLst>
+                                          <p:attrName>ppt_x</p:attrName>
+                                        </p:attrNameLst>
+                                      </p:cBhvr>
+                                      <p:tavLst>
+                                        <p:tav tm="0">
+                                          <p:val>
+                                            <p:strVal val="#ppt_x+1"/>
+                                          </p:val>
+                                        </p:tav>
+                                        <p:tav tm="100000">
+                                          <p:val>
+                                            <p:strVal val="#ppt_x"/>
+                                          </p:val>
+                                        </p:tav>
+                                      </p:tavLst>
+                                    </p:anim>
+                                  </p:childTnLst>
+                                </p:cTn>
+                              </p:par>
+                            </p:childTnLst>
+                          </p:cTn>
+                        </p:par>
+                      </p:childTnLst>
+                    </p:cTn>
+                  </p:par>
+                </p:childTnLst>
+              </p:cTn>
+              <p:prevCondLst>
+                <p:cond evt="onPrev" delay="0">
+                  <p:tgtEl>
+                    <p:sldTgt/>
+                  </p:tgtEl>
+                </p:cond>
+              </p:prevCondLst>
+              <p:nextCondLst>
+                <p:cond evt="onNext" delay="0">
+                  <p:tgtEl>
+                    <p:sldTgt/>
+                  </p:tgtEl>
+                </p:cond>
+              </p:nextCondLst>
+            </p:seq>
+          </p:childTnLst>
+        </p:cTn>
+      </p:par>
+    </p:tnLst>
+  </p:timing>
+</p:sld>
+</file>
+
+<file path=ppt/slides/slide8.xml><?xml version="1.0" encoding="utf-8"?>
+<p:sld xmlns:a="http://schemas.openxmlformats.org/drawingml/2006/main" xmlns:r="http://schemas.openxmlformats.org/officeDocument/2006/relationships" xmlns:p="http://schemas.openxmlformats.org/presentationml/2006/main">
+  <p:cSld>
+    <p:spTree>
+      <p:nvGrpSpPr>
+        <p:cNvPr id="1" name="Shape 186">
+          <a:extLst>
+            <a:ext uri="{FF2B5EF4-FFF2-40B4-BE49-F238E27FC236}">
+              <a16:creationId xmlns:a16="http://schemas.microsoft.com/office/drawing/2014/main" id="{A59A5B5F-56AC-0130-0CDB-9D9634221A92}"/>
+            </a:ext>
+          </a:extLst>
+        </p:cNvPr>
+        <p:cNvGrpSpPr/>
+        <p:nvPr/>
+      </p:nvGrpSpPr>
+      <p:grpSpPr>
+        <a:xfrm>
+          <a:off x="0" y="0"/>
+          <a:ext cx="0" cy="0"/>
+          <a:chOff x="0" y="0"/>
+          <a:chExt cx="0" cy="0"/>
+        </a:xfrm>
+      </p:grpSpPr>
+      <p:grpSp>
+        <p:nvGrpSpPr>
+          <p:cNvPr id="190" name="Google Shape;190;p5">
+            <a:extLst>
+              <a:ext uri="{FF2B5EF4-FFF2-40B4-BE49-F238E27FC236}">
+                <a16:creationId xmlns:a16="http://schemas.microsoft.com/office/drawing/2014/main" id="{0CDFB56B-16B2-9BF7-A036-AB4322070EC3}"/>
+              </a:ext>
+            </a:extLst>
+          </p:cNvPr>
+          <p:cNvGrpSpPr/>
+          <p:nvPr/>
+        </p:nvGrpSpPr>
+        <p:grpSpPr>
+          <a:xfrm>
+            <a:off x="1670730" y="1263299"/>
+            <a:ext cx="8616270" cy="1007332"/>
+            <a:chOff x="3129129" y="1121776"/>
+            <a:chExt cx="5933741" cy="1171624"/>
+          </a:xfrm>
+        </p:grpSpPr>
+        <p:sp>
+          <p:nvSpPr>
+            <p:cNvPr id="191" name="Google Shape;191;p5">
+              <a:extLst>
+                <a:ext uri="{FF2B5EF4-FFF2-40B4-BE49-F238E27FC236}">
+                  <a16:creationId xmlns:a16="http://schemas.microsoft.com/office/drawing/2014/main" id="{264A509C-AD54-1C47-C6BB-93792AB71F33}"/>
+                </a:ext>
+              </a:extLst>
+            </p:cNvPr>
+            <p:cNvSpPr/>
+            <p:nvPr/>
+          </p:nvSpPr>
+          <p:spPr>
+            <a:xfrm>
+              <a:off x="3129129" y="1121776"/>
+              <a:ext cx="5933741" cy="1171624"/>
+            </a:xfrm>
+            <a:prstGeom prst="roundRect">
+              <a:avLst>
+                <a:gd name="adj" fmla="val 50000"/>
+              </a:avLst>
+            </a:prstGeom>
+            <a:solidFill>
+              <a:srgbClr val="D8D8D8">
+                <a:alpha val="49803"/>
+              </a:srgbClr>
+            </a:solidFill>
+            <a:ln>
+              <a:noFill/>
+            </a:ln>
+          </p:spPr>
+          <p:txBody>
+            <a:bodyPr spcFirstLastPara="1" wrap="square" lIns="91425" tIns="45700" rIns="91425" bIns="45700" anchor="ctr" anchorCtr="0">
+              <a:noAutofit/>
+            </a:bodyPr>
+            <a:lstStyle/>
+            <a:p>
+              <a:pPr marL="0" marR="0" lvl="0" indent="0" algn="l" rtl="0">
+                <a:spcBef>
+                  <a:spcPts val="0"/>
+                </a:spcBef>
+                <a:spcAft>
+                  <a:spcPts val="0"/>
+                </a:spcAft>
+                <a:buNone/>
+              </a:pPr>
+              <a:endParaRPr sz="2800">
+                <a:solidFill>
+                  <a:srgbClr val="FFAA2D"/>
+                </a:solidFill>
+                <a:latin typeface="Arial"/>
+                <a:ea typeface="Arial"/>
+                <a:cs typeface="Arial"/>
+                <a:sym typeface="Arial"/>
+              </a:endParaRPr>
+            </a:p>
+          </p:txBody>
+        </p:sp>
+        <p:sp>
+          <p:nvSpPr>
+            <p:cNvPr id="192" name="Google Shape;192;p5">
+              <a:extLst>
+                <a:ext uri="{FF2B5EF4-FFF2-40B4-BE49-F238E27FC236}">
+                  <a16:creationId xmlns:a16="http://schemas.microsoft.com/office/drawing/2014/main" id="{8F217973-C26F-D39B-2546-33B3408F7490}"/>
+                </a:ext>
+              </a:extLst>
+            </p:cNvPr>
+            <p:cNvSpPr/>
+            <p:nvPr/>
+          </p:nvSpPr>
+          <p:spPr>
+            <a:xfrm>
+              <a:off x="3289330" y="1253414"/>
+              <a:ext cx="5613340" cy="908350"/>
+            </a:xfrm>
+            <a:prstGeom prst="roundRect">
+              <a:avLst>
+                <a:gd name="adj" fmla="val 50000"/>
+              </a:avLst>
+            </a:prstGeom>
+            <a:gradFill>
+              <a:gsLst>
+                <a:gs pos="0">
+                  <a:srgbClr val="FFAA2D"/>
+                </a:gs>
+                <a:gs pos="100000">
+                  <a:srgbClr val="FFD393"/>
+                </a:gs>
+              </a:gsLst>
+              <a:lin ang="0" scaled="0"/>
+            </a:gradFill>
+            <a:ln w="19050" cap="flat" cmpd="sng">
+              <a:solidFill>
+                <a:srgbClr val="BFBFBF"/>
+              </a:solidFill>
+              <a:prstDash val="solid"/>
+              <a:miter lim="800000"/>
+              <a:headEnd type="none" w="sm" len="sm"/>
+              <a:tailEnd type="none" w="sm" len="sm"/>
+            </a:ln>
+          </p:spPr>
+          <p:txBody>
+            <a:bodyPr spcFirstLastPara="1" wrap="square" lIns="91425" tIns="45700" rIns="91425" bIns="45700" anchor="ctr" anchorCtr="0">
+              <a:noAutofit/>
+            </a:bodyPr>
+            <a:lstStyle/>
+            <a:p>
+              <a:pPr marL="0" marR="0" lvl="0" indent="0" algn="l" rtl="0">
+                <a:spcBef>
+                  <a:spcPts val="0"/>
+                </a:spcBef>
+                <a:spcAft>
+                  <a:spcPts val="0"/>
+                </a:spcAft>
+                <a:buNone/>
+              </a:pPr>
+              <a:endParaRPr sz="2800">
+                <a:solidFill>
+                  <a:srgbClr val="FFAA2D"/>
+                </a:solidFill>
+                <a:latin typeface="Arial"/>
+                <a:ea typeface="Arial"/>
+                <a:cs typeface="Arial"/>
+                <a:sym typeface="Arial"/>
+              </a:endParaRPr>
+            </a:p>
+          </p:txBody>
+        </p:sp>
+      </p:grpSp>
+      <p:grpSp>
+        <p:nvGrpSpPr>
+          <p:cNvPr id="193" name="Google Shape;193;p5">
+            <a:extLst>
+              <a:ext uri="{FF2B5EF4-FFF2-40B4-BE49-F238E27FC236}">
+                <a16:creationId xmlns:a16="http://schemas.microsoft.com/office/drawing/2014/main" id="{618159CA-8F07-3E31-656F-961BDB488EE5}"/>
+              </a:ext>
+            </a:extLst>
+          </p:cNvPr>
+          <p:cNvGrpSpPr/>
+          <p:nvPr/>
+        </p:nvGrpSpPr>
+        <p:grpSpPr>
+          <a:xfrm>
+            <a:off x="1782659" y="1240148"/>
+            <a:ext cx="1674310" cy="1522886"/>
+            <a:chOff x="3020983" y="881796"/>
+            <a:chExt cx="2097410" cy="2097410"/>
+          </a:xfrm>
+        </p:grpSpPr>
+        <p:grpSp>
+          <p:nvGrpSpPr>
+            <p:cNvPr id="194" name="Google Shape;194;p5">
+              <a:extLst>
+                <a:ext uri="{FF2B5EF4-FFF2-40B4-BE49-F238E27FC236}">
+                  <a16:creationId xmlns:a16="http://schemas.microsoft.com/office/drawing/2014/main" id="{945A5E4E-9A56-59F0-71E6-B66D86B6CDAD}"/>
+                </a:ext>
+              </a:extLst>
+            </p:cNvPr>
+            <p:cNvGrpSpPr/>
+            <p:nvPr/>
+          </p:nvGrpSpPr>
+          <p:grpSpPr>
+            <a:xfrm>
+              <a:off x="3020983" y="881796"/>
+              <a:ext cx="2097410" cy="2097410"/>
+              <a:chOff x="3099689" y="1098878"/>
+              <a:chExt cx="1995612" cy="1995615"/>
+            </a:xfrm>
+          </p:grpSpPr>
+          <p:grpSp>
+            <p:nvGrpSpPr>
+              <p:cNvPr id="195" name="Google Shape;195;p5">
+                <a:extLst>
+                  <a:ext uri="{FF2B5EF4-FFF2-40B4-BE49-F238E27FC236}">
+                    <a16:creationId xmlns:a16="http://schemas.microsoft.com/office/drawing/2014/main" id="{0B5EFDF3-31B4-40C0-4DBB-C06779D345F4}"/>
+                  </a:ext>
+                </a:extLst>
+              </p:cNvPr>
+              <p:cNvGrpSpPr/>
+              <p:nvPr/>
+            </p:nvGrpSpPr>
+            <p:grpSpPr>
+              <a:xfrm>
+                <a:off x="3099689" y="1098878"/>
+                <a:ext cx="1995612" cy="1995615"/>
+                <a:chOff x="6804316" y="2574806"/>
+                <a:chExt cx="3585705" cy="3585705"/>
+              </a:xfrm>
+            </p:grpSpPr>
+            <p:sp>
+              <p:nvSpPr>
+                <p:cNvPr id="196" name="Google Shape;196;p5">
+                  <a:extLst>
+                    <a:ext uri="{FF2B5EF4-FFF2-40B4-BE49-F238E27FC236}">
+                      <a16:creationId xmlns:a16="http://schemas.microsoft.com/office/drawing/2014/main" id="{B5677C63-2B8F-8602-62C2-2DD72E0F17C3}"/>
+                    </a:ext>
+                  </a:extLst>
+                </p:cNvPr>
+                <p:cNvSpPr/>
+                <p:nvPr/>
+              </p:nvSpPr>
+              <p:spPr>
+                <a:xfrm rot="-2700000">
+                  <a:off x="7501948" y="2927402"/>
+                  <a:ext cx="2190440" cy="2880512"/>
+                </a:xfrm>
+                <a:custGeom>
+                  <a:avLst/>
+                  <a:gdLst/>
+                  <a:ahLst/>
+                  <a:cxnLst/>
+                  <a:rect l="l" t="t" r="r" b="b"/>
+                  <a:pathLst>
+                    <a:path w="1696474" h="2070736" extrusionOk="0">
+                      <a:moveTo>
+                        <a:pt x="13249" y="1035368"/>
+                      </a:moveTo>
+                      <a:cubicBezTo>
+                        <a:pt x="112309" y="471170"/>
+                        <a:pt x="388098" y="0"/>
+                        <a:pt x="850497" y="0"/>
+                      </a:cubicBezTo>
+                      <a:cubicBezTo>
+                        <a:pt x="1312896" y="0"/>
+                        <a:pt x="1611545" y="478790"/>
+                        <a:pt x="1687745" y="1035368"/>
+                      </a:cubicBezTo>
+                      <a:cubicBezTo>
+                        <a:pt x="1765308" y="1601901"/>
+                        <a:pt x="1312896" y="2070736"/>
+                        <a:pt x="850497" y="2070736"/>
+                      </a:cubicBezTo>
+                      <a:cubicBezTo>
+                        <a:pt x="388098" y="2070736"/>
+                        <a:pt x="-85811" y="1599566"/>
+                        <a:pt x="13249" y="1035368"/>
+                      </a:cubicBezTo>
+                      <a:close/>
+                    </a:path>
+                  </a:pathLst>
+                </a:custGeom>
+                <a:gradFill>
+                  <a:gsLst>
+                    <a:gs pos="0">
+                      <a:schemeClr val="dk1"/>
+                    </a:gs>
+                    <a:gs pos="17000">
+                      <a:srgbClr val="000000">
+                        <a:alpha val="45882"/>
+                      </a:srgbClr>
+                    </a:gs>
+                    <a:gs pos="34000">
+                      <a:srgbClr val="000000">
+                        <a:alpha val="42745"/>
+                      </a:srgbClr>
+                    </a:gs>
+                    <a:gs pos="51000">
+                      <a:srgbClr val="000000">
+                        <a:alpha val="20000"/>
+                      </a:srgbClr>
+                    </a:gs>
+                    <a:gs pos="65000">
+                      <a:srgbClr val="000000">
+                        <a:alpha val="9803"/>
+                      </a:srgbClr>
+                    </a:gs>
+                    <a:gs pos="78000">
+                      <a:srgbClr val="000000">
+                        <a:alpha val="4705"/>
+                      </a:srgbClr>
+                    </a:gs>
+                    <a:gs pos="100000">
+                      <a:srgbClr val="000000">
+                        <a:alpha val="0"/>
+                      </a:srgbClr>
+                    </a:gs>
+                  </a:gsLst>
+                  <a:lin ang="5400000" scaled="0"/>
+                </a:gradFill>
+                <a:ln>
+                  <a:noFill/>
+                </a:ln>
+              </p:spPr>
+              <p:txBody>
+                <a:bodyPr spcFirstLastPara="1" wrap="square" lIns="91425" tIns="45700" rIns="91425" bIns="45700" anchor="ctr" anchorCtr="0">
+                  <a:noAutofit/>
+                </a:bodyPr>
+                <a:lstStyle/>
+                <a:p>
+                  <a:pPr marL="0" marR="0" lvl="0" indent="0" algn="l" rtl="0">
+                    <a:spcBef>
+                      <a:spcPts val="0"/>
+                    </a:spcBef>
+                    <a:spcAft>
+                      <a:spcPts val="0"/>
+                    </a:spcAft>
+                    <a:buNone/>
+                  </a:pPr>
+                  <a:endParaRPr sz="2800">
+                    <a:solidFill>
+                      <a:schemeClr val="lt1"/>
+                    </a:solidFill>
+                    <a:latin typeface="Arial"/>
+                    <a:ea typeface="Arial"/>
+                    <a:cs typeface="Arial"/>
+                    <a:sym typeface="Arial"/>
+                  </a:endParaRPr>
+                </a:p>
+              </p:txBody>
+            </p:sp>
+            <p:sp>
+              <p:nvSpPr>
+                <p:cNvPr id="197" name="Google Shape;197;p5">
+                  <a:extLst>
+                    <a:ext uri="{FF2B5EF4-FFF2-40B4-BE49-F238E27FC236}">
+                      <a16:creationId xmlns:a16="http://schemas.microsoft.com/office/drawing/2014/main" id="{4E6C4FE4-2FD3-358F-C5B8-14704BBEEEF9}"/>
+                    </a:ext>
+                  </a:extLst>
+                </p:cNvPr>
+                <p:cNvSpPr/>
+                <p:nvPr/>
+              </p:nvSpPr>
+              <p:spPr>
+                <a:xfrm>
+                  <a:off x="7567583" y="3243359"/>
+                  <a:ext cx="1344545" cy="1344543"/>
+                </a:xfrm>
+                <a:prstGeom prst="ellipse">
+                  <a:avLst/>
+                </a:prstGeom>
+                <a:gradFill>
+                  <a:gsLst>
+                    <a:gs pos="0">
+                      <a:srgbClr val="FFFFFF">
+                        <a:alpha val="98823"/>
+                      </a:srgbClr>
+                    </a:gs>
+                    <a:gs pos="43000">
+                      <a:srgbClr val="F7F7F7"/>
+                    </a:gs>
+                    <a:gs pos="100000">
+                      <a:srgbClr val="B8C0C0"/>
+                    </a:gs>
+                  </a:gsLst>
+                  <a:lin ang="2700000" scaled="0"/>
+                </a:gradFill>
+                <a:ln>
+                  <a:noFill/>
+                </a:ln>
+                <a:effectLst>
+                  <a:outerShdw blurRad="139700" dist="88900" dir="2700000" algn="tl" rotWithShape="0">
+                    <a:srgbClr val="494949">
+                      <a:alpha val="29803"/>
+                    </a:srgbClr>
+                  </a:outerShdw>
+                </a:effectLst>
+              </p:spPr>
+              <p:txBody>
+                <a:bodyPr spcFirstLastPara="1" wrap="square" lIns="91425" tIns="45700" rIns="91425" bIns="45700" anchor="ctr" anchorCtr="0">
+                  <a:noAutofit/>
+                </a:bodyPr>
+                <a:lstStyle/>
+                <a:p>
+                  <a:pPr marL="0" marR="0" lvl="0" indent="0" algn="l" rtl="0">
+                    <a:spcBef>
+                      <a:spcPts val="0"/>
+                    </a:spcBef>
+                    <a:spcAft>
+                      <a:spcPts val="0"/>
+                    </a:spcAft>
+                    <a:buNone/>
+                  </a:pPr>
+                  <a:endParaRPr sz="2800">
+                    <a:solidFill>
+                      <a:schemeClr val="lt1"/>
+                    </a:solidFill>
+                    <a:latin typeface="Arial"/>
+                    <a:ea typeface="Arial"/>
+                    <a:cs typeface="Arial"/>
+                    <a:sym typeface="Arial"/>
+                  </a:endParaRPr>
+                </a:p>
+              </p:txBody>
+            </p:sp>
+            <p:sp>
+              <p:nvSpPr>
+                <p:cNvPr id="198" name="Google Shape;198;p5">
+                  <a:extLst>
+                    <a:ext uri="{FF2B5EF4-FFF2-40B4-BE49-F238E27FC236}">
+                      <a16:creationId xmlns:a16="http://schemas.microsoft.com/office/drawing/2014/main" id="{4185A41B-33D8-4945-62F5-9A8C4B9BF2E6}"/>
+                    </a:ext>
+                  </a:extLst>
+                </p:cNvPr>
+                <p:cNvSpPr/>
+                <p:nvPr/>
+              </p:nvSpPr>
+              <p:spPr>
+                <a:xfrm>
+                  <a:off x="7380501" y="3019185"/>
+                  <a:ext cx="1596494" cy="1596494"/>
+                </a:xfrm>
+                <a:prstGeom prst="ellipse">
+                  <a:avLst/>
+                </a:prstGeom>
+                <a:gradFill>
+                  <a:gsLst>
+                    <a:gs pos="0">
+                      <a:srgbClr val="FFFFFF">
+                        <a:alpha val="98823"/>
+                      </a:srgbClr>
+                    </a:gs>
+                    <a:gs pos="11000">
+                      <a:srgbClr val="FFFFFF">
+                        <a:alpha val="98823"/>
+                      </a:srgbClr>
+                    </a:gs>
+                    <a:gs pos="39000">
+                      <a:schemeClr val="lt1"/>
+                    </a:gs>
+                    <a:gs pos="52999">
+                      <a:srgbClr val="F7F7F7"/>
+                    </a:gs>
+                    <a:gs pos="100000">
+                      <a:srgbClr val="B8C0C0"/>
+                    </a:gs>
+                  </a:gsLst>
+                  <a:lin ang="2700000" scaled="0"/>
+                </a:gradFill>
+                <a:ln>
+                  <a:noFill/>
+                </a:ln>
+              </p:spPr>
+              <p:txBody>
+                <a:bodyPr spcFirstLastPara="1" wrap="square" lIns="91425" tIns="45700" rIns="91425" bIns="45700" anchor="ctr" anchorCtr="0">
+                  <a:noAutofit/>
+                </a:bodyPr>
+                <a:lstStyle/>
+                <a:p>
+                  <a:pPr marL="0" marR="0" lvl="0" indent="0" algn="l" rtl="0">
+                    <a:spcBef>
+                      <a:spcPts val="0"/>
+                    </a:spcBef>
+                    <a:spcAft>
+                      <a:spcPts val="0"/>
+                    </a:spcAft>
+                    <a:buNone/>
+                  </a:pPr>
+                  <a:endParaRPr sz="2800">
+                    <a:solidFill>
+                      <a:schemeClr val="lt1"/>
+                    </a:solidFill>
+                    <a:latin typeface="Arial"/>
+                    <a:ea typeface="Arial"/>
+                    <a:cs typeface="Arial"/>
+                    <a:sym typeface="Arial"/>
+                  </a:endParaRPr>
+                </a:p>
+              </p:txBody>
+            </p:sp>
+          </p:grpSp>
+          <p:sp>
+            <p:nvSpPr>
+              <p:cNvPr id="199" name="Google Shape;199;p5">
+                <a:extLst>
+                  <a:ext uri="{FF2B5EF4-FFF2-40B4-BE49-F238E27FC236}">
+                    <a16:creationId xmlns:a16="http://schemas.microsoft.com/office/drawing/2014/main" id="{527924A3-96AA-20DE-4296-849CCEF14999}"/>
+                  </a:ext>
+                </a:extLst>
+              </p:cNvPr>
+              <p:cNvSpPr/>
+              <p:nvPr/>
+            </p:nvSpPr>
+            <p:spPr>
+              <a:xfrm>
+                <a:off x="3222820" y="1148080"/>
+                <a:ext cx="1284820" cy="1284821"/>
+              </a:xfrm>
+              <a:prstGeom prst="ellipse">
+                <a:avLst/>
+              </a:prstGeom>
+              <a:solidFill>
+                <a:schemeClr val="lt1">
+                  <a:alpha val="13725"/>
+                </a:schemeClr>
+              </a:solidFill>
+              <a:ln w="15875" cap="flat" cmpd="sng">
+                <a:solidFill>
+                  <a:schemeClr val="lt1"/>
+                </a:solidFill>
+                <a:prstDash val="solid"/>
+                <a:miter lim="800000"/>
+                <a:headEnd type="none" w="sm" len="sm"/>
+                <a:tailEnd type="none" w="sm" len="sm"/>
+              </a:ln>
+              <a:effectLst>
+                <a:outerShdw blurRad="215900" dist="88900" dir="2700000" algn="tl" rotWithShape="0">
+                  <a:srgbClr val="000000">
+                    <a:alpha val="10980"/>
+                  </a:srgbClr>
+                </a:outerShdw>
+              </a:effectLst>
+            </p:spPr>
+            <p:txBody>
+              <a:bodyPr spcFirstLastPara="1" wrap="square" lIns="91425" tIns="45700" rIns="91425" bIns="45700" anchor="ctr" anchorCtr="0">
+                <a:noAutofit/>
+              </a:bodyPr>
+              <a:lstStyle/>
+              <a:p>
+                <a:pPr marL="0" marR="0" lvl="0" indent="0" algn="l" rtl="0">
+                  <a:spcBef>
+                    <a:spcPts val="0"/>
+                  </a:spcBef>
+                  <a:spcAft>
+                    <a:spcPts val="0"/>
+                  </a:spcAft>
+                  <a:buNone/>
+                </a:pPr>
+                <a:endParaRPr sz="2800">
+                  <a:solidFill>
+                    <a:schemeClr val="lt1"/>
+                  </a:solidFill>
+                  <a:latin typeface="Arial"/>
+                  <a:ea typeface="Arial"/>
+                  <a:cs typeface="Arial"/>
+                  <a:sym typeface="Arial"/>
+                </a:endParaRPr>
+              </a:p>
+            </p:txBody>
+          </p:sp>
+        </p:grpSp>
+        <p:sp>
+          <p:nvSpPr>
+            <p:cNvPr id="200" name="Google Shape;200;p5">
+              <a:extLst>
+                <a:ext uri="{FF2B5EF4-FFF2-40B4-BE49-F238E27FC236}">
+                  <a16:creationId xmlns:a16="http://schemas.microsoft.com/office/drawing/2014/main" id="{7A235DF0-03F8-8E4D-A7CA-D9D07D425A36}"/>
+                </a:ext>
+              </a:extLst>
+            </p:cNvPr>
+            <p:cNvSpPr txBox="1"/>
+            <p:nvPr/>
+          </p:nvSpPr>
+          <p:spPr>
+            <a:xfrm>
+              <a:off x="3514455" y="1292811"/>
+              <a:ext cx="774240" cy="720610"/>
+            </a:xfrm>
+            <a:prstGeom prst="rect">
+              <a:avLst/>
+            </a:prstGeom>
+            <a:noFill/>
+            <a:ln>
+              <a:noFill/>
+            </a:ln>
+          </p:spPr>
+          <p:txBody>
+            <a:bodyPr spcFirstLastPara="1" wrap="square" lIns="91425" tIns="45700" rIns="91425" bIns="45700" anchor="t" anchorCtr="0">
+              <a:spAutoFit/>
+            </a:bodyPr>
+            <a:lstStyle/>
+            <a:p>
+              <a:pPr marL="0" marR="0" lvl="0" indent="0" algn="l" rtl="0">
+                <a:spcBef>
+                  <a:spcPts val="0"/>
+                </a:spcBef>
+                <a:spcAft>
+                  <a:spcPts val="0"/>
+                </a:spcAft>
+                <a:buNone/>
+              </a:pPr>
+              <a:r>
+                <a:rPr lang="en-US" sz="2800" dirty="0">
+                  <a:solidFill>
+                    <a:srgbClr val="FFB850"/>
+                  </a:solidFill>
+                  <a:latin typeface="Impact"/>
+                  <a:ea typeface="Impact"/>
+                  <a:cs typeface="Impact"/>
+                  <a:sym typeface="Impact"/>
+                </a:rPr>
+                <a:t>04</a:t>
+              </a:r>
+              <a:endParaRPr sz="2800" dirty="0">
+                <a:solidFill>
+                  <a:srgbClr val="FFB850"/>
+                </a:solidFill>
+                <a:latin typeface="Impact"/>
+                <a:ea typeface="Impact"/>
+                <a:cs typeface="Impact"/>
+                <a:sym typeface="Impact"/>
+              </a:endParaRPr>
+            </a:p>
+          </p:txBody>
+        </p:sp>
+      </p:grpSp>
+      <p:sp>
+        <p:nvSpPr>
+          <p:cNvPr id="201" name="Google Shape;201;p5">
+            <a:extLst>
+              <a:ext uri="{FF2B5EF4-FFF2-40B4-BE49-F238E27FC236}">
+                <a16:creationId xmlns:a16="http://schemas.microsoft.com/office/drawing/2014/main" id="{E34181FE-9640-9F72-6E2A-9E41C7E6BB97}"/>
+              </a:ext>
+            </a:extLst>
+          </p:cNvPr>
+          <p:cNvSpPr txBox="1"/>
+          <p:nvPr/>
+        </p:nvSpPr>
+        <p:spPr>
+          <a:xfrm>
+            <a:off x="2980807" y="1521544"/>
+            <a:ext cx="6905838" cy="523220"/>
+          </a:xfrm>
+          <a:prstGeom prst="rect">
+            <a:avLst/>
+          </a:prstGeom>
+          <a:noFill/>
+          <a:ln>
+            <a:noFill/>
+          </a:ln>
+        </p:spPr>
+        <p:txBody>
+          <a:bodyPr spcFirstLastPara="1" wrap="square" lIns="91425" tIns="45700" rIns="91425" bIns="45700" anchor="t" anchorCtr="0">
+            <a:spAutoFit/>
+          </a:bodyPr>
+          <a:lstStyle/>
+          <a:p>
+            <a:pPr marL="0" marR="0" lvl="0" indent="0" algn="l" rtl="0">
+              <a:spcBef>
+                <a:spcPts val="0"/>
+              </a:spcBef>
+              <a:spcAft>
+                <a:spcPts val="0"/>
+              </a:spcAft>
+              <a:buNone/>
+            </a:pPr>
+            <a:r>
+              <a:rPr lang="en-US" sz="2800" b="1" dirty="0">
+                <a:solidFill>
+                  <a:schemeClr val="dk1"/>
+                </a:solidFill>
+                <a:latin typeface="Times New Roman"/>
+                <a:ea typeface="Times New Roman"/>
+                <a:cs typeface="Times New Roman"/>
+                <a:sym typeface="Times New Roman"/>
+              </a:rPr>
+              <a:t>Kafka</a:t>
+            </a:r>
+            <a:endParaRPr sz="2800" b="1" dirty="0">
+              <a:solidFill>
+                <a:schemeClr val="dk1"/>
+              </a:solidFill>
+              <a:latin typeface="Times New Roman"/>
+              <a:ea typeface="Times New Roman"/>
+              <a:cs typeface="Times New Roman"/>
+              <a:sym typeface="Times New Roman"/>
+            </a:endParaRPr>
+          </a:p>
+        </p:txBody>
+      </p:sp>
+      <p:sp>
+        <p:nvSpPr>
+          <p:cNvPr id="202" name="Google Shape;202;p5">
+            <a:extLst>
+              <a:ext uri="{FF2B5EF4-FFF2-40B4-BE49-F238E27FC236}">
+                <a16:creationId xmlns:a16="http://schemas.microsoft.com/office/drawing/2014/main" id="{A648AF1D-EC2E-E560-410E-BEDB6C8A45A7}"/>
+              </a:ext>
+            </a:extLst>
+          </p:cNvPr>
+          <p:cNvSpPr/>
+          <p:nvPr/>
+        </p:nvSpPr>
+        <p:spPr>
+          <a:xfrm>
+            <a:off x="1670730" y="2505849"/>
+            <a:ext cx="9367384" cy="3437751"/>
+          </a:xfrm>
+          <a:prstGeom prst="rect">
+            <a:avLst/>
+          </a:prstGeom>
+          <a:solidFill>
+            <a:schemeClr val="lt1"/>
+          </a:solidFill>
+          <a:ln w="12700" cap="flat" cmpd="sng">
+            <a:solidFill>
+              <a:schemeClr val="accent4"/>
+            </a:solidFill>
+            <a:prstDash val="solid"/>
+            <a:miter lim="800000"/>
+            <a:headEnd type="none" w="sm" len="sm"/>
+            <a:tailEnd type="none" w="sm" len="sm"/>
+          </a:ln>
+        </p:spPr>
+        <p:txBody>
+          <a:bodyPr spcFirstLastPara="1" wrap="square" lIns="91425" tIns="45700" rIns="91425" bIns="45700" anchor="t" anchorCtr="0">
+            <a:noAutofit/>
+          </a:bodyPr>
+          <a:lstStyle/>
+          <a:p>
+            <a:pPr marL="0" marR="0" lvl="0" indent="0" algn="l" rtl="0">
+              <a:spcBef>
+                <a:spcPts val="0"/>
+              </a:spcBef>
+              <a:spcAft>
+                <a:spcPts val="0"/>
+              </a:spcAft>
+              <a:buNone/>
+            </a:pPr>
+            <a:r>
+              <a:rPr lang="vi-VN" sz="2800" b="0" i="0" dirty="0">
+                <a:solidFill>
+                  <a:srgbClr val="222222"/>
+                </a:solidFill>
+                <a:effectLst/>
+                <a:latin typeface="Times New Roman" panose="02020603050405020304" pitchFamily="18" charset="0"/>
+                <a:cs typeface="Times New Roman" panose="02020603050405020304" pitchFamily="18" charset="0"/>
+              </a:rPr>
+              <a:t>Apache Kafka là một nền tảng xử lý dữ liệu phân tán phổ biến, thường được sử dụng như một message broker để truyền tải dữ liệu theo thời gian thực giữa các hệ thống. Trong Spring Framework, Spring Kafka là module chính hỗ trợ tích hợp Kafka một cách dễ dàng, cho phép phát triển các ứng dụng sản xuất (producer) và tiêu thụ (consumer) dữ liệu hiệu quả.</a:t>
+            </a:r>
+            <a:endParaRPr lang="vi-VN" sz="2800" dirty="0">
+              <a:solidFill>
+                <a:schemeClr val="dk1"/>
+              </a:solidFill>
+              <a:latin typeface="Times New Roman" panose="02020603050405020304" pitchFamily="18" charset="0"/>
+              <a:ea typeface="Times New Roman"/>
+              <a:cs typeface="Times New Roman" panose="02020603050405020304" pitchFamily="18" charset="0"/>
+              <a:sym typeface="Times New Roman"/>
+            </a:endParaRPr>
+          </a:p>
+        </p:txBody>
+      </p:sp>
+    </p:spTree>
+    <p:extLst>
+      <p:ext uri="{BB962C8B-B14F-4D97-AF65-F5344CB8AC3E}">
+        <p14:creationId xmlns:p14="http://schemas.microsoft.com/office/powerpoint/2010/main" val="547044268"/>
+      </p:ext>
+    </p:extLst>
+  </p:cSld>
+  <p:clrMapOvr>
+    <a:masterClrMapping/>
+  </p:clrMapOvr>
+  <mc:AlternateContent xmlns:mc="http://schemas.openxmlformats.org/markup-compatibility/2006">
+    <mc:Choice xmlns:p14="http://schemas.microsoft.com/office/powerpoint/2010/main" Requires="p14">
+      <p:transition spd="med" p14:dur="700">
+        <p:fade/>
+      </p:transition>
+    </mc:Choice>
+    <mc:Fallback>
+      <p:transition spd="med">
+        <p:fade/>
+      </p:transition>
+    </mc:Fallback>
+  </mc:AlternateContent>
+  <p:timing>
+    <p:tnLst>
+      <p:par>
+        <p:cTn id="1" dur="indefinite" restart="never" nodeType="tmRoot">
+          <p:childTnLst>
+            <p:seq concurrent="1" nextAc="seek">
+              <p:cTn id="2" dur="indefinite" nodeType="mainSeq">
+                <p:childTnLst>
+                  <p:par>
+                    <p:cTn id="3" fill="hold">
+                      <p:stCondLst>
+                        <p:cond delay="indefinite"/>
+                        <p:cond evt="onBegin" delay="0">
+                          <p:tn val="2"/>
+                        </p:cond>
+                      </p:stCondLst>
+                      <p:childTnLst>
+                        <p:par>
+                          <p:cTn id="4" fill="hold">
+                            <p:stCondLst>
+                              <p:cond delay="0"/>
+                            </p:stCondLst>
+                            <p:childTnLst>
+                              <p:par>
+                                <p:cTn id="5" presetID="2" presetClass="entr" presetSubtype="8" fill="hold" nodeType="withEffect">
+                                  <p:stCondLst>
+                                    <p:cond delay="0"/>
+                                  </p:stCondLst>
+                                  <p:childTnLst>
+                                    <p:set>
+                                      <p:cBhvr>
+                                        <p:cTn id="6" dur="1" fill="hold">
+                                          <p:stCondLst>
+                                            <p:cond delay="0"/>
+                                          </p:stCondLst>
+                                        </p:cTn>
+                                        <p:tgtEl>
+                                          <p:spTgt spid="193"/>
+                                        </p:tgtEl>
+                                        <p:attrNameLst>
+                                          <p:attrName>style.visibility</p:attrName>
+                                        </p:attrNameLst>
+                                      </p:cBhvr>
+                                      <p:to>
+                                        <p:strVal val="visible"/>
+                                      </p:to>
+                                    </p:set>
+                                    <p:anim calcmode="lin" valueType="num">
+                                      <p:cBhvr additive="base">
+                                        <p:cTn id="7" dur="500"/>
+                                        <p:tgtEl>
+                                          <p:spTgt spid="193"/>
+                                        </p:tgtEl>
+                                        <p:attrNameLst>
+                                          <p:attrName>ppt_x</p:attrName>
+                                        </p:attrNameLst>
+                                      </p:cBhvr>
+                                      <p:tavLst>
+                                        <p:tav tm="0">
+                                          <p:val>
+                                            <p:strVal val="#ppt_x-1"/>
+                                          </p:val>
+                                        </p:tav>
+                                        <p:tav tm="100000">
+                                          <p:val>
+                                            <p:strVal val="#ppt_x"/>
+                                          </p:val>
+                                        </p:tav>
+                                      </p:tavLst>
+                                    </p:anim>
+                                  </p:childTnLst>
+                                </p:cTn>
+                              </p:par>
+                              <p:par>
+                                <p:cTn id="8" presetID="2" presetClass="entr" presetSubtype="2" fill="hold" nodeType="withEffect">
+                                  <p:stCondLst>
+                                    <p:cond delay="0"/>
+                                  </p:stCondLst>
+                                  <p:childTnLst>
+                                    <p:set>
+                                      <p:cBhvr>
+                                        <p:cTn id="9" dur="1" fill="hold">
+                                          <p:stCondLst>
+                                            <p:cond delay="0"/>
+                                          </p:stCondLst>
+                                        </p:cTn>
+                                        <p:tgtEl>
+                                          <p:spTgt spid="190"/>
+                                        </p:tgtEl>
+                                        <p:attrNameLst>
+                                          <p:attrName>style.visibility</p:attrName>
+                                        </p:attrNameLst>
+                                      </p:cBhvr>
+                                      <p:to>
+                                        <p:strVal val="visible"/>
+                                      </p:to>
+                                    </p:set>
+                                    <p:anim calcmode="lin" valueType="num">
+                                      <p:cBhvr additive="base">
+                                        <p:cTn id="10" dur="500"/>
+                                        <p:tgtEl>
+                                          <p:spTgt spid="190"/>
+                                        </p:tgtEl>
+                                        <p:attrNameLst>
+                                          <p:attrName>ppt_x</p:attrName>
+                                        </p:attrNameLst>
+                                      </p:cBhvr>
+                                      <p:tavLst>
+                                        <p:tav tm="0">
+                                          <p:val>
+                                            <p:strVal val="#ppt_x+1"/>
+                                          </p:val>
+                                        </p:tav>
+                                        <p:tav tm="100000">
+                                          <p:val>
+                                            <p:strVal val="#ppt_x"/>
+                                          </p:val>
+                                        </p:tav>
+                                      </p:tavLst>
+                                    </p:anim>
+                                  </p:childTnLst>
+                                </p:cTn>
+                              </p:par>
+                            </p:childTnLst>
+                          </p:cTn>
+                        </p:par>
+                      </p:childTnLst>
+                    </p:cTn>
+                  </p:par>
+                </p:childTnLst>
+              </p:cTn>
+              <p:prevCondLst>
+                <p:cond evt="onPrev" delay="0">
+                  <p:tgtEl>
+                    <p:sldTgt/>
+                  </p:tgtEl>
+                </p:cond>
+              </p:prevCondLst>
+              <p:nextCondLst>
+                <p:cond evt="onNext" delay="0">
+                  <p:tgtEl>
+                    <p:sldTgt/>
+                  </p:tgtEl>
+                </p:cond>
+              </p:nextCondLst>
+            </p:seq>
+          </p:childTnLst>
+        </p:cTn>
+      </p:par>
+    </p:tnLst>
+  </p:timing>
+</p:sld>
+</file>
+
+<file path=ppt/slides/slide9.xml><?xml version="1.0" encoding="utf-8"?>
+<p:sld xmlns:a="http://schemas.openxmlformats.org/drawingml/2006/main" xmlns:r="http://schemas.openxmlformats.org/officeDocument/2006/relationships" xmlns:p="http://schemas.openxmlformats.org/presentationml/2006/main">
+  <p:cSld>
+    <p:spTree>
+      <p:nvGrpSpPr>
+        <p:cNvPr id="1" name="Shape 186">
+          <a:extLst>
+            <a:ext uri="{FF2B5EF4-FFF2-40B4-BE49-F238E27FC236}">
+              <a16:creationId xmlns:a16="http://schemas.microsoft.com/office/drawing/2014/main" id="{927331E7-8D8A-C52F-C962-23EC191D4AAC}"/>
+            </a:ext>
+          </a:extLst>
+        </p:cNvPr>
+        <p:cNvGrpSpPr/>
+        <p:nvPr/>
+      </p:nvGrpSpPr>
+      <p:grpSpPr>
+        <a:xfrm>
+          <a:off x="0" y="0"/>
+          <a:ext cx="0" cy="0"/>
+          <a:chOff x="0" y="0"/>
+          <a:chExt cx="0" cy="0"/>
+        </a:xfrm>
+      </p:grpSpPr>
+      <p:grpSp>
+        <p:nvGrpSpPr>
+          <p:cNvPr id="190" name="Google Shape;190;p5">
+            <a:extLst>
+              <a:ext uri="{FF2B5EF4-FFF2-40B4-BE49-F238E27FC236}">
+                <a16:creationId xmlns:a16="http://schemas.microsoft.com/office/drawing/2014/main" id="{50F0D4F0-A635-9A7F-DB78-CA1A0ADBF5D9}"/>
+              </a:ext>
+            </a:extLst>
+          </p:cNvPr>
+          <p:cNvGrpSpPr/>
+          <p:nvPr/>
+        </p:nvGrpSpPr>
+        <p:grpSpPr>
+          <a:xfrm>
+            <a:off x="1670730" y="1263299"/>
+            <a:ext cx="8616270" cy="1007332"/>
+            <a:chOff x="3129129" y="1121776"/>
+            <a:chExt cx="5933741" cy="1171624"/>
+          </a:xfrm>
+        </p:grpSpPr>
+        <p:sp>
+          <p:nvSpPr>
+            <p:cNvPr id="191" name="Google Shape;191;p5">
+              <a:extLst>
+                <a:ext uri="{FF2B5EF4-FFF2-40B4-BE49-F238E27FC236}">
+                  <a16:creationId xmlns:a16="http://schemas.microsoft.com/office/drawing/2014/main" id="{B6E40696-7BC2-EB63-8F75-A7FC5733BA74}"/>
+                </a:ext>
+              </a:extLst>
+            </p:cNvPr>
+            <p:cNvSpPr/>
+            <p:nvPr/>
+          </p:nvSpPr>
+          <p:spPr>
+            <a:xfrm>
+              <a:off x="3129129" y="1121776"/>
+              <a:ext cx="5933741" cy="1171624"/>
+            </a:xfrm>
+            <a:prstGeom prst="roundRect">
+              <a:avLst>
+                <a:gd name="adj" fmla="val 50000"/>
+              </a:avLst>
+            </a:prstGeom>
+            <a:solidFill>
+              <a:srgbClr val="D8D8D8">
+                <a:alpha val="49803"/>
+              </a:srgbClr>
+            </a:solidFill>
+            <a:ln>
+              <a:noFill/>
+            </a:ln>
+          </p:spPr>
+          <p:txBody>
+            <a:bodyPr spcFirstLastPara="1" wrap="square" lIns="91425" tIns="45700" rIns="91425" bIns="45700" anchor="ctr" anchorCtr="0">
+              <a:noAutofit/>
+            </a:bodyPr>
+            <a:lstStyle/>
+            <a:p>
+              <a:pPr marL="0" marR="0" lvl="0" indent="0" algn="l" rtl="0">
+                <a:spcBef>
+                  <a:spcPts val="0"/>
+                </a:spcBef>
+                <a:spcAft>
+                  <a:spcPts val="0"/>
+                </a:spcAft>
+                <a:buNone/>
+              </a:pPr>
+              <a:endParaRPr sz="2800">
+                <a:solidFill>
+                  <a:srgbClr val="FFAA2D"/>
+                </a:solidFill>
+                <a:latin typeface="Arial"/>
+                <a:ea typeface="Arial"/>
+                <a:cs typeface="Arial"/>
+                <a:sym typeface="Arial"/>
+              </a:endParaRPr>
+            </a:p>
+          </p:txBody>
+        </p:sp>
+        <p:sp>
+          <p:nvSpPr>
+            <p:cNvPr id="192" name="Google Shape;192;p5">
+              <a:extLst>
+                <a:ext uri="{FF2B5EF4-FFF2-40B4-BE49-F238E27FC236}">
+                  <a16:creationId xmlns:a16="http://schemas.microsoft.com/office/drawing/2014/main" id="{F7738817-F571-5688-7D52-7BD7B5B169C8}"/>
+                </a:ext>
+              </a:extLst>
+            </p:cNvPr>
+            <p:cNvSpPr/>
+            <p:nvPr/>
+          </p:nvSpPr>
+          <p:spPr>
+            <a:xfrm>
+              <a:off x="3289330" y="1253414"/>
+              <a:ext cx="5613340" cy="908350"/>
+            </a:xfrm>
+            <a:prstGeom prst="roundRect">
+              <a:avLst>
+                <a:gd name="adj" fmla="val 50000"/>
+              </a:avLst>
+            </a:prstGeom>
+            <a:gradFill>
+              <a:gsLst>
+                <a:gs pos="0">
+                  <a:srgbClr val="FFAA2D"/>
+                </a:gs>
+                <a:gs pos="100000">
+                  <a:srgbClr val="FFD393"/>
+                </a:gs>
+              </a:gsLst>
+              <a:lin ang="0" scaled="0"/>
+            </a:gradFill>
+            <a:ln w="19050" cap="flat" cmpd="sng">
+              <a:solidFill>
+                <a:srgbClr val="BFBFBF"/>
+              </a:solidFill>
+              <a:prstDash val="solid"/>
+              <a:miter lim="800000"/>
+              <a:headEnd type="none" w="sm" len="sm"/>
+              <a:tailEnd type="none" w="sm" len="sm"/>
+            </a:ln>
+          </p:spPr>
+          <p:txBody>
+            <a:bodyPr spcFirstLastPara="1" wrap="square" lIns="91425" tIns="45700" rIns="91425" bIns="45700" anchor="ctr" anchorCtr="0">
+              <a:noAutofit/>
+            </a:bodyPr>
+            <a:lstStyle/>
+            <a:p>
+              <a:pPr marL="0" marR="0" lvl="0" indent="0" algn="l" rtl="0">
+                <a:spcBef>
+                  <a:spcPts val="0"/>
+                </a:spcBef>
+                <a:spcAft>
+                  <a:spcPts val="0"/>
+                </a:spcAft>
+                <a:buNone/>
+              </a:pPr>
+              <a:endParaRPr sz="2800">
+                <a:solidFill>
+                  <a:srgbClr val="FFAA2D"/>
+                </a:solidFill>
+                <a:latin typeface="Arial"/>
+                <a:ea typeface="Arial"/>
+                <a:cs typeface="Arial"/>
+                <a:sym typeface="Arial"/>
+              </a:endParaRPr>
+            </a:p>
+          </p:txBody>
+        </p:sp>
+      </p:grpSp>
+      <p:grpSp>
+        <p:nvGrpSpPr>
+          <p:cNvPr id="193" name="Google Shape;193;p5">
+            <a:extLst>
+              <a:ext uri="{FF2B5EF4-FFF2-40B4-BE49-F238E27FC236}">
+                <a16:creationId xmlns:a16="http://schemas.microsoft.com/office/drawing/2014/main" id="{F65F02E0-7E71-DFFB-FC33-B4FBDC91A6AD}"/>
+              </a:ext>
+            </a:extLst>
+          </p:cNvPr>
+          <p:cNvGrpSpPr/>
+          <p:nvPr/>
+        </p:nvGrpSpPr>
+        <p:grpSpPr>
+          <a:xfrm>
+            <a:off x="1782659" y="1240148"/>
+            <a:ext cx="1674310" cy="1522886"/>
+            <a:chOff x="3020983" y="881796"/>
+            <a:chExt cx="2097410" cy="2097410"/>
+          </a:xfrm>
+        </p:grpSpPr>
+        <p:grpSp>
+          <p:nvGrpSpPr>
+            <p:cNvPr id="194" name="Google Shape;194;p5">
+              <a:extLst>
+                <a:ext uri="{FF2B5EF4-FFF2-40B4-BE49-F238E27FC236}">
+                  <a16:creationId xmlns:a16="http://schemas.microsoft.com/office/drawing/2014/main" id="{EEA82440-BBE8-AE4A-F810-5C0FDC5C9E9B}"/>
+                </a:ext>
+              </a:extLst>
+            </p:cNvPr>
+            <p:cNvGrpSpPr/>
+            <p:nvPr/>
+          </p:nvGrpSpPr>
+          <p:grpSpPr>
+            <a:xfrm>
+              <a:off x="3020983" y="881796"/>
+              <a:ext cx="2097410" cy="2097410"/>
+              <a:chOff x="3099689" y="1098878"/>
+              <a:chExt cx="1995612" cy="1995615"/>
+            </a:xfrm>
+          </p:grpSpPr>
+          <p:grpSp>
+            <p:nvGrpSpPr>
+              <p:cNvPr id="195" name="Google Shape;195;p5">
+                <a:extLst>
+                  <a:ext uri="{FF2B5EF4-FFF2-40B4-BE49-F238E27FC236}">
+                    <a16:creationId xmlns:a16="http://schemas.microsoft.com/office/drawing/2014/main" id="{933A9C65-431F-D953-03EF-6A203E1FB64A}"/>
+                  </a:ext>
+                </a:extLst>
+              </p:cNvPr>
+              <p:cNvGrpSpPr/>
+              <p:nvPr/>
+            </p:nvGrpSpPr>
+            <p:grpSpPr>
+              <a:xfrm>
+                <a:off x="3099689" y="1098878"/>
+                <a:ext cx="1995612" cy="1995615"/>
+                <a:chOff x="6804316" y="2574806"/>
+                <a:chExt cx="3585705" cy="3585705"/>
+              </a:xfrm>
+            </p:grpSpPr>
+            <p:sp>
+              <p:nvSpPr>
+                <p:cNvPr id="196" name="Google Shape;196;p5">
+                  <a:extLst>
+                    <a:ext uri="{FF2B5EF4-FFF2-40B4-BE49-F238E27FC236}">
+                      <a16:creationId xmlns:a16="http://schemas.microsoft.com/office/drawing/2014/main" id="{FCBED3A6-27EC-155A-293C-D63709E4BDDE}"/>
+                    </a:ext>
+                  </a:extLst>
+                </p:cNvPr>
+                <p:cNvSpPr/>
+                <p:nvPr/>
+              </p:nvSpPr>
+              <p:spPr>
+                <a:xfrm rot="-2700000">
+                  <a:off x="7501948" y="2927402"/>
+                  <a:ext cx="2190440" cy="2880512"/>
+                </a:xfrm>
+                <a:custGeom>
+                  <a:avLst/>
+                  <a:gdLst/>
+                  <a:ahLst/>
+                  <a:cxnLst/>
+                  <a:rect l="l" t="t" r="r" b="b"/>
+                  <a:pathLst>
+                    <a:path w="1696474" h="2070736" extrusionOk="0">
+                      <a:moveTo>
+                        <a:pt x="13249" y="1035368"/>
+                      </a:moveTo>
+                      <a:cubicBezTo>
+                        <a:pt x="112309" y="471170"/>
+                        <a:pt x="388098" y="0"/>
+                        <a:pt x="850497" y="0"/>
+                      </a:cubicBezTo>
+                      <a:cubicBezTo>
+                        <a:pt x="1312896" y="0"/>
+                        <a:pt x="1611545" y="478790"/>
+                        <a:pt x="1687745" y="1035368"/>
+                      </a:cubicBezTo>
+                      <a:cubicBezTo>
+                        <a:pt x="1765308" y="1601901"/>
+                        <a:pt x="1312896" y="2070736"/>
+                        <a:pt x="850497" y="2070736"/>
+                      </a:cubicBezTo>
+                      <a:cubicBezTo>
+                        <a:pt x="388098" y="2070736"/>
+                        <a:pt x="-85811" y="1599566"/>
+                        <a:pt x="13249" y="1035368"/>
+                      </a:cubicBezTo>
+                      <a:close/>
+                    </a:path>
+                  </a:pathLst>
+                </a:custGeom>
+                <a:gradFill>
+                  <a:gsLst>
+                    <a:gs pos="0">
+                      <a:schemeClr val="dk1"/>
+                    </a:gs>
+                    <a:gs pos="17000">
+                      <a:srgbClr val="000000">
+                        <a:alpha val="45882"/>
+                      </a:srgbClr>
+                    </a:gs>
+                    <a:gs pos="34000">
+                      <a:srgbClr val="000000">
+                        <a:alpha val="42745"/>
+                      </a:srgbClr>
+                    </a:gs>
+                    <a:gs pos="51000">
+                      <a:srgbClr val="000000">
+                        <a:alpha val="20000"/>
+                      </a:srgbClr>
+                    </a:gs>
+                    <a:gs pos="65000">
+                      <a:srgbClr val="000000">
+                        <a:alpha val="9803"/>
+                      </a:srgbClr>
+                    </a:gs>
+                    <a:gs pos="78000">
+                      <a:srgbClr val="000000">
+                        <a:alpha val="4705"/>
+                      </a:srgbClr>
+                    </a:gs>
+                    <a:gs pos="100000">
+                      <a:srgbClr val="000000">
+                        <a:alpha val="0"/>
+                      </a:srgbClr>
+                    </a:gs>
+                  </a:gsLst>
+                  <a:lin ang="5400000" scaled="0"/>
+                </a:gradFill>
+                <a:ln>
+                  <a:noFill/>
+                </a:ln>
+              </p:spPr>
+              <p:txBody>
+                <a:bodyPr spcFirstLastPara="1" wrap="square" lIns="91425" tIns="45700" rIns="91425" bIns="45700" anchor="ctr" anchorCtr="0">
+                  <a:noAutofit/>
+                </a:bodyPr>
+                <a:lstStyle/>
+                <a:p>
+                  <a:pPr marL="0" marR="0" lvl="0" indent="0" algn="l" rtl="0">
+                    <a:spcBef>
+                      <a:spcPts val="0"/>
+                    </a:spcBef>
+                    <a:spcAft>
+                      <a:spcPts val="0"/>
+                    </a:spcAft>
+                    <a:buNone/>
+                  </a:pPr>
+                  <a:endParaRPr sz="2800">
+                    <a:solidFill>
+                      <a:schemeClr val="lt1"/>
+                    </a:solidFill>
+                    <a:latin typeface="Arial"/>
+                    <a:ea typeface="Arial"/>
+                    <a:cs typeface="Arial"/>
+                    <a:sym typeface="Arial"/>
+                  </a:endParaRPr>
+                </a:p>
+              </p:txBody>
+            </p:sp>
+            <p:sp>
+              <p:nvSpPr>
+                <p:cNvPr id="197" name="Google Shape;197;p5">
+                  <a:extLst>
+                    <a:ext uri="{FF2B5EF4-FFF2-40B4-BE49-F238E27FC236}">
+                      <a16:creationId xmlns:a16="http://schemas.microsoft.com/office/drawing/2014/main" id="{AE32FA36-4FAE-8470-EE04-B398A566EAA6}"/>
+                    </a:ext>
+                  </a:extLst>
+                </p:cNvPr>
+                <p:cNvSpPr/>
+                <p:nvPr/>
+              </p:nvSpPr>
+              <p:spPr>
+                <a:xfrm>
+                  <a:off x="7567583" y="3243359"/>
+                  <a:ext cx="1344545" cy="1344543"/>
+                </a:xfrm>
+                <a:prstGeom prst="ellipse">
+                  <a:avLst/>
+                </a:prstGeom>
+                <a:gradFill>
+                  <a:gsLst>
+                    <a:gs pos="0">
+                      <a:srgbClr val="FFFFFF">
+                        <a:alpha val="98823"/>
+                      </a:srgbClr>
+                    </a:gs>
+                    <a:gs pos="43000">
+                      <a:srgbClr val="F7F7F7"/>
+                    </a:gs>
+                    <a:gs pos="100000">
+                      <a:srgbClr val="B8C0C0"/>
+                    </a:gs>
+                  </a:gsLst>
+                  <a:lin ang="2700000" scaled="0"/>
+                </a:gradFill>
+                <a:ln>
+                  <a:noFill/>
+                </a:ln>
+                <a:effectLst>
+                  <a:outerShdw blurRad="139700" dist="88900" dir="2700000" algn="tl" rotWithShape="0">
+                    <a:srgbClr val="494949">
+                      <a:alpha val="29803"/>
+                    </a:srgbClr>
+                  </a:outerShdw>
+                </a:effectLst>
+              </p:spPr>
+              <p:txBody>
+                <a:bodyPr spcFirstLastPara="1" wrap="square" lIns="91425" tIns="45700" rIns="91425" bIns="45700" anchor="ctr" anchorCtr="0">
+                  <a:noAutofit/>
+                </a:bodyPr>
+                <a:lstStyle/>
+                <a:p>
+                  <a:pPr marL="0" marR="0" lvl="0" indent="0" algn="l" rtl="0">
+                    <a:spcBef>
+                      <a:spcPts val="0"/>
+                    </a:spcBef>
+                    <a:spcAft>
+                      <a:spcPts val="0"/>
+                    </a:spcAft>
+                    <a:buNone/>
+                  </a:pPr>
+                  <a:endParaRPr sz="2800">
+                    <a:solidFill>
+                      <a:schemeClr val="lt1"/>
+                    </a:solidFill>
+                    <a:latin typeface="Arial"/>
+                    <a:ea typeface="Arial"/>
+                    <a:cs typeface="Arial"/>
+                    <a:sym typeface="Arial"/>
+                  </a:endParaRPr>
+                </a:p>
+              </p:txBody>
+            </p:sp>
+            <p:sp>
+              <p:nvSpPr>
+                <p:cNvPr id="198" name="Google Shape;198;p5">
+                  <a:extLst>
+                    <a:ext uri="{FF2B5EF4-FFF2-40B4-BE49-F238E27FC236}">
+                      <a16:creationId xmlns:a16="http://schemas.microsoft.com/office/drawing/2014/main" id="{3D20D41F-C400-75C9-3020-C92A5A3253B9}"/>
+                    </a:ext>
+                  </a:extLst>
+                </p:cNvPr>
+                <p:cNvSpPr/>
+                <p:nvPr/>
+              </p:nvSpPr>
+              <p:spPr>
+                <a:xfrm>
+                  <a:off x="7380501" y="3019185"/>
+                  <a:ext cx="1596494" cy="1596494"/>
+                </a:xfrm>
+                <a:prstGeom prst="ellipse">
+                  <a:avLst/>
+                </a:prstGeom>
+                <a:gradFill>
+                  <a:gsLst>
+                    <a:gs pos="0">
+                      <a:srgbClr val="FFFFFF">
+                        <a:alpha val="98823"/>
+                      </a:srgbClr>
+                    </a:gs>
+                    <a:gs pos="11000">
+                      <a:srgbClr val="FFFFFF">
+                        <a:alpha val="98823"/>
+                      </a:srgbClr>
+                    </a:gs>
+                    <a:gs pos="39000">
+                      <a:schemeClr val="lt1"/>
+                    </a:gs>
+                    <a:gs pos="52999">
+                      <a:srgbClr val="F7F7F7"/>
+                    </a:gs>
+                    <a:gs pos="100000">
+                      <a:srgbClr val="B8C0C0"/>
+                    </a:gs>
+                  </a:gsLst>
+                  <a:lin ang="2700000" scaled="0"/>
+                </a:gradFill>
+                <a:ln>
+                  <a:noFill/>
+                </a:ln>
+              </p:spPr>
+              <p:txBody>
+                <a:bodyPr spcFirstLastPara="1" wrap="square" lIns="91425" tIns="45700" rIns="91425" bIns="45700" anchor="ctr" anchorCtr="0">
+                  <a:noAutofit/>
+                </a:bodyPr>
+                <a:lstStyle/>
+                <a:p>
+                  <a:pPr marL="0" marR="0" lvl="0" indent="0" algn="l" rtl="0">
+                    <a:spcBef>
+                      <a:spcPts val="0"/>
+                    </a:spcBef>
+                    <a:spcAft>
+                      <a:spcPts val="0"/>
+                    </a:spcAft>
+                    <a:buNone/>
+                  </a:pPr>
+                  <a:endParaRPr sz="2800">
+                    <a:solidFill>
+                      <a:schemeClr val="lt1"/>
+                    </a:solidFill>
+                    <a:latin typeface="Arial"/>
+                    <a:ea typeface="Arial"/>
+                    <a:cs typeface="Arial"/>
+                    <a:sym typeface="Arial"/>
+                  </a:endParaRPr>
+                </a:p>
+              </p:txBody>
+            </p:sp>
+          </p:grpSp>
+          <p:sp>
+            <p:nvSpPr>
+              <p:cNvPr id="199" name="Google Shape;199;p5">
+                <a:extLst>
+                  <a:ext uri="{FF2B5EF4-FFF2-40B4-BE49-F238E27FC236}">
+                    <a16:creationId xmlns:a16="http://schemas.microsoft.com/office/drawing/2014/main" id="{5E092399-F1CB-FF57-37EA-F0BA4941B5D7}"/>
+                  </a:ext>
+                </a:extLst>
+              </p:cNvPr>
+              <p:cNvSpPr/>
+              <p:nvPr/>
+            </p:nvSpPr>
+            <p:spPr>
+              <a:xfrm>
+                <a:off x="3222820" y="1148080"/>
+                <a:ext cx="1284820" cy="1284821"/>
+              </a:xfrm>
+              <a:prstGeom prst="ellipse">
+                <a:avLst/>
+              </a:prstGeom>
+              <a:solidFill>
+                <a:schemeClr val="lt1">
+                  <a:alpha val="13725"/>
+                </a:schemeClr>
+              </a:solidFill>
+              <a:ln w="15875" cap="flat" cmpd="sng">
+                <a:solidFill>
+                  <a:schemeClr val="lt1"/>
+                </a:solidFill>
+                <a:prstDash val="solid"/>
+                <a:miter lim="800000"/>
+                <a:headEnd type="none" w="sm" len="sm"/>
+                <a:tailEnd type="none" w="sm" len="sm"/>
+              </a:ln>
+              <a:effectLst>
+                <a:outerShdw blurRad="215900" dist="88900" dir="2700000" algn="tl" rotWithShape="0">
+                  <a:srgbClr val="000000">
+                    <a:alpha val="10980"/>
+                  </a:srgbClr>
+                </a:outerShdw>
+              </a:effectLst>
+            </p:spPr>
+            <p:txBody>
+              <a:bodyPr spcFirstLastPara="1" wrap="square" lIns="91425" tIns="45700" rIns="91425" bIns="45700" anchor="ctr" anchorCtr="0">
+                <a:noAutofit/>
+              </a:bodyPr>
+              <a:lstStyle/>
+              <a:p>
+                <a:pPr marL="0" marR="0" lvl="0" indent="0" algn="l" rtl="0">
+                  <a:spcBef>
+                    <a:spcPts val="0"/>
+                  </a:spcBef>
+                  <a:spcAft>
+                    <a:spcPts val="0"/>
+                  </a:spcAft>
+                  <a:buNone/>
+                </a:pPr>
+                <a:endParaRPr sz="2800">
+                  <a:solidFill>
+                    <a:schemeClr val="lt1"/>
+                  </a:solidFill>
+                  <a:latin typeface="Arial"/>
+                  <a:ea typeface="Arial"/>
+                  <a:cs typeface="Arial"/>
+                  <a:sym typeface="Arial"/>
+                </a:endParaRPr>
+              </a:p>
+            </p:txBody>
+          </p:sp>
+        </p:grpSp>
+        <p:sp>
+          <p:nvSpPr>
+            <p:cNvPr id="200" name="Google Shape;200;p5">
+              <a:extLst>
+                <a:ext uri="{FF2B5EF4-FFF2-40B4-BE49-F238E27FC236}">
+                  <a16:creationId xmlns:a16="http://schemas.microsoft.com/office/drawing/2014/main" id="{B88CFB57-BB04-D926-694B-F49C661689EE}"/>
+                </a:ext>
+              </a:extLst>
+            </p:cNvPr>
+            <p:cNvSpPr txBox="1"/>
+            <p:nvPr/>
+          </p:nvSpPr>
+          <p:spPr>
+            <a:xfrm>
+              <a:off x="3514455" y="1292811"/>
+              <a:ext cx="774240" cy="720610"/>
+            </a:xfrm>
+            <a:prstGeom prst="rect">
+              <a:avLst/>
+            </a:prstGeom>
+            <a:noFill/>
+            <a:ln>
+              <a:noFill/>
+            </a:ln>
+          </p:spPr>
+          <p:txBody>
+            <a:bodyPr spcFirstLastPara="1" wrap="square" lIns="91425" tIns="45700" rIns="91425" bIns="45700" anchor="t" anchorCtr="0">
+              <a:spAutoFit/>
+            </a:bodyPr>
+            <a:lstStyle/>
+            <a:p>
+              <a:pPr marL="0" marR="0" lvl="0" indent="0" algn="l" rtl="0">
+                <a:spcBef>
+                  <a:spcPts val="0"/>
+                </a:spcBef>
+                <a:spcAft>
+                  <a:spcPts val="0"/>
+                </a:spcAft>
+                <a:buNone/>
+              </a:pPr>
+              <a:r>
+                <a:rPr lang="en-US" sz="2800" dirty="0">
+                  <a:solidFill>
+                    <a:srgbClr val="FFB850"/>
+                  </a:solidFill>
+                  <a:latin typeface="Impact"/>
+                  <a:ea typeface="Impact"/>
+                  <a:cs typeface="Impact"/>
+                  <a:sym typeface="Impact"/>
+                </a:rPr>
+                <a:t>04</a:t>
+              </a:r>
+              <a:endParaRPr sz="2800" dirty="0">
+                <a:solidFill>
+                  <a:srgbClr val="FFB850"/>
+                </a:solidFill>
+                <a:latin typeface="Impact"/>
+                <a:ea typeface="Impact"/>
+                <a:cs typeface="Impact"/>
+                <a:sym typeface="Impact"/>
+              </a:endParaRPr>
+            </a:p>
+          </p:txBody>
+        </p:sp>
+      </p:grpSp>
+      <p:sp>
+        <p:nvSpPr>
+          <p:cNvPr id="202" name="Google Shape;202;p5">
+            <a:extLst>
+              <a:ext uri="{FF2B5EF4-FFF2-40B4-BE49-F238E27FC236}">
+                <a16:creationId xmlns:a16="http://schemas.microsoft.com/office/drawing/2014/main" id="{6B860C06-8604-E8B6-298A-0BA5BEE21BAC}"/>
+              </a:ext>
+            </a:extLst>
+          </p:cNvPr>
+          <p:cNvSpPr/>
+          <p:nvPr/>
+        </p:nvSpPr>
+        <p:spPr>
+          <a:xfrm>
+            <a:off x="1670730" y="2505849"/>
+            <a:ext cx="9367384" cy="3437751"/>
+          </a:xfrm>
+          <a:prstGeom prst="rect">
+            <a:avLst/>
+          </a:prstGeom>
+          <a:solidFill>
+            <a:schemeClr val="lt1"/>
+          </a:solidFill>
+          <a:ln w="12700" cap="flat" cmpd="sng">
+            <a:solidFill>
+              <a:schemeClr val="accent4"/>
+            </a:solidFill>
+            <a:prstDash val="solid"/>
+            <a:miter lim="800000"/>
+            <a:headEnd type="none" w="sm" len="sm"/>
+            <a:tailEnd type="none" w="sm" len="sm"/>
+          </a:ln>
+        </p:spPr>
+        <p:txBody>
+          <a:bodyPr spcFirstLastPara="1" wrap="square" lIns="91425" tIns="45700" rIns="91425" bIns="45700" anchor="t" anchorCtr="0">
+            <a:noAutofit/>
+          </a:bodyPr>
+          <a:lstStyle/>
+          <a:p>
+            <a:pPr marL="0" marR="0" lvl="0" indent="0" algn="l" rtl="0">
+              <a:spcBef>
+                <a:spcPts val="0"/>
+              </a:spcBef>
+              <a:spcAft>
+                <a:spcPts val="0"/>
+              </a:spcAft>
+              <a:buNone/>
+            </a:pPr>
+            <a:r>
+              <a:rPr lang="en-US" sz="2800" b="0" i="0" dirty="0">
+                <a:solidFill>
+                  <a:srgbClr val="222222"/>
+                </a:solidFill>
+                <a:effectLst/>
+                <a:latin typeface="Times New Roman" panose="02020603050405020304" pitchFamily="18" charset="0"/>
+                <a:cs typeface="Times New Roman" panose="02020603050405020304" pitchFamily="18" charset="0"/>
+              </a:rPr>
+              <a:t>Request vào -&gt; Id không </a:t>
+            </a:r>
+            <a:r>
+              <a:rPr lang="en-US" sz="2800" b="0" i="0" dirty="0" err="1">
+                <a:solidFill>
+                  <a:srgbClr val="222222"/>
+                </a:solidFill>
+                <a:effectLst/>
+                <a:latin typeface="Times New Roman" panose="02020603050405020304" pitchFamily="18" charset="0"/>
+                <a:cs typeface="Times New Roman" panose="02020603050405020304" pitchFamily="18" charset="0"/>
+              </a:rPr>
+              <a:t>trùng</a:t>
+            </a:r>
+            <a:r>
+              <a:rPr lang="en-US" sz="2800" b="0" i="0" dirty="0">
+                <a:solidFill>
+                  <a:srgbClr val="222222"/>
+                </a:solidFill>
+                <a:effectLst/>
+                <a:latin typeface="Times New Roman" panose="02020603050405020304" pitchFamily="18" charset="0"/>
+                <a:cs typeface="Times New Roman" panose="02020603050405020304" pitchFamily="18" charset="0"/>
+              </a:rPr>
+              <a:t> : </a:t>
+            </a:r>
+            <a:r>
+              <a:rPr lang="en-US" sz="2800" b="0" i="0" dirty="0" err="1">
+                <a:solidFill>
+                  <a:srgbClr val="222222"/>
+                </a:solidFill>
+                <a:effectLst/>
+                <a:latin typeface="Times New Roman" panose="02020603050405020304" pitchFamily="18" charset="0"/>
+                <a:cs typeface="Times New Roman" panose="02020603050405020304" pitchFamily="18" charset="0"/>
+              </a:rPr>
+              <a:t>xxxxx</a:t>
+            </a:r>
+            <a:endParaRPr lang="en-US" sz="2800" dirty="0">
+              <a:solidFill>
+                <a:srgbClr val="222222"/>
+              </a:solidFill>
+              <a:latin typeface="Times New Roman" panose="02020603050405020304" pitchFamily="18" charset="0"/>
+              <a:cs typeface="Times New Roman" panose="02020603050405020304" pitchFamily="18" charset="0"/>
+            </a:endParaRPr>
+          </a:p>
+          <a:p>
+            <a:pPr marL="0" marR="0" lvl="0" indent="0" algn="l" rtl="0">
+              <a:spcBef>
+                <a:spcPts val="0"/>
+              </a:spcBef>
+              <a:spcAft>
+                <a:spcPts val="0"/>
+              </a:spcAft>
+              <a:buNone/>
+            </a:pPr>
+            <a:r>
+              <a:rPr lang="en-US" sz="2800" dirty="0">
+                <a:solidFill>
+                  <a:srgbClr val="222222"/>
+                </a:solidFill>
+                <a:latin typeface="Times New Roman" panose="02020603050405020304" pitchFamily="18" charset="0"/>
+                <a:ea typeface="Times New Roman"/>
+                <a:cs typeface="Times New Roman" panose="02020603050405020304" pitchFamily="18" charset="0"/>
+                <a:sym typeface="Times New Roman"/>
+              </a:rPr>
+              <a:t>Put </a:t>
+            </a:r>
+            <a:r>
+              <a:rPr lang="en-US" sz="2800" dirty="0" err="1">
+                <a:solidFill>
+                  <a:srgbClr val="222222"/>
+                </a:solidFill>
+                <a:latin typeface="Times New Roman" panose="02020603050405020304" pitchFamily="18" charset="0"/>
+                <a:ea typeface="Times New Roman"/>
+                <a:cs typeface="Times New Roman" panose="02020603050405020304" pitchFamily="18" charset="0"/>
+                <a:sym typeface="Times New Roman"/>
+              </a:rPr>
+              <a:t>redis</a:t>
+            </a:r>
+            <a:r>
+              <a:rPr lang="en-US" sz="2800" dirty="0">
+                <a:solidFill>
+                  <a:srgbClr val="222222"/>
+                </a:solidFill>
+                <a:latin typeface="Times New Roman" panose="02020603050405020304" pitchFamily="18" charset="0"/>
+                <a:ea typeface="Times New Roman"/>
+                <a:cs typeface="Times New Roman" panose="02020603050405020304" pitchFamily="18" charset="0"/>
+                <a:sym typeface="Times New Roman"/>
+              </a:rPr>
+              <a:t>: key: </a:t>
+            </a:r>
+            <a:r>
+              <a:rPr lang="en-US" sz="2800" dirty="0" err="1">
+                <a:solidFill>
+                  <a:srgbClr val="222222"/>
+                </a:solidFill>
+                <a:latin typeface="Times New Roman" panose="02020603050405020304" pitchFamily="18" charset="0"/>
+                <a:ea typeface="Times New Roman"/>
+                <a:cs typeface="Times New Roman" panose="02020603050405020304" pitchFamily="18" charset="0"/>
+                <a:sym typeface="Times New Roman"/>
+              </a:rPr>
+              <a:t>xxxxx</a:t>
+            </a:r>
+            <a:r>
+              <a:rPr lang="en-US" sz="2800" dirty="0">
+                <a:solidFill>
+                  <a:srgbClr val="222222"/>
+                </a:solidFill>
+                <a:latin typeface="Times New Roman" panose="02020603050405020304" pitchFamily="18" charset="0"/>
+                <a:ea typeface="Times New Roman"/>
+                <a:cs typeface="Times New Roman" panose="02020603050405020304" pitchFamily="18" charset="0"/>
+                <a:sym typeface="Times New Roman"/>
+              </a:rPr>
+              <a:t>, value : message</a:t>
+            </a:r>
+          </a:p>
+          <a:p>
+            <a:pPr marL="0" marR="0" lvl="0" indent="0" algn="l" rtl="0">
+              <a:spcBef>
+                <a:spcPts val="0"/>
+              </a:spcBef>
+              <a:spcAft>
+                <a:spcPts val="0"/>
+              </a:spcAft>
+              <a:buNone/>
+            </a:pPr>
+            <a:endParaRPr lang="en-US" sz="2800" dirty="0">
+              <a:solidFill>
+                <a:srgbClr val="222222"/>
+              </a:solidFill>
+              <a:latin typeface="Times New Roman" panose="02020603050405020304" pitchFamily="18" charset="0"/>
+              <a:ea typeface="Times New Roman"/>
+              <a:cs typeface="Times New Roman" panose="02020603050405020304" pitchFamily="18" charset="0"/>
+              <a:sym typeface="Times New Roman"/>
+            </a:endParaRPr>
+          </a:p>
+          <a:p>
+            <a:pPr marL="0" marR="0" lvl="0" indent="0" algn="l" rtl="0">
+              <a:spcBef>
+                <a:spcPts val="0"/>
+              </a:spcBef>
+              <a:spcAft>
+                <a:spcPts val="0"/>
+              </a:spcAft>
+              <a:buNone/>
+            </a:pPr>
+            <a:r>
+              <a:rPr lang="en-US" sz="2800" dirty="0">
+                <a:solidFill>
+                  <a:srgbClr val="222222"/>
+                </a:solidFill>
+                <a:latin typeface="Times New Roman" panose="02020603050405020304" pitchFamily="18" charset="0"/>
+                <a:ea typeface="Times New Roman"/>
+                <a:cs typeface="Times New Roman" panose="02020603050405020304" pitchFamily="18" charset="0"/>
+                <a:sym typeface="Times New Roman"/>
+              </a:rPr>
+              <a:t>Pull </a:t>
+            </a:r>
+            <a:r>
+              <a:rPr lang="en-US" sz="2800" dirty="0" err="1">
+                <a:solidFill>
+                  <a:srgbClr val="222222"/>
+                </a:solidFill>
+                <a:latin typeface="Times New Roman" panose="02020603050405020304" pitchFamily="18" charset="0"/>
+                <a:ea typeface="Times New Roman"/>
+                <a:cs typeface="Times New Roman" panose="02020603050405020304" pitchFamily="18" charset="0"/>
+                <a:sym typeface="Times New Roman"/>
+              </a:rPr>
+              <a:t>redis</a:t>
+            </a:r>
+            <a:r>
+              <a:rPr lang="en-US" sz="2800" dirty="0">
+                <a:solidFill>
+                  <a:srgbClr val="222222"/>
+                </a:solidFill>
+                <a:latin typeface="Times New Roman" panose="02020603050405020304" pitchFamily="18" charset="0"/>
+                <a:ea typeface="Times New Roman"/>
+                <a:cs typeface="Times New Roman" panose="02020603050405020304" pitchFamily="18" charset="0"/>
+                <a:sym typeface="Times New Roman"/>
+              </a:rPr>
+              <a:t>: key: </a:t>
+            </a:r>
+            <a:r>
+              <a:rPr lang="en-US" sz="2800" dirty="0" err="1">
+                <a:solidFill>
+                  <a:srgbClr val="222222"/>
+                </a:solidFill>
+                <a:latin typeface="Times New Roman" panose="02020603050405020304" pitchFamily="18" charset="0"/>
+                <a:ea typeface="Times New Roman"/>
+                <a:cs typeface="Times New Roman" panose="02020603050405020304" pitchFamily="18" charset="0"/>
+                <a:sym typeface="Times New Roman"/>
+              </a:rPr>
+              <a:t>xxxxx_response</a:t>
+            </a:r>
+            <a:r>
+              <a:rPr lang="en-US" sz="2800" dirty="0">
+                <a:solidFill>
+                  <a:srgbClr val="222222"/>
+                </a:solidFill>
+                <a:latin typeface="Times New Roman" panose="02020603050405020304" pitchFamily="18" charset="0"/>
+                <a:ea typeface="Times New Roman"/>
+                <a:cs typeface="Times New Roman" panose="02020603050405020304" pitchFamily="18" charset="0"/>
+                <a:sym typeface="Times New Roman"/>
+              </a:rPr>
+              <a:t>  : service </a:t>
+            </a:r>
+            <a:r>
+              <a:rPr lang="en-US" sz="2800" dirty="0" err="1">
+                <a:solidFill>
+                  <a:srgbClr val="222222"/>
+                </a:solidFill>
+                <a:latin typeface="Times New Roman" panose="02020603050405020304" pitchFamily="18" charset="0"/>
+                <a:ea typeface="Times New Roman"/>
+                <a:cs typeface="Times New Roman" panose="02020603050405020304" pitchFamily="18" charset="0"/>
+                <a:sym typeface="Times New Roman"/>
+              </a:rPr>
+              <a:t>sử</a:t>
+            </a:r>
+            <a:r>
+              <a:rPr lang="en-US" sz="2800" dirty="0">
+                <a:solidFill>
+                  <a:srgbClr val="222222"/>
+                </a:solidFill>
+                <a:latin typeface="Times New Roman" panose="02020603050405020304" pitchFamily="18" charset="0"/>
+                <a:ea typeface="Times New Roman"/>
+                <a:cs typeface="Times New Roman" panose="02020603050405020304" pitchFamily="18" charset="0"/>
+                <a:sym typeface="Times New Roman"/>
+              </a:rPr>
+              <a:t> </a:t>
+            </a:r>
+            <a:r>
+              <a:rPr lang="en-US" sz="2800" dirty="0" err="1">
+                <a:solidFill>
+                  <a:srgbClr val="222222"/>
+                </a:solidFill>
+                <a:latin typeface="Times New Roman" panose="02020603050405020304" pitchFamily="18" charset="0"/>
+                <a:ea typeface="Times New Roman"/>
+                <a:cs typeface="Times New Roman" panose="02020603050405020304" pitchFamily="18" charset="0"/>
+                <a:sym typeface="Times New Roman"/>
+              </a:rPr>
+              <a:t>lý</a:t>
+            </a:r>
+            <a:r>
+              <a:rPr lang="en-US" sz="2800" dirty="0">
+                <a:solidFill>
+                  <a:srgbClr val="222222"/>
+                </a:solidFill>
+                <a:latin typeface="Times New Roman" panose="02020603050405020304" pitchFamily="18" charset="0"/>
+                <a:ea typeface="Times New Roman"/>
+                <a:cs typeface="Times New Roman" panose="02020603050405020304" pitchFamily="18" charset="0"/>
+                <a:sym typeface="Times New Roman"/>
+              </a:rPr>
+              <a:t> business -&gt; key: </a:t>
+            </a:r>
+            <a:r>
+              <a:rPr lang="en-US" sz="2800" dirty="0" err="1">
+                <a:solidFill>
+                  <a:srgbClr val="222222"/>
+                </a:solidFill>
+                <a:latin typeface="Times New Roman" panose="02020603050405020304" pitchFamily="18" charset="0"/>
+                <a:ea typeface="Times New Roman"/>
+                <a:cs typeface="Times New Roman" panose="02020603050405020304" pitchFamily="18" charset="0"/>
+                <a:sym typeface="Times New Roman"/>
+              </a:rPr>
+              <a:t>xxxxx_response</a:t>
+            </a:r>
+            <a:r>
+              <a:rPr lang="en-US" sz="2800" dirty="0">
+                <a:solidFill>
+                  <a:srgbClr val="222222"/>
+                </a:solidFill>
+                <a:latin typeface="Times New Roman" panose="02020603050405020304" pitchFamily="18" charset="0"/>
+                <a:ea typeface="Times New Roman"/>
+                <a:cs typeface="Times New Roman" panose="02020603050405020304" pitchFamily="18" charset="0"/>
+                <a:sym typeface="Times New Roman"/>
+              </a:rPr>
+              <a:t>, value: message response</a:t>
+            </a:r>
+            <a:endParaRPr lang="vi-VN" sz="2800" dirty="0">
+              <a:solidFill>
+                <a:schemeClr val="dk1"/>
+              </a:solidFill>
+              <a:latin typeface="Times New Roman" panose="02020603050405020304" pitchFamily="18" charset="0"/>
+              <a:ea typeface="Times New Roman"/>
+              <a:cs typeface="Times New Roman" panose="02020603050405020304" pitchFamily="18" charset="0"/>
+              <a:sym typeface="Times New Roman"/>
+            </a:endParaRPr>
+          </a:p>
+        </p:txBody>
+      </p:sp>
+    </p:spTree>
+    <p:extLst>
+      <p:ext uri="{BB962C8B-B14F-4D97-AF65-F5344CB8AC3E}">
+        <p14:creationId xmlns:p14="http://schemas.microsoft.com/office/powerpoint/2010/main" val="927330923"/>
+      </p:ext>
+    </p:extLst>
+  </p:cSld>
+  <p:clrMapOvr>
+    <a:masterClrMapping/>
+  </p:clrMapOvr>
+  <mc:AlternateContent xmlns:mc="http://schemas.openxmlformats.org/markup-compatibility/2006">
+    <mc:Choice xmlns:p14="http://schemas.microsoft.com/office/powerpoint/2010/main" Requires="p14">
+      <p:transition spd="med" p14:dur="700">
+        <p:fade/>
+      </p:transition>
+    </mc:Choice>
+    <mc:Fallback>
+      <p:transition spd="med">
+        <p:fade/>
+      </p:transition>
+    </mc:Fallback>
+  </mc:AlternateContent>
+  <p:timing>
+    <p:tnLst>
+      <p:par>
+        <p:cTn id="1" dur="indefinite" restart="never" nodeType="tmRoot">
+          <p:childTnLst>
+            <p:seq concurrent="1" nextAc="seek">
+              <p:cTn id="2" dur="indefinite" nodeType="mainSeq">
+                <p:childTnLst>
+                  <p:par>
+                    <p:cTn id="3" fill="hold">
+                      <p:stCondLst>
+                        <p:cond delay="indefinite"/>
+                        <p:cond evt="onBegin" delay="0">
+                          <p:tn val="2"/>
+                        </p:cond>
+                      </p:stCondLst>
+                      <p:childTnLst>
+                        <p:par>
+                          <p:cTn id="4" fill="hold">
+                            <p:stCondLst>
+                              <p:cond delay="0"/>
+                            </p:stCondLst>
+                            <p:childTnLst>
+                              <p:par>
+                                <p:cTn id="5" presetID="2" presetClass="entr" presetSubtype="8" fill="hold" nodeType="withEffect">
+                                  <p:stCondLst>
+                                    <p:cond delay="0"/>
+                                  </p:stCondLst>
+                                  <p:childTnLst>
+                                    <p:set>
+                                      <p:cBhvr>
+                                        <p:cTn id="6" dur="1" fill="hold">
+                                          <p:stCondLst>
+                                            <p:cond delay="0"/>
+                                          </p:stCondLst>
+                                        </p:cTn>
+                                        <p:tgtEl>
+                                          <p:spTgt spid="193"/>
+                                        </p:tgtEl>
+                                        <p:attrNameLst>
+                                          <p:attrName>style.visibility</p:attrName>
+                                        </p:attrNameLst>
+                                      </p:cBhvr>
+                                      <p:to>
+                                        <p:strVal val="visible"/>
+                                      </p:to>
+                                    </p:set>
+                                    <p:anim calcmode="lin" valueType="num">
+                                      <p:cBhvr additive="base">
+                                        <p:cTn id="7" dur="500"/>
+                                        <p:tgtEl>
+                                          <p:spTgt spid="193"/>
+                                        </p:tgtEl>
+                                        <p:attrNameLst>
+                                          <p:attrName>ppt_x</p:attrName>
+                                        </p:attrNameLst>
+                                      </p:cBhvr>
+                                      <p:tavLst>
+                                        <p:tav tm="0">
+                                          <p:val>
+                                            <p:strVal val="#ppt_x-1"/>
+                                          </p:val>
+                                        </p:tav>
+                                        <p:tav tm="100000">
+                                          <p:val>
+                                            <p:strVal val="#ppt_x"/>
+                                          </p:val>
+                                        </p:tav>
+                                      </p:tavLst>
+                                    </p:anim>
+                                  </p:childTnLst>
+                                </p:cTn>
+                              </p:par>
+                              <p:par>
+                                <p:cTn id="8" presetID="2" presetClass="entr" presetSubtype="2" fill="hold" nodeType="withEffect">
+                                  <p:stCondLst>
+                                    <p:cond delay="0"/>
+                                  </p:stCondLst>
+                                  <p:childTnLst>
+                                    <p:set>
+                                      <p:cBhvr>
+                                        <p:cTn id="9" dur="1" fill="hold">
+                                          <p:stCondLst>
+                                            <p:cond delay="0"/>
+                                          </p:stCondLst>
+                                        </p:cTn>
+                                        <p:tgtEl>
+                                          <p:spTgt spid="190"/>
+                                        </p:tgtEl>
+                                        <p:attrNameLst>
+                                          <p:attrName>style.visibility</p:attrName>
+                                        </p:attrNameLst>
+                                      </p:cBhvr>
+                                      <p:to>
+                                        <p:strVal val="visible"/>
+                                      </p:to>
+                                    </p:set>
+                                    <p:anim calcmode="lin" valueType="num">
+                                      <p:cBhvr additive="base">
+                                        <p:cTn id="10" dur="500"/>
+                                        <p:tgtEl>
+                                          <p:spTgt spid="190"/>
+                                        </p:tgtEl>
+                                        <p:attrNameLst>
+                                          <p:attrName>ppt_x</p:attrName>
+                                        </p:attrNameLst>
+                                      </p:cBhvr>
+                                      <p:tavLst>
+                                        <p:tav tm="0">
+                                          <p:val>
+                                            <p:strVal val="#ppt_x+1"/>
+                                          </p:val>
+                                        </p:tav>
+                                        <p:tav tm="100000">
+                                          <p:val>
+                                            <p:strVal val="#ppt_x"/>
+                                          </p:val>
+                                        </p:tav>
+                                      </p:tavLst>
+                                    </p:anim>
                                   </p:childTnLst>
                                 </p:cTn>
                               </p:par>
